--- a/présentation-systèmes-design-agentique/présentation-systèmes-design-agentique.pptx
+++ b/présentation-systèmes-design-agentique/présentation-systèmes-design-agentique.pptx
@@ -5,23 +5,23 @@
     <p:sldMasterId id="2147483648" r:id="rId1"/>
   </p:sldMasterIdLst>
   <p:sldIdLst>
-    <p:sldId id="256" r:id="rId7"/>
-    <p:sldId id="257" r:id="rId8"/>
-    <p:sldId id="258" r:id="rId9"/>
-    <p:sldId id="259" r:id="rId10"/>
-    <p:sldId id="260" r:id="rId11"/>
-    <p:sldId id="261" r:id="rId12"/>
-    <p:sldId id="262" r:id="rId13"/>
-    <p:sldId id="263" r:id="rId14"/>
-    <p:sldId id="264" r:id="rId15"/>
-    <p:sldId id="265" r:id="rId16"/>
-    <p:sldId id="266" r:id="rId17"/>
-    <p:sldId id="267" r:id="rId18"/>
-    <p:sldId id="268" r:id="rId19"/>
-    <p:sldId id="269" r:id="rId20"/>
-    <p:sldId id="270" r:id="rId21"/>
+    <p:sldId id="256" r:id="rId2"/>
+    <p:sldId id="257" r:id="rId3"/>
+    <p:sldId id="258" r:id="rId4"/>
+    <p:sldId id="259" r:id="rId5"/>
+    <p:sldId id="260" r:id="rId6"/>
+    <p:sldId id="261" r:id="rId7"/>
+    <p:sldId id="262" r:id="rId8"/>
+    <p:sldId id="263" r:id="rId9"/>
+    <p:sldId id="264" r:id="rId10"/>
+    <p:sldId id="265" r:id="rId11"/>
+    <p:sldId id="266" r:id="rId12"/>
+    <p:sldId id="267" r:id="rId13"/>
+    <p:sldId id="268" r:id="rId14"/>
+    <p:sldId id="269" r:id="rId15"/>
+    <p:sldId id="270" r:id="rId16"/>
   </p:sldIdLst>
-  <p:sldSz cx="12192000" cy="6858000" type="screen4x3"/>
+  <p:sldSz cx="12192000" cy="6858000"/>
   <p:notesSz cx="6858000" cy="9144000"/>
   <p:defaultTextStyle>
     <a:defPPr>
@@ -118,6 +118,22 @@
       </a:defRPr>
     </a:lvl9pPr>
   </p:defaultTextStyle>
+  <p:extLst>
+    <p:ext uri="{EFAFB233-063F-42B5-8137-9DF3F51BA10A}">
+      <p15:sldGuideLst xmlns:p15="http://schemas.microsoft.com/office/powerpoint/2012/main">
+        <p15:guide id="1" orient="horz" pos="2160">
+          <p15:clr>
+            <a:srgbClr val="A4A3A4"/>
+          </p15:clr>
+        </p15:guide>
+        <p15:guide id="2" pos="2880">
+          <p15:clr>
+            <a:srgbClr val="A4A3A4"/>
+          </p15:clr>
+        </p15:guide>
+      </p15:sldGuideLst>
+    </p:ext>
+  </p:extLst>
 </p:presentation>
 </file>
 
@@ -159,10 +175,9 @@
           <a:lstStyle/>
           <a:p>
             <a:r>
-              <a:rPr lang="en-US" smtClean="0"/>
+              <a:rPr lang="en-US"/>
               <a:t>Click to edit Master title style</a:t>
             </a:r>
-            <a:endParaRPr lang="en-US"/>
           </a:p>
         </p:txBody>
       </p:sp>
@@ -278,10 +293,9 @@
           </a:lstStyle>
           <a:p>
             <a:r>
-              <a:rPr lang="en-US" smtClean="0"/>
+              <a:rPr lang="en-US"/>
               <a:t>Click to edit Master subtitle style</a:t>
             </a:r>
-            <a:endParaRPr lang="en-US"/>
           </a:p>
         </p:txBody>
       </p:sp>
@@ -302,7 +316,7 @@
           <a:p>
             <a:fld id="{5BCAD085-E8A6-8845-BD4E-CB4CCA059FC4}" type="datetimeFigureOut">
               <a:rPr lang="en-US" smtClean="0"/>
-              <a:t>1/27/13</a:t>
+              <a:t>5/11/2026</a:t>
             </a:fld>
             <a:endParaRPr lang="en-US"/>
           </a:p>
@@ -344,7 +358,7 @@
           <a:p>
             <a:fld id="{C1FF6DA9-008F-8B48-92A6-B652298478BF}" type="slidenum">
               <a:rPr lang="en-US" smtClean="0"/>
-              <a:t>‹#›</a:t>
+              <a:t>‹n°›</a:t>
             </a:fld>
             <a:endParaRPr lang="en-US"/>
           </a:p>
@@ -396,10 +410,9 @@
           <a:lstStyle/>
           <a:p>
             <a:r>
-              <a:rPr lang="en-US" smtClean="0"/>
+              <a:rPr lang="en-US"/>
               <a:t>Click to edit Master title style</a:t>
             </a:r>
-            <a:endParaRPr lang="en-US"/>
           </a:p>
         </p:txBody>
       </p:sp>
@@ -420,38 +433,37 @@
           <a:p>
             <a:pPr lvl="0"/>
             <a:r>
-              <a:rPr lang="en-US" smtClean="0"/>
+              <a:rPr lang="en-US"/>
               <a:t>Click to edit Master text styles</a:t>
             </a:r>
           </a:p>
           <a:p>
             <a:pPr lvl="1"/>
             <a:r>
-              <a:rPr lang="en-US" smtClean="0"/>
+              <a:rPr lang="en-US"/>
               <a:t>Second level</a:t>
             </a:r>
           </a:p>
           <a:p>
             <a:pPr lvl="2"/>
             <a:r>
-              <a:rPr lang="en-US" smtClean="0"/>
+              <a:rPr lang="en-US"/>
               <a:t>Third level</a:t>
             </a:r>
           </a:p>
           <a:p>
             <a:pPr lvl="3"/>
             <a:r>
-              <a:rPr lang="en-US" smtClean="0"/>
+              <a:rPr lang="en-US"/>
               <a:t>Fourth level</a:t>
             </a:r>
           </a:p>
           <a:p>
             <a:pPr lvl="4"/>
             <a:r>
-              <a:rPr lang="en-US" smtClean="0"/>
+              <a:rPr lang="en-US"/>
               <a:t>Fifth level</a:t>
             </a:r>
-            <a:endParaRPr lang="en-US"/>
           </a:p>
         </p:txBody>
       </p:sp>
@@ -472,7 +484,7 @@
           <a:p>
             <a:fld id="{5BCAD085-E8A6-8845-BD4E-CB4CCA059FC4}" type="datetimeFigureOut">
               <a:rPr lang="en-US" smtClean="0"/>
-              <a:t>1/27/13</a:t>
+              <a:t>5/11/2026</a:t>
             </a:fld>
             <a:endParaRPr lang="en-US"/>
           </a:p>
@@ -514,7 +526,7 @@
           <a:p>
             <a:fld id="{C1FF6DA9-008F-8B48-92A6-B652298478BF}" type="slidenum">
               <a:rPr lang="en-US" smtClean="0"/>
-              <a:t>‹#›</a:t>
+              <a:t>‹n°›</a:t>
             </a:fld>
             <a:endParaRPr lang="en-US"/>
           </a:p>
@@ -571,10 +583,9 @@
           <a:lstStyle/>
           <a:p>
             <a:r>
-              <a:rPr lang="en-US" smtClean="0"/>
+              <a:rPr lang="en-US"/>
               <a:t>Click to edit Master title style</a:t>
             </a:r>
-            <a:endParaRPr lang="en-US"/>
           </a:p>
         </p:txBody>
       </p:sp>
@@ -600,38 +611,37 @@
           <a:p>
             <a:pPr lvl="0"/>
             <a:r>
-              <a:rPr lang="en-US" smtClean="0"/>
+              <a:rPr lang="en-US"/>
               <a:t>Click to edit Master text styles</a:t>
             </a:r>
           </a:p>
           <a:p>
             <a:pPr lvl="1"/>
             <a:r>
-              <a:rPr lang="en-US" smtClean="0"/>
+              <a:rPr lang="en-US"/>
               <a:t>Second level</a:t>
             </a:r>
           </a:p>
           <a:p>
             <a:pPr lvl="2"/>
             <a:r>
-              <a:rPr lang="en-US" smtClean="0"/>
+              <a:rPr lang="en-US"/>
               <a:t>Third level</a:t>
             </a:r>
           </a:p>
           <a:p>
             <a:pPr lvl="3"/>
             <a:r>
-              <a:rPr lang="en-US" smtClean="0"/>
+              <a:rPr lang="en-US"/>
               <a:t>Fourth level</a:t>
             </a:r>
           </a:p>
           <a:p>
             <a:pPr lvl="4"/>
             <a:r>
-              <a:rPr lang="en-US" smtClean="0"/>
+              <a:rPr lang="en-US"/>
               <a:t>Fifth level</a:t>
             </a:r>
-            <a:endParaRPr lang="en-US"/>
           </a:p>
         </p:txBody>
       </p:sp>
@@ -652,7 +662,7 @@
           <a:p>
             <a:fld id="{5BCAD085-E8A6-8845-BD4E-CB4CCA059FC4}" type="datetimeFigureOut">
               <a:rPr lang="en-US" smtClean="0"/>
-              <a:t>1/27/13</a:t>
+              <a:t>5/11/2026</a:t>
             </a:fld>
             <a:endParaRPr lang="en-US"/>
           </a:p>
@@ -694,7 +704,7 @@
           <a:p>
             <a:fld id="{C1FF6DA9-008F-8B48-92A6-B652298478BF}" type="slidenum">
               <a:rPr lang="en-US" smtClean="0"/>
-              <a:t>‹#›</a:t>
+              <a:t>‹n°›</a:t>
             </a:fld>
             <a:endParaRPr lang="en-US"/>
           </a:p>
@@ -746,10 +756,9 @@
           <a:lstStyle/>
           <a:p>
             <a:r>
-              <a:rPr lang="en-US" smtClean="0"/>
+              <a:rPr lang="en-US"/>
               <a:t>Click to edit Master title style</a:t>
             </a:r>
-            <a:endParaRPr lang="en-US"/>
           </a:p>
         </p:txBody>
       </p:sp>
@@ -770,38 +779,37 @@
           <a:p>
             <a:pPr lvl="0"/>
             <a:r>
-              <a:rPr lang="en-US" smtClean="0"/>
+              <a:rPr lang="en-US"/>
               <a:t>Click to edit Master text styles</a:t>
             </a:r>
           </a:p>
           <a:p>
             <a:pPr lvl="1"/>
             <a:r>
-              <a:rPr lang="en-US" smtClean="0"/>
+              <a:rPr lang="en-US"/>
               <a:t>Second level</a:t>
             </a:r>
           </a:p>
           <a:p>
             <a:pPr lvl="2"/>
             <a:r>
-              <a:rPr lang="en-US" smtClean="0"/>
+              <a:rPr lang="en-US"/>
               <a:t>Third level</a:t>
             </a:r>
           </a:p>
           <a:p>
             <a:pPr lvl="3"/>
             <a:r>
-              <a:rPr lang="en-US" smtClean="0"/>
+              <a:rPr lang="en-US"/>
               <a:t>Fourth level</a:t>
             </a:r>
           </a:p>
           <a:p>
             <a:pPr lvl="4"/>
             <a:r>
-              <a:rPr lang="en-US" smtClean="0"/>
+              <a:rPr lang="en-US"/>
               <a:t>Fifth level</a:t>
             </a:r>
-            <a:endParaRPr lang="en-US"/>
           </a:p>
         </p:txBody>
       </p:sp>
@@ -822,7 +830,7 @@
           <a:p>
             <a:fld id="{5BCAD085-E8A6-8845-BD4E-CB4CCA059FC4}" type="datetimeFigureOut">
               <a:rPr lang="en-US" smtClean="0"/>
-              <a:t>1/27/13</a:t>
+              <a:t>5/11/2026</a:t>
             </a:fld>
             <a:endParaRPr lang="en-US"/>
           </a:p>
@@ -864,7 +872,7 @@
           <a:p>
             <a:fld id="{C1FF6DA9-008F-8B48-92A6-B652298478BF}" type="slidenum">
               <a:rPr lang="en-US" smtClean="0"/>
-              <a:t>‹#›</a:t>
+              <a:t>‹n°›</a:t>
             </a:fld>
             <a:endParaRPr lang="en-US"/>
           </a:p>
@@ -925,10 +933,9 @@
           </a:lstStyle>
           <a:p>
             <a:r>
-              <a:rPr lang="en-US" smtClean="0"/>
+              <a:rPr lang="en-US"/>
               <a:t>Click to edit Master title style</a:t>
             </a:r>
-            <a:endParaRPr lang="en-US"/>
           </a:p>
         </p:txBody>
       </p:sp>
@@ -1045,7 +1052,7 @@
           <a:p>
             <a:pPr lvl="0"/>
             <a:r>
-              <a:rPr lang="en-US" smtClean="0"/>
+              <a:rPr lang="en-US"/>
               <a:t>Click to edit Master text styles</a:t>
             </a:r>
           </a:p>
@@ -1068,7 +1075,7 @@
           <a:p>
             <a:fld id="{5BCAD085-E8A6-8845-BD4E-CB4CCA059FC4}" type="datetimeFigureOut">
               <a:rPr lang="en-US" smtClean="0"/>
-              <a:t>1/27/13</a:t>
+              <a:t>5/11/2026</a:t>
             </a:fld>
             <a:endParaRPr lang="en-US"/>
           </a:p>
@@ -1110,7 +1117,7 @@
           <a:p>
             <a:fld id="{C1FF6DA9-008F-8B48-92A6-B652298478BF}" type="slidenum">
               <a:rPr lang="en-US" smtClean="0"/>
-              <a:t>‹#›</a:t>
+              <a:t>‹n°›</a:t>
             </a:fld>
             <a:endParaRPr lang="en-US"/>
           </a:p>
@@ -1162,10 +1169,9 @@
           <a:lstStyle/>
           <a:p>
             <a:r>
-              <a:rPr lang="en-US" smtClean="0"/>
+              <a:rPr lang="en-US"/>
               <a:t>Click to edit Master title style</a:t>
             </a:r>
-            <a:endParaRPr lang="en-US"/>
           </a:p>
         </p:txBody>
       </p:sp>
@@ -1219,38 +1225,37 @@
           <a:p>
             <a:pPr lvl="0"/>
             <a:r>
-              <a:rPr lang="en-US" smtClean="0"/>
+              <a:rPr lang="en-US"/>
               <a:t>Click to edit Master text styles</a:t>
             </a:r>
           </a:p>
           <a:p>
             <a:pPr lvl="1"/>
             <a:r>
-              <a:rPr lang="en-US" smtClean="0"/>
+              <a:rPr lang="en-US"/>
               <a:t>Second level</a:t>
             </a:r>
           </a:p>
           <a:p>
             <a:pPr lvl="2"/>
             <a:r>
-              <a:rPr lang="en-US" smtClean="0"/>
+              <a:rPr lang="en-US"/>
               <a:t>Third level</a:t>
             </a:r>
           </a:p>
           <a:p>
             <a:pPr lvl="3"/>
             <a:r>
-              <a:rPr lang="en-US" smtClean="0"/>
+              <a:rPr lang="en-US"/>
               <a:t>Fourth level</a:t>
             </a:r>
           </a:p>
           <a:p>
             <a:pPr lvl="4"/>
             <a:r>
-              <a:rPr lang="en-US" smtClean="0"/>
+              <a:rPr lang="en-US"/>
               <a:t>Fifth level</a:t>
             </a:r>
-            <a:endParaRPr lang="en-US"/>
           </a:p>
         </p:txBody>
       </p:sp>
@@ -1304,38 +1309,37 @@
           <a:p>
             <a:pPr lvl="0"/>
             <a:r>
-              <a:rPr lang="en-US" smtClean="0"/>
+              <a:rPr lang="en-US"/>
               <a:t>Click to edit Master text styles</a:t>
             </a:r>
           </a:p>
           <a:p>
             <a:pPr lvl="1"/>
             <a:r>
-              <a:rPr lang="en-US" smtClean="0"/>
+              <a:rPr lang="en-US"/>
               <a:t>Second level</a:t>
             </a:r>
           </a:p>
           <a:p>
             <a:pPr lvl="2"/>
             <a:r>
-              <a:rPr lang="en-US" smtClean="0"/>
+              <a:rPr lang="en-US"/>
               <a:t>Third level</a:t>
             </a:r>
           </a:p>
           <a:p>
             <a:pPr lvl="3"/>
             <a:r>
-              <a:rPr lang="en-US" smtClean="0"/>
+              <a:rPr lang="en-US"/>
               <a:t>Fourth level</a:t>
             </a:r>
           </a:p>
           <a:p>
             <a:pPr lvl="4"/>
             <a:r>
-              <a:rPr lang="en-US" smtClean="0"/>
+              <a:rPr lang="en-US"/>
               <a:t>Fifth level</a:t>
             </a:r>
-            <a:endParaRPr lang="en-US"/>
           </a:p>
         </p:txBody>
       </p:sp>
@@ -1356,7 +1360,7 @@
           <a:p>
             <a:fld id="{5BCAD085-E8A6-8845-BD4E-CB4CCA059FC4}" type="datetimeFigureOut">
               <a:rPr lang="en-US" smtClean="0"/>
-              <a:t>1/27/13</a:t>
+              <a:t>5/11/2026</a:t>
             </a:fld>
             <a:endParaRPr lang="en-US"/>
           </a:p>
@@ -1398,7 +1402,7 @@
           <a:p>
             <a:fld id="{C1FF6DA9-008F-8B48-92A6-B652298478BF}" type="slidenum">
               <a:rPr lang="en-US" smtClean="0"/>
-              <a:t>‹#›</a:t>
+              <a:t>‹n°›</a:t>
             </a:fld>
             <a:endParaRPr lang="en-US"/>
           </a:p>
@@ -1454,10 +1458,9 @@
           </a:lstStyle>
           <a:p>
             <a:r>
-              <a:rPr lang="en-US" smtClean="0"/>
+              <a:rPr lang="en-US"/>
               <a:t>Click to edit Master title style</a:t>
             </a:r>
-            <a:endParaRPr lang="en-US"/>
           </a:p>
         </p:txBody>
       </p:sp>
@@ -1520,7 +1523,7 @@
           <a:p>
             <a:pPr lvl="0"/>
             <a:r>
-              <a:rPr lang="en-US" smtClean="0"/>
+              <a:rPr lang="en-US"/>
               <a:t>Click to edit Master text styles</a:t>
             </a:r>
           </a:p>
@@ -1576,38 +1579,37 @@
           <a:p>
             <a:pPr lvl="0"/>
             <a:r>
-              <a:rPr lang="en-US" smtClean="0"/>
+              <a:rPr lang="en-US"/>
               <a:t>Click to edit Master text styles</a:t>
             </a:r>
           </a:p>
           <a:p>
             <a:pPr lvl="1"/>
             <a:r>
-              <a:rPr lang="en-US" smtClean="0"/>
+              <a:rPr lang="en-US"/>
               <a:t>Second level</a:t>
             </a:r>
           </a:p>
           <a:p>
             <a:pPr lvl="2"/>
             <a:r>
-              <a:rPr lang="en-US" smtClean="0"/>
+              <a:rPr lang="en-US"/>
               <a:t>Third level</a:t>
             </a:r>
           </a:p>
           <a:p>
             <a:pPr lvl="3"/>
             <a:r>
-              <a:rPr lang="en-US" smtClean="0"/>
+              <a:rPr lang="en-US"/>
               <a:t>Fourth level</a:t>
             </a:r>
           </a:p>
           <a:p>
             <a:pPr lvl="4"/>
             <a:r>
-              <a:rPr lang="en-US" smtClean="0"/>
+              <a:rPr lang="en-US"/>
               <a:t>Fifth level</a:t>
             </a:r>
-            <a:endParaRPr lang="en-US"/>
           </a:p>
         </p:txBody>
       </p:sp>
@@ -1670,7 +1672,7 @@
           <a:p>
             <a:pPr lvl="0"/>
             <a:r>
-              <a:rPr lang="en-US" smtClean="0"/>
+              <a:rPr lang="en-US"/>
               <a:t>Click to edit Master text styles</a:t>
             </a:r>
           </a:p>
@@ -1726,38 +1728,37 @@
           <a:p>
             <a:pPr lvl="0"/>
             <a:r>
-              <a:rPr lang="en-US" smtClean="0"/>
+              <a:rPr lang="en-US"/>
               <a:t>Click to edit Master text styles</a:t>
             </a:r>
           </a:p>
           <a:p>
             <a:pPr lvl="1"/>
             <a:r>
-              <a:rPr lang="en-US" smtClean="0"/>
+              <a:rPr lang="en-US"/>
               <a:t>Second level</a:t>
             </a:r>
           </a:p>
           <a:p>
             <a:pPr lvl="2"/>
             <a:r>
-              <a:rPr lang="en-US" smtClean="0"/>
+              <a:rPr lang="en-US"/>
               <a:t>Third level</a:t>
             </a:r>
           </a:p>
           <a:p>
             <a:pPr lvl="3"/>
             <a:r>
-              <a:rPr lang="en-US" smtClean="0"/>
+              <a:rPr lang="en-US"/>
               <a:t>Fourth level</a:t>
             </a:r>
           </a:p>
           <a:p>
             <a:pPr lvl="4"/>
             <a:r>
-              <a:rPr lang="en-US" smtClean="0"/>
+              <a:rPr lang="en-US"/>
               <a:t>Fifth level</a:t>
             </a:r>
-            <a:endParaRPr lang="en-US"/>
           </a:p>
         </p:txBody>
       </p:sp>
@@ -1778,7 +1779,7 @@
           <a:p>
             <a:fld id="{5BCAD085-E8A6-8845-BD4E-CB4CCA059FC4}" type="datetimeFigureOut">
               <a:rPr lang="en-US" smtClean="0"/>
-              <a:t>1/27/13</a:t>
+              <a:t>5/11/2026</a:t>
             </a:fld>
             <a:endParaRPr lang="en-US"/>
           </a:p>
@@ -1820,7 +1821,7 @@
           <a:p>
             <a:fld id="{C1FF6DA9-008F-8B48-92A6-B652298478BF}" type="slidenum">
               <a:rPr lang="en-US" smtClean="0"/>
-              <a:t>‹#›</a:t>
+              <a:t>‹n°›</a:t>
             </a:fld>
             <a:endParaRPr lang="en-US"/>
           </a:p>
@@ -1872,10 +1873,9 @@
           <a:lstStyle/>
           <a:p>
             <a:r>
-              <a:rPr lang="en-US" smtClean="0"/>
+              <a:rPr lang="en-US"/>
               <a:t>Click to edit Master title style</a:t>
             </a:r>
-            <a:endParaRPr lang="en-US"/>
           </a:p>
         </p:txBody>
       </p:sp>
@@ -1896,7 +1896,7 @@
           <a:p>
             <a:fld id="{5BCAD085-E8A6-8845-BD4E-CB4CCA059FC4}" type="datetimeFigureOut">
               <a:rPr lang="en-US" smtClean="0"/>
-              <a:t>1/27/13</a:t>
+              <a:t>5/11/2026</a:t>
             </a:fld>
             <a:endParaRPr lang="en-US"/>
           </a:p>
@@ -1938,7 +1938,7 @@
           <a:p>
             <a:fld id="{C1FF6DA9-008F-8B48-92A6-B652298478BF}" type="slidenum">
               <a:rPr lang="en-US" smtClean="0"/>
-              <a:t>‹#›</a:t>
+              <a:t>‹n°›</a:t>
             </a:fld>
             <a:endParaRPr lang="en-US"/>
           </a:p>
@@ -1991,7 +1991,7 @@
           <a:p>
             <a:fld id="{5BCAD085-E8A6-8845-BD4E-CB4CCA059FC4}" type="datetimeFigureOut">
               <a:rPr lang="en-US" smtClean="0"/>
-              <a:t>1/27/13</a:t>
+              <a:t>5/11/2026</a:t>
             </a:fld>
             <a:endParaRPr lang="en-US"/>
           </a:p>
@@ -2033,7 +2033,7 @@
           <a:p>
             <a:fld id="{C1FF6DA9-008F-8B48-92A6-B652298478BF}" type="slidenum">
               <a:rPr lang="en-US" smtClean="0"/>
-              <a:t>‹#›</a:t>
+              <a:t>‹n°›</a:t>
             </a:fld>
             <a:endParaRPr lang="en-US"/>
           </a:p>
@@ -2094,10 +2094,9 @@
           </a:lstStyle>
           <a:p>
             <a:r>
-              <a:rPr lang="en-US" smtClean="0"/>
+              <a:rPr lang="en-US"/>
               <a:t>Click to edit Master title style</a:t>
             </a:r>
-            <a:endParaRPr lang="en-US"/>
           </a:p>
         </p:txBody>
       </p:sp>
@@ -2151,38 +2150,37 @@
           <a:p>
             <a:pPr lvl="0"/>
             <a:r>
-              <a:rPr lang="en-US" smtClean="0"/>
+              <a:rPr lang="en-US"/>
               <a:t>Click to edit Master text styles</a:t>
             </a:r>
           </a:p>
           <a:p>
             <a:pPr lvl="1"/>
             <a:r>
-              <a:rPr lang="en-US" smtClean="0"/>
+              <a:rPr lang="en-US"/>
               <a:t>Second level</a:t>
             </a:r>
           </a:p>
           <a:p>
             <a:pPr lvl="2"/>
             <a:r>
-              <a:rPr lang="en-US" smtClean="0"/>
+              <a:rPr lang="en-US"/>
               <a:t>Third level</a:t>
             </a:r>
           </a:p>
           <a:p>
             <a:pPr lvl="3"/>
             <a:r>
-              <a:rPr lang="en-US" smtClean="0"/>
+              <a:rPr lang="en-US"/>
               <a:t>Fourth level</a:t>
             </a:r>
           </a:p>
           <a:p>
             <a:pPr lvl="4"/>
             <a:r>
-              <a:rPr lang="en-US" smtClean="0"/>
+              <a:rPr lang="en-US"/>
               <a:t>Fifth level</a:t>
             </a:r>
-            <a:endParaRPr lang="en-US"/>
           </a:p>
         </p:txBody>
       </p:sp>
@@ -2245,7 +2243,7 @@
           <a:p>
             <a:pPr lvl="0"/>
             <a:r>
-              <a:rPr lang="en-US" smtClean="0"/>
+              <a:rPr lang="en-US"/>
               <a:t>Click to edit Master text styles</a:t>
             </a:r>
           </a:p>
@@ -2268,7 +2266,7 @@
           <a:p>
             <a:fld id="{5BCAD085-E8A6-8845-BD4E-CB4CCA059FC4}" type="datetimeFigureOut">
               <a:rPr lang="en-US" smtClean="0"/>
-              <a:t>1/27/13</a:t>
+              <a:t>5/11/2026</a:t>
             </a:fld>
             <a:endParaRPr lang="en-US"/>
           </a:p>
@@ -2310,7 +2308,7 @@
           <a:p>
             <a:fld id="{C1FF6DA9-008F-8B48-92A6-B652298478BF}" type="slidenum">
               <a:rPr lang="en-US" smtClean="0"/>
-              <a:t>‹#›</a:t>
+              <a:t>‹n°›</a:t>
             </a:fld>
             <a:endParaRPr lang="en-US"/>
           </a:p>
@@ -2371,10 +2369,9 @@
           </a:lstStyle>
           <a:p>
             <a:r>
-              <a:rPr lang="en-US" smtClean="0"/>
+              <a:rPr lang="en-US"/>
               <a:t>Click to edit Master title style</a:t>
             </a:r>
-            <a:endParaRPr lang="en-US"/>
           </a:p>
         </p:txBody>
       </p:sp>
@@ -2498,7 +2495,7 @@
           <a:p>
             <a:pPr lvl="0"/>
             <a:r>
-              <a:rPr lang="en-US" smtClean="0"/>
+              <a:rPr lang="en-US"/>
               <a:t>Click to edit Master text styles</a:t>
             </a:r>
           </a:p>
@@ -2521,7 +2518,7 @@
           <a:p>
             <a:fld id="{5BCAD085-E8A6-8845-BD4E-CB4CCA059FC4}" type="datetimeFigureOut">
               <a:rPr lang="en-US" smtClean="0"/>
-              <a:t>1/27/13</a:t>
+              <a:t>5/11/2026</a:t>
             </a:fld>
             <a:endParaRPr lang="en-US"/>
           </a:p>
@@ -2563,7 +2560,7 @@
           <a:p>
             <a:fld id="{C1FF6DA9-008F-8B48-92A6-B652298478BF}" type="slidenum">
               <a:rPr lang="en-US" smtClean="0"/>
-              <a:t>‹#›</a:t>
+              <a:t>‹n°›</a:t>
             </a:fld>
             <a:endParaRPr lang="en-US"/>
           </a:p>
@@ -2630,10 +2627,9 @@
           <a:lstStyle/>
           <a:p>
             <a:r>
-              <a:rPr lang="en-US" smtClean="0"/>
+              <a:rPr lang="en-US"/>
               <a:t>Click to edit Master title style</a:t>
             </a:r>
-            <a:endParaRPr lang="en-US"/>
           </a:p>
         </p:txBody>
       </p:sp>
@@ -2664,38 +2660,37 @@
           <a:p>
             <a:pPr lvl="0"/>
             <a:r>
-              <a:rPr lang="en-US" smtClean="0"/>
+              <a:rPr lang="en-US"/>
               <a:t>Click to edit Master text styles</a:t>
             </a:r>
           </a:p>
           <a:p>
             <a:pPr lvl="1"/>
             <a:r>
-              <a:rPr lang="en-US" smtClean="0"/>
+              <a:rPr lang="en-US"/>
               <a:t>Second level</a:t>
             </a:r>
           </a:p>
           <a:p>
             <a:pPr lvl="2"/>
             <a:r>
-              <a:rPr lang="en-US" smtClean="0"/>
+              <a:rPr lang="en-US"/>
               <a:t>Third level</a:t>
             </a:r>
           </a:p>
           <a:p>
             <a:pPr lvl="3"/>
             <a:r>
-              <a:rPr lang="en-US" smtClean="0"/>
+              <a:rPr lang="en-US"/>
               <a:t>Fourth level</a:t>
             </a:r>
           </a:p>
           <a:p>
             <a:pPr lvl="4"/>
             <a:r>
-              <a:rPr lang="en-US" smtClean="0"/>
+              <a:rPr lang="en-US"/>
               <a:t>Fifth level</a:t>
             </a:r>
-            <a:endParaRPr lang="en-US"/>
           </a:p>
         </p:txBody>
       </p:sp>
@@ -2734,7 +2729,7 @@
           <a:p>
             <a:fld id="{5BCAD085-E8A6-8845-BD4E-CB4CCA059FC4}" type="datetimeFigureOut">
               <a:rPr lang="en-US" smtClean="0"/>
-              <a:t>1/27/13</a:t>
+              <a:t>5/11/2026</a:t>
             </a:fld>
             <a:endParaRPr lang="en-US"/>
           </a:p>
@@ -2812,7 +2807,7 @@
           <a:p>
             <a:fld id="{C1FF6DA9-008F-8B48-92A6-B652298478BF}" type="slidenum">
               <a:rPr lang="en-US" smtClean="0"/>
-              <a:t>‹#›</a:t>
+              <a:t>‹n°›</a:t>
             </a:fld>
             <a:endParaRPr lang="en-US"/>
           </a:p>
@@ -3093,7 +3088,7 @@
 </file>
 
 <file path=ppt/slides/slide1.xml><?xml version="1.0" encoding="utf-8"?>
-<p:sld xmlns:a="http://schemas.openxmlformats.org/drawingml/2006/main" xmlns:p="http://schemas.openxmlformats.org/presentationml/2006/main" xmlns:r="http://schemas.openxmlformats.org/officeDocument/2006/relationships">
+<p:sld xmlns:a="http://schemas.openxmlformats.org/drawingml/2006/main" xmlns:r="http://schemas.openxmlformats.org/officeDocument/2006/relationships" xmlns:p="http://schemas.openxmlformats.org/presentationml/2006/main">
   <p:cSld>
     <p:bg>
       <p:bgPr>
@@ -3109,7 +3104,14 @@
         <p:cNvGrpSpPr/>
         <p:nvPr/>
       </p:nvGrpSpPr>
-      <p:grpSpPr/>
+      <p:grpSpPr>
+        <a:xfrm>
+          <a:off x="0" y="0"/>
+          <a:ext cx="0" cy="0"/>
+          <a:chOff x="0" y="0"/>
+          <a:chExt cx="0" cy="0"/>
+        </a:xfrm>
+      </p:grpSpPr>
       <p:sp>
         <p:nvSpPr>
           <p:cNvPr id="2" name="Rectangle 1"/>
@@ -3150,6 +3152,7 @@
           <a:lstStyle/>
           <a:p>
             <a:pPr algn="ctr"/>
+            <a:endParaRPr/>
           </a:p>
         </p:txBody>
       </p:sp>
@@ -3161,8 +3164,8 @@
         </p:nvSpPr>
         <p:spPr>
           <a:xfrm>
-            <a:off x="647700" y="495300"/>
-            <a:ext cx="6286500" cy="190500"/>
+            <a:off x="647700" y="1758950"/>
+            <a:ext cx="6286500" cy="230832"/>
           </a:xfrm>
           <a:prstGeom prst="rect">
             <a:avLst/>
@@ -3177,7 +3180,7 @@
           <a:p>
             <a:pPr algn="l"/>
             <a:r>
-              <a:rPr sz="900" b="0" i="0">
+              <a:rPr sz="900" b="0" i="0" spc="300" dirty="0">
                 <a:solidFill>
                   <a:srgbClr val="B8CCEE"/>
                 </a:solidFill>
@@ -3190,14 +3193,14 @@
       </p:sp>
       <p:sp>
         <p:nvSpPr>
-          <p:cNvPr id="4" name="TextBox 3"/>
+          <p:cNvPr id="6" name="TextBox 5"/>
           <p:cNvSpPr txBox="1"/>
           <p:nvPr/>
         </p:nvSpPr>
         <p:spPr>
           <a:xfrm>
-            <a:off x="647700" y="704850"/>
-            <a:ext cx="6286500" cy="1047750"/>
+            <a:off x="647700" y="6123390"/>
+            <a:ext cx="6286500" cy="276999"/>
           </a:xfrm>
           <a:prstGeom prst="rect">
             <a:avLst/>
@@ -3210,130 +3213,48 @@
           </a:bodyPr>
           <a:lstStyle/>
           <a:p>
-            <a:pPr algn="l"/>
-            <a:r>
-              <a:rPr sz="4400" b="1">
-                <a:solidFill>
-                  <a:srgbClr val="EEF3FF"/>
-                </a:solidFill>
-                <a:latin typeface="Atkinson Hyperlegible"/>
-              </a:rPr>
-              <a:t>Qu'est-ce qu'un</a:t>
-            </a:r>
-          </a:p>
-          <a:p>
-            <a:pPr algn="l"/>
-            <a:r>
-              <a:rPr sz="4400" b="1">
-                <a:solidFill>
-                  <a:srgbClr val="EEF3FF"/>
-                </a:solidFill>
-                <a:latin typeface="Atkinson Hyperlegible"/>
-              </a:rPr>
-              <a:t>système de design</a:t>
-            </a:r>
-          </a:p>
-          <a:p>
-            <a:pPr algn="l"/>
-            <a:r>
-              <a:rPr sz="4400" b="1">
-                <a:solidFill>
-                  <a:srgbClr val="14D9C8"/>
-                </a:solidFill>
-                <a:latin typeface="Atkinson Hyperlegible"/>
-              </a:rPr>
-              <a:t>agentique</a:t>
-            </a:r>
-            <a:r>
-              <a:rPr sz="4400" b="1">
-                <a:solidFill>
-                  <a:srgbClr val="EEF3FF"/>
-                </a:solidFill>
-                <a:latin typeface="Atkinson Hyperlegible"/>
-              </a:rPr>
-              <a:t>…</a:t>
-            </a:r>
-          </a:p>
-          <a:p>
-            <a:pPr algn="l"/>
-            <a:r>
-              <a:rPr sz="4400" b="1">
-                <a:solidFill>
-                  <a:srgbClr val="EEF3FF"/>
-                </a:solidFill>
-                <a:latin typeface="Atkinson Hyperlegible"/>
-              </a:rPr>
-              <a:t>vraiment ?</a:t>
-            </a:r>
-          </a:p>
-        </p:txBody>
-      </p:sp>
-      <p:sp>
-        <p:nvSpPr>
-          <p:cNvPr id="5" name="TextBox 4"/>
-          <p:cNvSpPr txBox="1"/>
-          <p:nvPr/>
-        </p:nvSpPr>
-        <p:spPr>
-          <a:xfrm>
-            <a:off x="647700" y="1943100"/>
-            <a:ext cx="6286500" cy="228600"/>
-          </a:xfrm>
-          <a:prstGeom prst="rect">
-            <a:avLst/>
-          </a:prstGeom>
-          <a:noFill/>
-        </p:spPr>
-        <p:txBody>
-          <a:bodyPr wrap="square">
-            <a:spAutoFit/>
-          </a:bodyPr>
-          <a:lstStyle/>
-          <a:p>
-            <a:pPr algn="l"/>
-            <a:r>
-              <a:rPr sz="1200" b="0" i="0">
+            <a:r>
+              <a:rPr sz="1200" dirty="0">
                 <a:solidFill>
                   <a:srgbClr val="7A90B8"/>
                 </a:solidFill>
                 <a:latin typeface="DM Sans"/>
               </a:rPr>
-              <a:t>Guilherme Negreiros — 30 avril 2026</a:t>
-            </a:r>
-          </a:p>
-        </p:txBody>
-      </p:sp>
-      <p:sp>
-        <p:nvSpPr>
-          <p:cNvPr id="6" name="TextBox 5"/>
-          <p:cNvSpPr txBox="1"/>
-          <p:nvPr/>
-        </p:nvSpPr>
-        <p:spPr>
-          <a:xfrm>
-            <a:off x="647700" y="2209800"/>
-            <a:ext cx="6286500" cy="533400"/>
-          </a:xfrm>
-          <a:prstGeom prst="rect">
-            <a:avLst/>
-          </a:prstGeom>
-          <a:noFill/>
-        </p:spPr>
-        <p:txBody>
-          <a:bodyPr wrap="square">
-            <a:spAutoFit/>
-          </a:bodyPr>
-          <a:lstStyle/>
-          <a:p>
-            <a:r>
-              <a:rPr sz="1200">
+              <a:t>Guilherme Negreiros — 30 </a:t>
+            </a:r>
+            <a:r>
+              <a:rPr sz="1200" dirty="0" err="1">
                 <a:solidFill>
                   <a:srgbClr val="7A90B8"/>
                 </a:solidFill>
                 <a:latin typeface="DM Sans"/>
               </a:rPr>
-              <a:t>Guilherme Negreiros — 30 avril 2026</a:t>
-            </a:r>
+              <a:t>avril</a:t>
+            </a:r>
+            <a:r>
+              <a:rPr sz="1200" dirty="0">
+                <a:solidFill>
+                  <a:srgbClr val="7A90B8"/>
+                </a:solidFill>
+                <a:latin typeface="DM Sans"/>
+              </a:rPr>
+              <a:t> 202</a:t>
+            </a:r>
+            <a:r>
+              <a:rPr lang="fr-CA" sz="1200" dirty="0">
+                <a:solidFill>
+                  <a:srgbClr val="7A90B8"/>
+                </a:solidFill>
+                <a:latin typeface="DM Sans"/>
+              </a:rPr>
+              <a:t>6</a:t>
+            </a:r>
+            <a:endParaRPr sz="1200" dirty="0">
+              <a:solidFill>
+                <a:srgbClr val="7A90B8"/>
+              </a:solidFill>
+              <a:latin typeface="DM Sans"/>
+            </a:endParaRPr>
           </a:p>
         </p:txBody>
       </p:sp>
@@ -3377,6 +3298,7 @@
           <a:lstStyle/>
           <a:p>
             <a:pPr algn="ctr"/>
+            <a:endParaRPr/>
           </a:p>
         </p:txBody>
       </p:sp>
@@ -3404,6 +3326,127 @@
           </a:prstGeom>
         </p:spPr>
       </p:pic>
+      <p:sp>
+        <p:nvSpPr>
+          <p:cNvPr id="4" name="TextBox 3"/>
+          <p:cNvSpPr txBox="1"/>
+          <p:nvPr/>
+        </p:nvSpPr>
+        <p:spPr>
+          <a:xfrm>
+            <a:off x="647700" y="1968500"/>
+            <a:ext cx="6448425" cy="2800767"/>
+          </a:xfrm>
+          <a:prstGeom prst="rect">
+            <a:avLst/>
+          </a:prstGeom>
+          <a:noFill/>
+        </p:spPr>
+        <p:txBody>
+          <a:bodyPr wrap="square">
+            <a:spAutoFit/>
+          </a:bodyPr>
+          <a:lstStyle/>
+          <a:p>
+            <a:r>
+              <a:rPr sz="4400" b="1" dirty="0" err="1">
+                <a:solidFill>
+                  <a:srgbClr val="EEF3FF"/>
+                </a:solidFill>
+                <a:latin typeface="Atkinson Hyperlegible"/>
+              </a:rPr>
+              <a:t>Qu'est-ce</a:t>
+            </a:r>
+            <a:r>
+              <a:rPr sz="4400" b="1" dirty="0">
+                <a:solidFill>
+                  <a:srgbClr val="EEF3FF"/>
+                </a:solidFill>
+                <a:latin typeface="Atkinson Hyperlegible"/>
+              </a:rPr>
+              <a:t> </a:t>
+            </a:r>
+            <a:r>
+              <a:rPr sz="4400" b="1" dirty="0" err="1">
+                <a:solidFill>
+                  <a:srgbClr val="EEF3FF"/>
+                </a:solidFill>
+                <a:latin typeface="Atkinson Hyperlegible"/>
+              </a:rPr>
+              <a:t>qu’un</a:t>
+            </a:r>
+            <a:r>
+              <a:rPr lang="fr-CA" sz="4400" b="1" dirty="0">
+                <a:solidFill>
+                  <a:srgbClr val="EEF3FF"/>
+                </a:solidFill>
+                <a:latin typeface="Atkinson Hyperlegible"/>
+              </a:rPr>
+              <a:t> </a:t>
+            </a:r>
+            <a:br>
+              <a:rPr lang="fr-CA" sz="4400" b="1" dirty="0">
+                <a:solidFill>
+                  <a:srgbClr val="EEF3FF"/>
+                </a:solidFill>
+                <a:latin typeface="Atkinson Hyperlegible"/>
+              </a:rPr>
+            </a:br>
+            <a:r>
+              <a:rPr lang="fr-CA" sz="4400" b="1" dirty="0">
+                <a:solidFill>
+                  <a:srgbClr val="EEF3FF"/>
+                </a:solidFill>
+                <a:latin typeface="Atkinson Hyperlegible"/>
+              </a:rPr>
+              <a:t>système de design</a:t>
+            </a:r>
+          </a:p>
+          <a:p>
+            <a:r>
+              <a:rPr lang="fr-CA" sz="4400" b="1" dirty="0">
+                <a:solidFill>
+                  <a:schemeClr val="accent6">
+                    <a:lumMod val="75000"/>
+                  </a:schemeClr>
+                </a:solidFill>
+                <a:latin typeface="Atkinson Hyperlegible"/>
+              </a:rPr>
+              <a:t>agentique</a:t>
+            </a:r>
+            <a:r>
+              <a:rPr lang="fr-CA" sz="4400" b="1" dirty="0">
+                <a:solidFill>
+                  <a:srgbClr val="EEF3FF"/>
+                </a:solidFill>
+                <a:latin typeface="Atkinson Hyperlegible"/>
+              </a:rPr>
+              <a:t>…</a:t>
+            </a:r>
+          </a:p>
+          <a:p>
+            <a:pPr algn="l"/>
+            <a:r>
+              <a:rPr sz="4400" b="1" dirty="0" err="1">
+                <a:solidFill>
+                  <a:srgbClr val="EEF3FF"/>
+                </a:solidFill>
+                <a:latin typeface="Atkinson Hyperlegible"/>
+              </a:rPr>
+              <a:t>vraiment</a:t>
+            </a:r>
+            <a:r>
+              <a:rPr sz="4400" b="1" dirty="0">
+                <a:solidFill>
+                  <a:srgbClr val="EEF3FF"/>
+                </a:solidFill>
+                <a:latin typeface="Atkinson Hyperlegible"/>
+              </a:rPr>
+              <a:t> ?</a:t>
+            </a:r>
+          </a:p>
+        </p:txBody>
+      </p:sp>
     </p:spTree>
   </p:cSld>
   <p:clrMapOvr>
@@ -3413,7 +3456,7 @@
 </file>
 
 <file path=ppt/slides/slide10.xml><?xml version="1.0" encoding="utf-8"?>
-<p:sld xmlns:a="http://schemas.openxmlformats.org/drawingml/2006/main" xmlns:p="http://schemas.openxmlformats.org/presentationml/2006/main" xmlns:r="http://schemas.openxmlformats.org/officeDocument/2006/relationships">
+<p:sld xmlns:a="http://schemas.openxmlformats.org/drawingml/2006/main" xmlns:r="http://schemas.openxmlformats.org/officeDocument/2006/relationships" xmlns:p="http://schemas.openxmlformats.org/presentationml/2006/main">
   <p:cSld>
     <p:bg>
       <p:bgPr>
@@ -3429,7 +3472,14 @@
         <p:cNvGrpSpPr/>
         <p:nvPr/>
       </p:nvGrpSpPr>
-      <p:grpSpPr/>
+      <p:grpSpPr>
+        <a:xfrm>
+          <a:off x="0" y="0"/>
+          <a:ext cx="0" cy="0"/>
+          <a:chOff x="0" y="0"/>
+          <a:chExt cx="0" cy="0"/>
+        </a:xfrm>
+      </p:grpSpPr>
       <p:sp>
         <p:nvSpPr>
           <p:cNvPr id="2" name="Rectangle 1"/>
@@ -3470,6 +3520,7 @@
           <a:lstStyle/>
           <a:p>
             <a:pPr algn="ctr"/>
+            <a:endParaRPr/>
           </a:p>
         </p:txBody>
       </p:sp>
@@ -3701,6 +3752,7 @@
           <a:lstStyle/>
           <a:p>
             <a:pPr algn="ctr"/>
+            <a:endParaRPr/>
           </a:p>
         </p:txBody>
       </p:sp>
@@ -3780,6 +3832,7 @@
           <a:lstStyle/>
           <a:p>
             <a:pPr algn="ctr"/>
+            <a:endParaRPr/>
           </a:p>
         </p:txBody>
       </p:sp>
@@ -3893,6 +3946,7 @@
           <a:lstStyle/>
           <a:p>
             <a:pPr algn="ctr"/>
+            <a:endParaRPr/>
           </a:p>
         </p:txBody>
       </p:sp>
@@ -3971,6 +4025,7 @@
           <a:lstStyle/>
           <a:p>
             <a:pPr algn="ctr"/>
+            <a:endParaRPr/>
           </a:p>
         </p:txBody>
       </p:sp>
@@ -4088,7 +4143,7 @@
 </file>
 
 <file path=ppt/slides/slide11.xml><?xml version="1.0" encoding="utf-8"?>
-<p:sld xmlns:a="http://schemas.openxmlformats.org/drawingml/2006/main" xmlns:p="http://schemas.openxmlformats.org/presentationml/2006/main" xmlns:r="http://schemas.openxmlformats.org/officeDocument/2006/relationships">
+<p:sld xmlns:a="http://schemas.openxmlformats.org/drawingml/2006/main" xmlns:r="http://schemas.openxmlformats.org/officeDocument/2006/relationships" xmlns:p="http://schemas.openxmlformats.org/presentationml/2006/main">
   <p:cSld>
     <p:bg>
       <p:bgPr>
@@ -4104,7 +4159,14 @@
         <p:cNvGrpSpPr/>
         <p:nvPr/>
       </p:nvGrpSpPr>
-      <p:grpSpPr/>
+      <p:grpSpPr>
+        <a:xfrm>
+          <a:off x="0" y="0"/>
+          <a:ext cx="0" cy="0"/>
+          <a:chOff x="0" y="0"/>
+          <a:chExt cx="0" cy="0"/>
+        </a:xfrm>
+      </p:grpSpPr>
       <p:sp>
         <p:nvSpPr>
           <p:cNvPr id="2" name="Rectangle 1"/>
@@ -4145,6 +4207,7 @@
           <a:lstStyle/>
           <a:p>
             <a:pPr algn="ctr"/>
+            <a:endParaRPr/>
           </a:p>
         </p:txBody>
       </p:sp>
@@ -4260,6 +4323,7 @@
           <a:lstStyle/>
           <a:p>
             <a:pPr algn="ctr"/>
+            <a:endParaRPr/>
           </a:p>
         </p:txBody>
       </p:sp>
@@ -4445,6 +4509,7 @@
           <a:lstStyle/>
           <a:p>
             <a:pPr algn="ctr"/>
+            <a:endParaRPr/>
           </a:p>
         </p:txBody>
       </p:sp>
@@ -4481,7 +4546,7 @@
 </file>
 
 <file path=ppt/slides/slide12.xml><?xml version="1.0" encoding="utf-8"?>
-<p:sld xmlns:a="http://schemas.openxmlformats.org/drawingml/2006/main" xmlns:p="http://schemas.openxmlformats.org/presentationml/2006/main" xmlns:r="http://schemas.openxmlformats.org/officeDocument/2006/relationships">
+<p:sld xmlns:a="http://schemas.openxmlformats.org/drawingml/2006/main" xmlns:r="http://schemas.openxmlformats.org/officeDocument/2006/relationships" xmlns:p="http://schemas.openxmlformats.org/presentationml/2006/main">
   <p:cSld>
     <p:bg>
       <p:bgPr>
@@ -4497,7 +4562,14 @@
         <p:cNvGrpSpPr/>
         <p:nvPr/>
       </p:nvGrpSpPr>
-      <p:grpSpPr/>
+      <p:grpSpPr>
+        <a:xfrm>
+          <a:off x="0" y="0"/>
+          <a:ext cx="0" cy="0"/>
+          <a:chOff x="0" y="0"/>
+          <a:chExt cx="0" cy="0"/>
+        </a:xfrm>
+      </p:grpSpPr>
       <p:sp>
         <p:nvSpPr>
           <p:cNvPr id="2" name="Rectangle 1"/>
@@ -4538,6 +4610,7 @@
           <a:lstStyle/>
           <a:p>
             <a:pPr algn="ctr"/>
+            <a:endParaRPr/>
           </a:p>
         </p:txBody>
       </p:sp>
@@ -4794,6 +4867,7 @@
           <a:lstStyle/>
           <a:p>
             <a:pPr algn="ctr"/>
+            <a:endParaRPr/>
           </a:p>
         </p:txBody>
       </p:sp>
@@ -4962,6 +5036,7 @@
           <a:lstStyle/>
           <a:p>
             <a:pPr algn="ctr"/>
+            <a:endParaRPr/>
           </a:p>
         </p:txBody>
       </p:sp>
@@ -5112,6 +5187,7 @@
           <a:lstStyle/>
           <a:p>
             <a:pPr algn="ctr"/>
+            <a:endParaRPr/>
           </a:p>
         </p:txBody>
       </p:sp>
@@ -5278,6 +5354,7 @@
           <a:lstStyle/>
           <a:p>
             <a:pPr algn="ctr"/>
+            <a:endParaRPr/>
           </a:p>
         </p:txBody>
       </p:sp>
@@ -5410,6 +5487,7 @@
           <a:lstStyle/>
           <a:p>
             <a:pPr algn="ctr"/>
+            <a:endParaRPr/>
           </a:p>
         </p:txBody>
       </p:sp>
@@ -5457,7 +5535,7 @@
 </file>
 
 <file path=ppt/slides/slide13.xml><?xml version="1.0" encoding="utf-8"?>
-<p:sld xmlns:a="http://schemas.openxmlformats.org/drawingml/2006/main" xmlns:p="http://schemas.openxmlformats.org/presentationml/2006/main" xmlns:r="http://schemas.openxmlformats.org/officeDocument/2006/relationships">
+<p:sld xmlns:a="http://schemas.openxmlformats.org/drawingml/2006/main" xmlns:r="http://schemas.openxmlformats.org/officeDocument/2006/relationships" xmlns:p="http://schemas.openxmlformats.org/presentationml/2006/main">
   <p:cSld>
     <p:bg>
       <p:bgPr>
@@ -5473,7 +5551,14 @@
         <p:cNvGrpSpPr/>
         <p:nvPr/>
       </p:nvGrpSpPr>
-      <p:grpSpPr/>
+      <p:grpSpPr>
+        <a:xfrm>
+          <a:off x="0" y="0"/>
+          <a:ext cx="0" cy="0"/>
+          <a:chOff x="0" y="0"/>
+          <a:chExt cx="0" cy="0"/>
+        </a:xfrm>
+      </p:grpSpPr>
       <p:sp>
         <p:nvSpPr>
           <p:cNvPr id="2" name="Rectangle 1"/>
@@ -5514,6 +5599,7 @@
           <a:lstStyle/>
           <a:p>
             <a:pPr algn="ctr"/>
+            <a:endParaRPr/>
           </a:p>
         </p:txBody>
       </p:sp>
@@ -5711,6 +5797,7 @@
           <a:lstStyle/>
           <a:p>
             <a:pPr algn="ctr"/>
+            <a:endParaRPr/>
           </a:p>
         </p:txBody>
       </p:sp>
@@ -5793,6 +5880,7 @@
           <a:lstStyle/>
           <a:p>
             <a:pPr algn="ctr"/>
+            <a:endParaRPr/>
           </a:p>
         </p:txBody>
       </p:sp>
@@ -5838,6 +5926,7 @@
           <a:lstStyle/>
           <a:p>
             <a:pPr algn="ctr"/>
+            <a:endParaRPr/>
           </a:p>
         </p:txBody>
       </p:sp>
@@ -5883,6 +5972,7 @@
           <a:lstStyle/>
           <a:p>
             <a:pPr algn="ctr"/>
+            <a:endParaRPr/>
           </a:p>
         </p:txBody>
       </p:sp>
@@ -5998,6 +6088,7 @@
           <a:lstStyle/>
           <a:p>
             <a:pPr algn="ctr"/>
+            <a:endParaRPr/>
           </a:p>
         </p:txBody>
       </p:sp>
@@ -6034,7 +6125,7 @@
 </file>
 
 <file path=ppt/slides/slide14.xml><?xml version="1.0" encoding="utf-8"?>
-<p:sld xmlns:a="http://schemas.openxmlformats.org/drawingml/2006/main" xmlns:p="http://schemas.openxmlformats.org/presentationml/2006/main" xmlns:r="http://schemas.openxmlformats.org/officeDocument/2006/relationships">
+<p:sld xmlns:a="http://schemas.openxmlformats.org/drawingml/2006/main" xmlns:r="http://schemas.openxmlformats.org/officeDocument/2006/relationships" xmlns:p="http://schemas.openxmlformats.org/presentationml/2006/main">
   <p:cSld>
     <p:bg>
       <p:bgPr>
@@ -6050,7 +6141,14 @@
         <p:cNvGrpSpPr/>
         <p:nvPr/>
       </p:nvGrpSpPr>
-      <p:grpSpPr/>
+      <p:grpSpPr>
+        <a:xfrm>
+          <a:off x="0" y="0"/>
+          <a:ext cx="0" cy="0"/>
+          <a:chOff x="0" y="0"/>
+          <a:chExt cx="0" cy="0"/>
+        </a:xfrm>
+      </p:grpSpPr>
       <p:sp>
         <p:nvSpPr>
           <p:cNvPr id="2" name="Rectangle 1"/>
@@ -6091,6 +6189,7 @@
           <a:lstStyle/>
           <a:p>
             <a:pPr algn="ctr"/>
+            <a:endParaRPr/>
           </a:p>
         </p:txBody>
       </p:sp>
@@ -6206,6 +6305,7 @@
           <a:lstStyle/>
           <a:p>
             <a:pPr algn="ctr"/>
+            <a:endParaRPr/>
           </a:p>
         </p:txBody>
       </p:sp>
@@ -6287,6 +6387,7 @@
           <a:lstStyle/>
           <a:p>
             <a:pPr algn="ctr"/>
+            <a:endParaRPr/>
           </a:p>
         </p:txBody>
       </p:sp>
@@ -6368,6 +6469,7 @@
           <a:lstStyle/>
           <a:p>
             <a:pPr algn="ctr"/>
+            <a:endParaRPr/>
           </a:p>
         </p:txBody>
       </p:sp>
@@ -6449,6 +6551,7 @@
           <a:lstStyle/>
           <a:p>
             <a:pPr algn="ctr"/>
+            <a:endParaRPr/>
           </a:p>
         </p:txBody>
       </p:sp>
@@ -6530,6 +6633,7 @@
           <a:lstStyle/>
           <a:p>
             <a:pPr algn="ctr"/>
+            <a:endParaRPr/>
           </a:p>
         </p:txBody>
       </p:sp>
@@ -6609,6 +6713,7 @@
           <a:lstStyle/>
           <a:p>
             <a:pPr algn="ctr"/>
+            <a:endParaRPr/>
           </a:p>
         </p:txBody>
       </p:sp>
@@ -6775,6 +6880,7 @@
           <a:lstStyle/>
           <a:p>
             <a:pPr algn="ctr"/>
+            <a:endParaRPr/>
           </a:p>
         </p:txBody>
       </p:sp>
@@ -6889,6 +6995,7 @@
           <a:lstStyle/>
           <a:p>
             <a:pPr algn="ctr"/>
+            <a:endParaRPr/>
           </a:p>
         </p:txBody>
       </p:sp>
@@ -7003,6 +7110,7 @@
           <a:lstStyle/>
           <a:p>
             <a:pPr algn="ctr"/>
+            <a:endParaRPr/>
           </a:p>
         </p:txBody>
       </p:sp>
@@ -7086,7 +7194,7 @@
 </file>
 
 <file path=ppt/slides/slide15.xml><?xml version="1.0" encoding="utf-8"?>
-<p:sld xmlns:a="http://schemas.openxmlformats.org/drawingml/2006/main" xmlns:p="http://schemas.openxmlformats.org/presentationml/2006/main" xmlns:r="http://schemas.openxmlformats.org/officeDocument/2006/relationships">
+<p:sld xmlns:a="http://schemas.openxmlformats.org/drawingml/2006/main" xmlns:r="http://schemas.openxmlformats.org/officeDocument/2006/relationships" xmlns:p="http://schemas.openxmlformats.org/presentationml/2006/main">
   <p:cSld>
     <p:bg>
       <p:bgPr>
@@ -7102,7 +7210,14 @@
         <p:cNvGrpSpPr/>
         <p:nvPr/>
       </p:nvGrpSpPr>
-      <p:grpSpPr/>
+      <p:grpSpPr>
+        <a:xfrm>
+          <a:off x="0" y="0"/>
+          <a:ext cx="0" cy="0"/>
+          <a:chOff x="0" y="0"/>
+          <a:chExt cx="0" cy="0"/>
+        </a:xfrm>
+      </p:grpSpPr>
       <p:sp>
         <p:nvSpPr>
           <p:cNvPr id="2" name="Rectangle 1"/>
@@ -7143,6 +7258,7 @@
           <a:lstStyle/>
           <a:p>
             <a:pPr algn="ctr"/>
+            <a:endParaRPr/>
           </a:p>
         </p:txBody>
       </p:sp>
@@ -7358,6 +7474,7 @@
           <a:lstStyle/>
           <a:p>
             <a:pPr algn="ctr"/>
+            <a:endParaRPr/>
           </a:p>
         </p:txBody>
       </p:sp>
@@ -7438,6 +7555,7 @@
           <a:lstStyle/>
           <a:p>
             <a:pPr algn="ctr"/>
+            <a:endParaRPr/>
           </a:p>
         </p:txBody>
       </p:sp>
@@ -7518,6 +7636,7 @@
           <a:lstStyle/>
           <a:p>
             <a:pPr algn="ctr"/>
+            <a:endParaRPr/>
           </a:p>
         </p:txBody>
       </p:sp>
@@ -7598,6 +7717,7 @@
           <a:lstStyle/>
           <a:p>
             <a:pPr algn="ctr"/>
+            <a:endParaRPr/>
           </a:p>
         </p:txBody>
       </p:sp>
@@ -7678,6 +7798,7 @@
           <a:lstStyle/>
           <a:p>
             <a:pPr algn="ctr"/>
+            <a:endParaRPr/>
           </a:p>
         </p:txBody>
       </p:sp>
@@ -7756,6 +7877,7 @@
           <a:lstStyle/>
           <a:p>
             <a:pPr algn="ctr"/>
+            <a:endParaRPr/>
           </a:p>
         </p:txBody>
       </p:sp>
@@ -7825,6 +7947,7 @@
           <a:lstStyle/>
           <a:p>
             <a:pPr algn="ctr"/>
+            <a:endParaRPr/>
           </a:p>
         </p:txBody>
       </p:sp>
@@ -7957,7 +8080,7 @@
 </file>
 
 <file path=ppt/slides/slide2.xml><?xml version="1.0" encoding="utf-8"?>
-<p:sld xmlns:a="http://schemas.openxmlformats.org/drawingml/2006/main" xmlns:p="http://schemas.openxmlformats.org/presentationml/2006/main" xmlns:r="http://schemas.openxmlformats.org/officeDocument/2006/relationships">
+<p:sld xmlns:a="http://schemas.openxmlformats.org/drawingml/2006/main" xmlns:r="http://schemas.openxmlformats.org/officeDocument/2006/relationships" xmlns:p="http://schemas.openxmlformats.org/presentationml/2006/main">
   <p:cSld>
     <p:bg>
       <p:bgPr>
@@ -7973,7 +8096,14 @@
         <p:cNvGrpSpPr/>
         <p:nvPr/>
       </p:nvGrpSpPr>
-      <p:grpSpPr/>
+      <p:grpSpPr>
+        <a:xfrm>
+          <a:off x="0" y="0"/>
+          <a:ext cx="0" cy="0"/>
+          <a:chOff x="0" y="0"/>
+          <a:chExt cx="0" cy="0"/>
+        </a:xfrm>
+      </p:grpSpPr>
       <p:sp>
         <p:nvSpPr>
           <p:cNvPr id="2" name="Rectangle 1"/>
@@ -8014,6 +8144,7 @@
           <a:lstStyle/>
           <a:p>
             <a:pPr algn="ctr"/>
+            <a:endParaRPr/>
           </a:p>
         </p:txBody>
       </p:sp>
@@ -8025,8 +8156,8 @@
         </p:nvSpPr>
         <p:spPr>
           <a:xfrm>
-            <a:off x="685800" y="495300"/>
-            <a:ext cx="6667500" cy="190500"/>
+            <a:off x="685800" y="1586539"/>
+            <a:ext cx="6667500" cy="230832"/>
           </a:xfrm>
           <a:prstGeom prst="rect">
             <a:avLst/>
@@ -8041,14 +8172,29 @@
           <a:p>
             <a:pPr algn="l"/>
             <a:r>
-              <a:rPr sz="900" b="0" i="0">
+              <a:rPr sz="900" b="0" i="0" spc="300" dirty="0">
                 <a:solidFill>
                   <a:srgbClr val="B8CCEE"/>
                 </a:solidFill>
                 <a:latin typeface="DM Sans"/>
               </a:rPr>
-              <a:t>OBJECTIFS PÉDAGOGIQUES</a:t>
-            </a:r>
+              <a:t>OBJECTIFS PÉDAGOGIQUE</a:t>
+            </a:r>
+            <a:r>
+              <a:rPr lang="fr-CA" sz="900" b="0" i="0" spc="300" dirty="0">
+                <a:solidFill>
+                  <a:srgbClr val="B8CCEE"/>
+                </a:solidFill>
+                <a:latin typeface="DM Sans"/>
+              </a:rPr>
+              <a:t>S</a:t>
+            </a:r>
+            <a:endParaRPr sz="900" b="0" i="0" spc="300" dirty="0">
+              <a:solidFill>
+                <a:srgbClr val="B8CCEE"/>
+              </a:solidFill>
+              <a:latin typeface="DM Sans"/>
+            </a:endParaRPr>
           </a:p>
         </p:txBody>
       </p:sp>
@@ -8060,8 +8206,8 @@
         </p:nvSpPr>
         <p:spPr>
           <a:xfrm>
-            <a:off x="685800" y="704850"/>
-            <a:ext cx="10820400" cy="1047750"/>
+            <a:off x="685800" y="1931958"/>
+            <a:ext cx="10820400" cy="523220"/>
           </a:xfrm>
           <a:prstGeom prst="rect">
             <a:avLst/>
@@ -8076,14 +8222,85 @@
           <a:p>
             <a:pPr algn="l"/>
             <a:r>
-              <a:rPr sz="2800" b="1">
+              <a:rPr sz="2800" b="1" dirty="0">
                 <a:solidFill>
                   <a:srgbClr val="EEF3FF"/>
                 </a:solidFill>
                 <a:latin typeface="Atkinson Hyperlegible"/>
               </a:rPr>
-              <a:t>À la fin de cette session, vous serez capables de…
-                    </a:t>
+              <a:t>À la fin de </a:t>
+            </a:r>
+            <a:r>
+              <a:rPr sz="2800" b="1" dirty="0" err="1">
+                <a:solidFill>
+                  <a:srgbClr val="EEF3FF"/>
+                </a:solidFill>
+                <a:latin typeface="Atkinson Hyperlegible"/>
+              </a:rPr>
+              <a:t>cette</a:t>
+            </a:r>
+            <a:r>
+              <a:rPr sz="2800" b="1" dirty="0">
+                <a:solidFill>
+                  <a:srgbClr val="EEF3FF"/>
+                </a:solidFill>
+                <a:latin typeface="Atkinson Hyperlegible"/>
+              </a:rPr>
+              <a:t> session, vous </a:t>
+            </a:r>
+            <a:r>
+              <a:rPr sz="2800" b="1" dirty="0" err="1">
+                <a:solidFill>
+                  <a:srgbClr val="EEF3FF"/>
+                </a:solidFill>
+                <a:latin typeface="Atkinson Hyperlegible"/>
+              </a:rPr>
+              <a:t>serez</a:t>
+            </a:r>
+            <a:r>
+              <a:rPr sz="2800" b="1" dirty="0">
+                <a:solidFill>
+                  <a:srgbClr val="EEF3FF"/>
+                </a:solidFill>
+                <a:latin typeface="Atkinson Hyperlegible"/>
+              </a:rPr>
+              <a:t> </a:t>
+            </a:r>
+            <a:r>
+              <a:rPr sz="2800" b="1" dirty="0" err="1">
+                <a:solidFill>
+                  <a:srgbClr val="EEF3FF"/>
+                </a:solidFill>
+                <a:latin typeface="Atkinson Hyperlegible"/>
+              </a:rPr>
+              <a:t>capables</a:t>
+            </a:r>
+            <a:r>
+              <a:rPr sz="2800" b="1" dirty="0">
+                <a:solidFill>
+                  <a:srgbClr val="EEF3FF"/>
+                </a:solidFill>
+                <a:latin typeface="Atkinson Hyperlegible"/>
+              </a:rPr>
+              <a:t> de</a:t>
+            </a:r>
+            <a:r>
+              <a:rPr lang="fr-CA" sz="2800" b="1" dirty="0">
+                <a:solidFill>
+                  <a:srgbClr val="EEF3FF"/>
+                </a:solidFill>
+                <a:latin typeface="Atkinson Hyperlegible"/>
+              </a:rPr>
+              <a:t>…</a:t>
+            </a:r>
+            <a:r>
+              <a:rPr sz="2800" b="1" dirty="0">
+                <a:solidFill>
+                  <a:srgbClr val="EEF3FF"/>
+                </a:solidFill>
+                <a:latin typeface="Atkinson Hyperlegible"/>
+              </a:rPr>
+              <a:t>                    </a:t>
             </a:r>
           </a:p>
         </p:txBody>
@@ -8096,8 +8313,8 @@
         </p:nvSpPr>
         <p:spPr>
           <a:xfrm>
-            <a:off x="685800" y="1352550"/>
-            <a:ext cx="2571750" cy="514350"/>
+            <a:off x="685800" y="2904545"/>
+            <a:ext cx="2571750" cy="553999"/>
           </a:xfrm>
           <a:prstGeom prst="rect">
             <a:avLst/>
@@ -8112,7 +8329,7 @@
           <a:p>
             <a:pPr algn="l"/>
             <a:r>
-              <a:rPr sz="3000" b="1" i="0">
+              <a:rPr lang="fr-CA" sz="3000" b="1" i="0" dirty="0">
                 <a:solidFill>
                   <a:srgbClr val="14D9C8"/>
                 </a:solidFill>
@@ -8120,6 +8337,12 @@
               </a:rPr>
               <a:t>01</a:t>
             </a:r>
+            <a:endParaRPr sz="3000" b="1" i="0" dirty="0">
+              <a:solidFill>
+                <a:srgbClr val="14D9C8"/>
+              </a:solidFill>
+              <a:latin typeface="Atkinson Hyperlegible"/>
+            </a:endParaRPr>
           </a:p>
         </p:txBody>
       </p:sp>
@@ -8131,8 +8354,8 @@
         </p:nvSpPr>
         <p:spPr>
           <a:xfrm>
-            <a:off x="685800" y="1885950"/>
-            <a:ext cx="2571750" cy="419100"/>
+            <a:off x="685800" y="3422849"/>
+            <a:ext cx="2571750" cy="461665"/>
           </a:xfrm>
           <a:prstGeom prst="rect">
             <a:avLst/>
@@ -8146,30 +8369,82 @@
           <a:lstStyle/>
           <a:p>
             <a:r>
-              <a:rPr sz="1200">
-                <a:solidFill>
-                  <a:srgbClr val="EEF3FF"/>
-                </a:solidFill>
-                <a:latin typeface="DM Sans"/>
-              </a:rPr>
-              <a:t>Comprendre ce qu'est un
-                                </a:t>
-            </a:r>
-            <a:r>
-              <a:rPr sz="1200" b="1">
-                <a:solidFill>
-                  <a:srgbClr val="EEF3FF"/>
-                </a:solidFill>
-                <a:latin typeface="DM Sans"/>
-              </a:rPr>
-              <a:t>système de design</a:t>
-            </a:r>
-            <a:r>
-              <a:rPr sz="1200">
-                <a:solidFill>
-                  <a:srgbClr val="EEF3FF"/>
-                </a:solidFill>
-                <a:latin typeface="DM Sans"/>
+              <a:rPr sz="1200" dirty="0" err="1">
+                <a:solidFill>
+                  <a:srgbClr val="EEF3FF"/>
+                </a:solidFill>
+              </a:rPr>
+              <a:t>Comprendre</a:t>
+            </a:r>
+            <a:r>
+              <a:rPr sz="1200" dirty="0">
+                <a:solidFill>
+                  <a:srgbClr val="EEF3FF"/>
+                </a:solidFill>
+              </a:rPr>
+              <a:t> </a:t>
+            </a:r>
+            <a:r>
+              <a:rPr sz="1200" dirty="0" err="1">
+                <a:solidFill>
+                  <a:srgbClr val="EEF3FF"/>
+                </a:solidFill>
+              </a:rPr>
+              <a:t>ce</a:t>
+            </a:r>
+            <a:r>
+              <a:rPr sz="1200" dirty="0">
+                <a:solidFill>
+                  <a:srgbClr val="EEF3FF"/>
+                </a:solidFill>
+              </a:rPr>
+              <a:t> </a:t>
+            </a:r>
+            <a:r>
+              <a:rPr sz="1200" dirty="0" err="1">
+                <a:solidFill>
+                  <a:srgbClr val="EEF3FF"/>
+                </a:solidFill>
+              </a:rPr>
+              <a:t>qu'est</a:t>
+            </a:r>
+            <a:r>
+              <a:rPr sz="1200" dirty="0">
+                <a:solidFill>
+                  <a:srgbClr val="EEF3FF"/>
+                </a:solidFill>
+              </a:rPr>
+              <a:t> un</a:t>
+            </a:r>
+            <a:r>
+              <a:rPr lang="fr-CA" sz="1200" dirty="0">
+                <a:solidFill>
+                  <a:srgbClr val="EEF3FF"/>
+                </a:solidFill>
+              </a:rPr>
+              <a:t> </a:t>
+            </a:r>
+            <a:r>
+              <a:rPr sz="1200" b="1" dirty="0">
+                <a:solidFill>
+                  <a:schemeClr val="bg1"/>
+                </a:solidFill>
+              </a:rPr>
+              <a:t>système</a:t>
+            </a:r>
+            <a:r>
+              <a:rPr sz="1200" b="1" dirty="0">
+                <a:solidFill>
+                  <a:srgbClr val="EEF3FF"/>
+                </a:solidFill>
+              </a:rPr>
+              <a:t> de design</a:t>
+            </a:r>
+            <a:r>
+              <a:rPr sz="1200" dirty="0">
+                <a:solidFill>
+                  <a:srgbClr val="EEF3FF"/>
+                </a:solidFill>
               </a:rPr>
               <a:t> à la base.</a:t>
             </a:r>
@@ -8184,8 +8459,8 @@
         </p:nvSpPr>
         <p:spPr>
           <a:xfrm>
-            <a:off x="685800" y="2343150"/>
-            <a:ext cx="2571750" cy="342900"/>
+            <a:off x="685800" y="3867972"/>
+            <a:ext cx="2571750" cy="400110"/>
           </a:xfrm>
           <a:prstGeom prst="rect">
             <a:avLst/>
@@ -8200,14 +8475,44 @@
           <a:p>
             <a:pPr algn="l"/>
             <a:r>
-              <a:rPr sz="1000" b="0" i="0">
-                <a:solidFill>
-                  <a:srgbClr val="7A90B8"/>
-                </a:solidFill>
-                <a:latin typeface="DM Sans"/>
-              </a:rPr>
-              <a:t>Pas juste un guide de style ou une bibliothèque
-                                de composants.</a:t>
+              <a:rPr sz="1000" b="0" i="0" dirty="0">
+                <a:solidFill>
+                  <a:srgbClr val="BFC9DB"/>
+                </a:solidFill>
+              </a:rPr>
+              <a:t>Pas </a:t>
+            </a:r>
+            <a:r>
+              <a:rPr sz="1000" b="0" i="0" dirty="0" err="1">
+                <a:solidFill>
+                  <a:srgbClr val="BFC9DB"/>
+                </a:solidFill>
+              </a:rPr>
+              <a:t>juste</a:t>
+            </a:r>
+            <a:r>
+              <a:rPr sz="1000" b="0" i="0" dirty="0">
+                <a:solidFill>
+                  <a:srgbClr val="BFC9DB"/>
+                </a:solidFill>
+              </a:rPr>
+              <a:t> un guide de style ou une bibliothèque</a:t>
+            </a:r>
+            <a:r>
+              <a:rPr lang="fr-CA" sz="1000" b="0" i="0" dirty="0">
+                <a:solidFill>
+                  <a:srgbClr val="BFC9DB"/>
+                </a:solidFill>
+              </a:rPr>
+              <a:t> </a:t>
+            </a:r>
+            <a:r>
+              <a:rPr sz="1000" b="0" i="0" dirty="0">
+                <a:solidFill>
+                  <a:srgbClr val="BFC9DB"/>
+                </a:solidFill>
+              </a:rPr>
+              <a:t>de composants.</a:t>
             </a:r>
           </a:p>
         </p:txBody>
@@ -8220,8 +8525,8 @@
         </p:nvSpPr>
         <p:spPr>
           <a:xfrm>
-            <a:off x="3448050" y="1352550"/>
-            <a:ext cx="2571750" cy="514350"/>
+            <a:off x="3448050" y="2904545"/>
+            <a:ext cx="2571750" cy="553999"/>
           </a:xfrm>
           <a:prstGeom prst="rect">
             <a:avLst/>
@@ -8236,7 +8541,7 @@
           <a:p>
             <a:pPr algn="l"/>
             <a:r>
-              <a:rPr sz="3000" b="1" i="0">
+              <a:rPr lang="fr-CA" sz="3000" b="1" i="0" dirty="0">
                 <a:solidFill>
                   <a:srgbClr val="14D9C8"/>
                 </a:solidFill>
@@ -8244,6 +8549,12 @@
               </a:rPr>
               <a:t>02</a:t>
             </a:r>
+            <a:endParaRPr sz="3000" b="1" i="0" dirty="0">
+              <a:solidFill>
+                <a:srgbClr val="14D9C8"/>
+              </a:solidFill>
+              <a:latin typeface="Atkinson Hyperlegible"/>
+            </a:endParaRPr>
           </a:p>
         </p:txBody>
       </p:sp>
@@ -8255,8 +8566,8 @@
         </p:nvSpPr>
         <p:spPr>
           <a:xfrm>
-            <a:off x="3448050" y="1885950"/>
-            <a:ext cx="2571750" cy="419100"/>
+            <a:off x="3448050" y="3422849"/>
+            <a:ext cx="2571750" cy="461665"/>
           </a:xfrm>
           <a:prstGeom prst="rect">
             <a:avLst/>
@@ -8270,32 +8581,76 @@
           <a:lstStyle/>
           <a:p>
             <a:r>
-              <a:rPr sz="1200">
-                <a:solidFill>
-                  <a:srgbClr val="EEF3FF"/>
-                </a:solidFill>
-                <a:latin typeface="DM Sans"/>
-              </a:rPr>
-              <a:t>Expliquer pourquoi le concept
-                                </a:t>
-            </a:r>
-            <a:r>
-              <a:rPr sz="1200" b="1">
-                <a:solidFill>
-                  <a:srgbClr val="EEF3FF"/>
-                </a:solidFill>
-                <a:latin typeface="DM Sans"/>
+              <a:rPr sz="1200" dirty="0" err="1">
+                <a:solidFill>
+                  <a:srgbClr val="EEF3FF"/>
+                </a:solidFill>
+              </a:rPr>
+              <a:t>Expliquer</a:t>
+            </a:r>
+            <a:r>
+              <a:rPr sz="1200" dirty="0">
+                <a:solidFill>
+                  <a:srgbClr val="EEF3FF"/>
+                </a:solidFill>
+              </a:rPr>
+              <a:t> </a:t>
+            </a:r>
+            <a:r>
+              <a:rPr sz="1200" dirty="0" err="1">
+                <a:solidFill>
+                  <a:srgbClr val="EEF3FF"/>
+                </a:solidFill>
+              </a:rPr>
+              <a:t>pourquoi</a:t>
+            </a:r>
+            <a:r>
+              <a:rPr sz="1200" dirty="0">
+                <a:solidFill>
+                  <a:srgbClr val="EEF3FF"/>
+                </a:solidFill>
+              </a:rPr>
+              <a:t> le concept</a:t>
+            </a:r>
+            <a:r>
+              <a:rPr lang="fr-CA" sz="1200" dirty="0">
+                <a:solidFill>
+                  <a:srgbClr val="EEF3FF"/>
+                </a:solidFill>
+              </a:rPr>
+              <a:t> </a:t>
+            </a:r>
+            <a:r>
+              <a:rPr sz="1200" b="1" dirty="0" err="1">
+                <a:solidFill>
+                  <a:srgbClr val="EEF3FF"/>
+                </a:solidFill>
               </a:rPr>
               <a:t>évolue</a:t>
             </a:r>
             <a:r>
-              <a:rPr sz="1200">
-                <a:solidFill>
-                  <a:srgbClr val="EEF3FF"/>
-                </a:solidFill>
-                <a:latin typeface="DM Sans"/>
-              </a:rPr>
-              <a:t> avec les agents d'IA.</a:t>
+              <a:rPr sz="1200" dirty="0">
+                <a:solidFill>
+                  <a:srgbClr val="EEF3FF"/>
+                </a:solidFill>
+              </a:rPr>
+              <a:t> avec les agents </a:t>
+            </a:r>
+            <a:r>
+              <a:rPr sz="1200" dirty="0" err="1">
+                <a:solidFill>
+                  <a:srgbClr val="EEF3FF"/>
+                </a:solidFill>
+              </a:rPr>
+              <a:t>d'IA</a:t>
+            </a:r>
+            <a:r>
+              <a:rPr sz="1200" dirty="0">
+                <a:solidFill>
+                  <a:srgbClr val="EEF3FF"/>
+                </a:solidFill>
+              </a:rPr>
+              <a:t>.</a:t>
             </a:r>
           </a:p>
         </p:txBody>
@@ -8308,8 +8663,8 @@
         </p:nvSpPr>
         <p:spPr>
           <a:xfrm>
-            <a:off x="3448050" y="2343150"/>
-            <a:ext cx="2571750" cy="342900"/>
+            <a:off x="3448050" y="3867972"/>
+            <a:ext cx="2571750" cy="400110"/>
           </a:xfrm>
           <a:prstGeom prst="rect">
             <a:avLst/>
@@ -8324,14 +8679,68 @@
           <a:p>
             <a:pPr algn="l"/>
             <a:r>
-              <a:rPr sz="1000" b="0" i="0">
-                <a:solidFill>
-                  <a:srgbClr val="7A90B8"/>
-                </a:solidFill>
-                <a:latin typeface="DM Sans"/>
-              </a:rPr>
-              <a:t>Comprendre ce que font (et ne font pas) les
-                                agents.</a:t>
+              <a:rPr sz="1000" b="0" i="0" dirty="0" err="1">
+                <a:solidFill>
+                  <a:srgbClr val="BFC9DB"/>
+                </a:solidFill>
+              </a:rPr>
+              <a:t>Comprendre</a:t>
+            </a:r>
+            <a:r>
+              <a:rPr sz="1000" b="0" i="0" dirty="0">
+                <a:solidFill>
+                  <a:srgbClr val="BFC9DB"/>
+                </a:solidFill>
+              </a:rPr>
+              <a:t> </a:t>
+            </a:r>
+            <a:r>
+              <a:rPr sz="1000" b="0" i="0" dirty="0" err="1">
+                <a:solidFill>
+                  <a:srgbClr val="BFC9DB"/>
+                </a:solidFill>
+              </a:rPr>
+              <a:t>ce</a:t>
+            </a:r>
+            <a:r>
+              <a:rPr sz="1000" b="0" i="0" dirty="0">
+                <a:solidFill>
+                  <a:srgbClr val="BFC9DB"/>
+                </a:solidFill>
+              </a:rPr>
+              <a:t> </a:t>
+            </a:r>
+            <a:r>
+              <a:rPr sz="1000" b="0" i="0" dirty="0" err="1">
+                <a:solidFill>
+                  <a:srgbClr val="BFC9DB"/>
+                </a:solidFill>
+              </a:rPr>
+              <a:t>que</a:t>
+            </a:r>
+            <a:r>
+              <a:rPr sz="1000" b="0" i="0" dirty="0">
+                <a:solidFill>
+                  <a:srgbClr val="BFC9DB"/>
+                </a:solidFill>
+              </a:rPr>
+              <a:t> font (et ne font pas) les</a:t>
+            </a:r>
+            <a:r>
+              <a:rPr lang="fr-CA" sz="1000" b="0" i="0" dirty="0">
+                <a:solidFill>
+                  <a:srgbClr val="BFC9DB"/>
+                </a:solidFill>
+              </a:rPr>
+              <a:t> </a:t>
+            </a:r>
+            <a:r>
+              <a:rPr sz="1000" b="0" i="0" dirty="0">
+                <a:solidFill>
+                  <a:srgbClr val="BFC9DB"/>
+                </a:solidFill>
+              </a:rPr>
+              <a:t>agents.</a:t>
             </a:r>
           </a:p>
         </p:txBody>
@@ -8344,8 +8753,8 @@
         </p:nvSpPr>
         <p:spPr>
           <a:xfrm>
-            <a:off x="6210300" y="1352550"/>
-            <a:ext cx="2571750" cy="514350"/>
+            <a:off x="6210300" y="2904545"/>
+            <a:ext cx="2571750" cy="553999"/>
           </a:xfrm>
           <a:prstGeom prst="rect">
             <a:avLst/>
@@ -8360,7 +8769,7 @@
           <a:p>
             <a:pPr algn="l"/>
             <a:r>
-              <a:rPr sz="3000" b="1" i="0">
+              <a:rPr lang="fr-CA" sz="3000" b="1" i="0" dirty="0">
                 <a:solidFill>
                   <a:srgbClr val="14D9C8"/>
                 </a:solidFill>
@@ -8368,6 +8777,12 @@
               </a:rPr>
               <a:t>03</a:t>
             </a:r>
+            <a:endParaRPr sz="3000" b="1" i="0" dirty="0">
+              <a:solidFill>
+                <a:srgbClr val="14D9C8"/>
+              </a:solidFill>
+              <a:latin typeface="Atkinson Hyperlegible"/>
+            </a:endParaRPr>
           </a:p>
         </p:txBody>
       </p:sp>
@@ -8379,8 +8794,8 @@
         </p:nvSpPr>
         <p:spPr>
           <a:xfrm>
-            <a:off x="6210300" y="1885950"/>
-            <a:ext cx="2571750" cy="419100"/>
+            <a:off x="6210300" y="3422849"/>
+            <a:ext cx="2571750" cy="461665"/>
           </a:xfrm>
           <a:prstGeom prst="rect">
             <a:avLst/>
@@ -8394,30 +8809,82 @@
           <a:lstStyle/>
           <a:p>
             <a:r>
-              <a:rPr sz="1200">
-                <a:solidFill>
-                  <a:srgbClr val="EEF3FF"/>
-                </a:solidFill>
-                <a:latin typeface="DM Sans"/>
-              </a:rPr>
-              <a:t>Définir ce qu'est un
-                                </a:t>
-            </a:r>
-            <a:r>
-              <a:rPr sz="1200" b="1">
-                <a:solidFill>
-                  <a:srgbClr val="EEF3FF"/>
-                </a:solidFill>
-                <a:latin typeface="DM Sans"/>
-              </a:rPr>
-              <a:t>système de design agentique</a:t>
-            </a:r>
-            <a:r>
-              <a:rPr sz="1200">
-                <a:solidFill>
-                  <a:srgbClr val="EEF3FF"/>
-                </a:solidFill>
-                <a:latin typeface="DM Sans"/>
+              <a:rPr sz="1200" dirty="0" err="1">
+                <a:solidFill>
+                  <a:srgbClr val="EEF3FF"/>
+                </a:solidFill>
+              </a:rPr>
+              <a:t>Définir</a:t>
+            </a:r>
+            <a:r>
+              <a:rPr sz="1200" dirty="0">
+                <a:solidFill>
+                  <a:srgbClr val="EEF3FF"/>
+                </a:solidFill>
+              </a:rPr>
+              <a:t> </a:t>
+            </a:r>
+            <a:r>
+              <a:rPr sz="1200" dirty="0" err="1">
+                <a:solidFill>
+                  <a:srgbClr val="EEF3FF"/>
+                </a:solidFill>
+              </a:rPr>
+              <a:t>ce</a:t>
+            </a:r>
+            <a:r>
+              <a:rPr sz="1200" dirty="0">
+                <a:solidFill>
+                  <a:srgbClr val="EEF3FF"/>
+                </a:solidFill>
+              </a:rPr>
+              <a:t> </a:t>
+            </a:r>
+            <a:r>
+              <a:rPr sz="1200" dirty="0" err="1">
+                <a:solidFill>
+                  <a:srgbClr val="EEF3FF"/>
+                </a:solidFill>
+              </a:rPr>
+              <a:t>qu'est</a:t>
+            </a:r>
+            <a:r>
+              <a:rPr sz="1200" dirty="0">
+                <a:solidFill>
+                  <a:srgbClr val="EEF3FF"/>
+                </a:solidFill>
+              </a:rPr>
+              <a:t> un</a:t>
+            </a:r>
+            <a:r>
+              <a:rPr lang="fr-CA" sz="1200" dirty="0">
+                <a:solidFill>
+                  <a:srgbClr val="EEF3FF"/>
+                </a:solidFill>
+              </a:rPr>
+              <a:t> </a:t>
+            </a:r>
+            <a:r>
+              <a:rPr sz="1200" b="1" dirty="0">
+                <a:solidFill>
+                  <a:srgbClr val="EEF3FF"/>
+                </a:solidFill>
+              </a:rPr>
+              <a:t>système de design </a:t>
+            </a:r>
+            <a:r>
+              <a:rPr sz="1200" b="1" dirty="0" err="1">
+                <a:solidFill>
+                  <a:srgbClr val="EEF3FF"/>
+                </a:solidFill>
+              </a:rPr>
+              <a:t>agentique</a:t>
+            </a:r>
+            <a:r>
+              <a:rPr sz="1200" dirty="0">
+                <a:solidFill>
+                  <a:srgbClr val="EEF3FF"/>
+                </a:solidFill>
               </a:rPr>
               <a:t>.</a:t>
             </a:r>
@@ -8432,8 +8899,8 @@
         </p:nvSpPr>
         <p:spPr>
           <a:xfrm>
-            <a:off x="6210300" y="2343150"/>
-            <a:ext cx="2571750" cy="342900"/>
+            <a:off x="6210300" y="3867972"/>
+            <a:ext cx="2571750" cy="246221"/>
           </a:xfrm>
           <a:prstGeom prst="rect">
             <a:avLst/>
@@ -8448,13 +8915,76 @@
           <a:p>
             <a:pPr algn="l"/>
             <a:r>
-              <a:rPr sz="1000" b="0" i="0">
-                <a:solidFill>
-                  <a:srgbClr val="7A90B8"/>
-                </a:solidFill>
-                <a:latin typeface="DM Sans"/>
-              </a:rPr>
-              <a:t>Et ce que ce n'est absolument pas.</a:t>
+              <a:rPr sz="1000" b="0" i="0" dirty="0">
+                <a:solidFill>
+                  <a:srgbClr val="BFC9DB"/>
+                </a:solidFill>
+              </a:rPr>
+              <a:t>Et </a:t>
+            </a:r>
+            <a:r>
+              <a:rPr sz="1000" b="0" i="0" dirty="0" err="1">
+                <a:solidFill>
+                  <a:srgbClr val="BFC9DB"/>
+                </a:solidFill>
+              </a:rPr>
+              <a:t>ce</a:t>
+            </a:r>
+            <a:r>
+              <a:rPr sz="1000" b="0" i="0" dirty="0">
+                <a:solidFill>
+                  <a:srgbClr val="BFC9DB"/>
+                </a:solidFill>
+              </a:rPr>
+              <a:t> </a:t>
+            </a:r>
+            <a:r>
+              <a:rPr sz="1000" b="0" i="0" dirty="0" err="1">
+                <a:solidFill>
+                  <a:srgbClr val="BFC9DB"/>
+                </a:solidFill>
+              </a:rPr>
+              <a:t>que</a:t>
+            </a:r>
+            <a:r>
+              <a:rPr sz="1000" b="0" i="0" dirty="0">
+                <a:solidFill>
+                  <a:srgbClr val="BFC9DB"/>
+                </a:solidFill>
+              </a:rPr>
+              <a:t> </a:t>
+            </a:r>
+            <a:r>
+              <a:rPr sz="1000" b="0" i="0" dirty="0" err="1">
+                <a:solidFill>
+                  <a:srgbClr val="BFC9DB"/>
+                </a:solidFill>
+              </a:rPr>
+              <a:t>ce</a:t>
+            </a:r>
+            <a:r>
+              <a:rPr sz="1000" b="0" i="0" dirty="0">
+                <a:solidFill>
+                  <a:srgbClr val="BFC9DB"/>
+                </a:solidFill>
+              </a:rPr>
+              <a:t> n'est </a:t>
+            </a:r>
+            <a:r>
+              <a:rPr sz="1000" b="0" i="0" dirty="0" err="1">
+                <a:solidFill>
+                  <a:srgbClr val="BFC9DB"/>
+                </a:solidFill>
+              </a:rPr>
+              <a:t>absolument</a:t>
+            </a:r>
+            <a:r>
+              <a:rPr sz="1000" b="0" i="0" dirty="0">
+                <a:solidFill>
+                  <a:srgbClr val="BFC9DB"/>
+                </a:solidFill>
+              </a:rPr>
+              <a:t> pas.</a:t>
             </a:r>
           </a:p>
         </p:txBody>
@@ -8467,8 +8997,8 @@
         </p:nvSpPr>
         <p:spPr>
           <a:xfrm>
-            <a:off x="8972550" y="1352550"/>
-            <a:ext cx="2571750" cy="514350"/>
+            <a:off x="8972550" y="2904545"/>
+            <a:ext cx="2571750" cy="553999"/>
           </a:xfrm>
           <a:prstGeom prst="rect">
             <a:avLst/>
@@ -8483,7 +9013,7 @@
           <a:p>
             <a:pPr algn="l"/>
             <a:r>
-              <a:rPr sz="3000" b="1" i="0">
+              <a:rPr lang="fr-CA" sz="3000" b="1" i="0" dirty="0">
                 <a:solidFill>
                   <a:srgbClr val="14D9C8"/>
                 </a:solidFill>
@@ -8491,6 +9021,12 @@
               </a:rPr>
               <a:t>04</a:t>
             </a:r>
+            <a:endParaRPr sz="3000" b="1" i="0" dirty="0">
+              <a:solidFill>
+                <a:srgbClr val="14D9C8"/>
+              </a:solidFill>
+              <a:latin typeface="Atkinson Hyperlegible"/>
+            </a:endParaRPr>
           </a:p>
         </p:txBody>
       </p:sp>
@@ -8502,8 +9038,8 @@
         </p:nvSpPr>
         <p:spPr>
           <a:xfrm>
-            <a:off x="8972550" y="1885950"/>
-            <a:ext cx="2571750" cy="419100"/>
+            <a:off x="8972550" y="3422849"/>
+            <a:ext cx="2571750" cy="461665"/>
           </a:xfrm>
           <a:prstGeom prst="rect">
             <a:avLst/>
@@ -8517,32 +9053,60 @@
           <a:lstStyle/>
           <a:p>
             <a:r>
-              <a:rPr sz="1200">
-                <a:solidFill>
-                  <a:srgbClr val="EEF3FF"/>
-                </a:solidFill>
-                <a:latin typeface="DM Sans"/>
-              </a:rPr>
-              <a:t>Identifier les
-                                </a:t>
-            </a:r>
-            <a:r>
-              <a:rPr sz="1200" b="1">
-                <a:solidFill>
-                  <a:srgbClr val="EEF3FF"/>
-                </a:solidFill>
-                <a:latin typeface="DM Sans"/>
-              </a:rPr>
-              <a:t>implications concrètes</a:t>
-            </a:r>
-            <a:r>
-              <a:rPr sz="1200">
-                <a:solidFill>
-                  <a:srgbClr val="EEF3FF"/>
-                </a:solidFill>
-                <a:latin typeface="DM Sans"/>
-              </a:rPr>
-              <a:t> pour vos équipes.</a:t>
+              <a:rPr sz="1200" dirty="0">
+                <a:solidFill>
+                  <a:srgbClr val="EEF3FF"/>
+                </a:solidFill>
+              </a:rPr>
+              <a:t>Identifier les</a:t>
+            </a:r>
+            <a:r>
+              <a:rPr lang="fr-CA" sz="1200" dirty="0">
+                <a:solidFill>
+                  <a:srgbClr val="EEF3FF"/>
+                </a:solidFill>
+              </a:rPr>
+              <a:t> </a:t>
+            </a:r>
+            <a:r>
+              <a:rPr sz="1200" b="1" dirty="0">
+                <a:solidFill>
+                  <a:srgbClr val="EEF3FF"/>
+                </a:solidFill>
+              </a:rPr>
+              <a:t>implications </a:t>
+            </a:r>
+            <a:r>
+              <a:rPr sz="1200" b="1" dirty="0" err="1">
+                <a:solidFill>
+                  <a:srgbClr val="EEF3FF"/>
+                </a:solidFill>
+              </a:rPr>
+              <a:t>concrètes</a:t>
+            </a:r>
+            <a:r>
+              <a:rPr sz="1200" dirty="0">
+                <a:solidFill>
+                  <a:srgbClr val="EEF3FF"/>
+                </a:solidFill>
+              </a:rPr>
+              <a:t> pour </a:t>
+            </a:r>
+            <a:r>
+              <a:rPr sz="1200" dirty="0" err="1">
+                <a:solidFill>
+                  <a:srgbClr val="EEF3FF"/>
+                </a:solidFill>
+              </a:rPr>
+              <a:t>vos</a:t>
+            </a:r>
+            <a:r>
+              <a:rPr sz="1200" dirty="0">
+                <a:solidFill>
+                  <a:srgbClr val="EEF3FF"/>
+                </a:solidFill>
+              </a:rPr>
+              <a:t> équipes.</a:t>
             </a:r>
           </a:p>
         </p:txBody>
@@ -8555,8 +9119,8 @@
         </p:nvSpPr>
         <p:spPr>
           <a:xfrm>
-            <a:off x="8972550" y="2343150"/>
-            <a:ext cx="2571750" cy="342900"/>
+            <a:off x="8972550" y="3867972"/>
+            <a:ext cx="2571750" cy="246221"/>
           </a:xfrm>
           <a:prstGeom prst="rect">
             <a:avLst/>
@@ -8571,11 +9135,10 @@
           <a:p>
             <a:pPr algn="l"/>
             <a:r>
-              <a:rPr sz="1000" b="0" i="0">
-                <a:solidFill>
-                  <a:srgbClr val="7A90B8"/>
-                </a:solidFill>
-                <a:latin typeface="DM Sans"/>
+              <a:rPr sz="1000" b="0" i="0" dirty="0">
+                <a:solidFill>
+                  <a:srgbClr val="BFC9DB"/>
+                </a:solidFill>
               </a:rPr>
               <a:t>Design, CX, communications, gestion.</a:t>
             </a:r>
@@ -8591,12 +9154,12 @@
 </file>
 
 <file path=ppt/slides/slide3.xml><?xml version="1.0" encoding="utf-8"?>
-<p:sld xmlns:a="http://schemas.openxmlformats.org/drawingml/2006/main" xmlns:p="http://schemas.openxmlformats.org/presentationml/2006/main" xmlns:r="http://schemas.openxmlformats.org/officeDocument/2006/relationships">
+<p:sld xmlns:a="http://schemas.openxmlformats.org/drawingml/2006/main" xmlns:r="http://schemas.openxmlformats.org/officeDocument/2006/relationships" xmlns:p="http://schemas.openxmlformats.org/presentationml/2006/main">
   <p:cSld>
     <p:bg>
       <p:bgPr>
         <a:solidFill>
-          <a:srgbClr val="060D1A"/>
+          <a:schemeClr val="tx2"/>
         </a:solidFill>
         <a:effectLst/>
       </p:bgPr>
@@ -8607,7 +9170,14 @@
         <p:cNvGrpSpPr/>
         <p:nvPr/>
       </p:nvGrpSpPr>
-      <p:grpSpPr/>
+      <p:grpSpPr>
+        <a:xfrm>
+          <a:off x="0" y="0"/>
+          <a:ext cx="0" cy="0"/>
+          <a:chOff x="0" y="0"/>
+          <a:chExt cx="0" cy="0"/>
+        </a:xfrm>
+      </p:grpSpPr>
       <p:sp>
         <p:nvSpPr>
           <p:cNvPr id="2" name="Rectangle 1"/>
@@ -8648,6 +9218,7 @@
           <a:lstStyle/>
           <a:p>
             <a:pPr algn="ctr"/>
+            <a:endParaRPr/>
           </a:p>
         </p:txBody>
       </p:sp>
@@ -8659,8 +9230,8 @@
         </p:nvSpPr>
         <p:spPr>
           <a:xfrm>
-            <a:off x="647700" y="495300"/>
-            <a:ext cx="6667500" cy="190500"/>
+            <a:off x="647700" y="1328609"/>
+            <a:ext cx="6667500" cy="230832"/>
           </a:xfrm>
           <a:prstGeom prst="rect">
             <a:avLst/>
@@ -8675,7 +9246,7 @@
           <a:p>
             <a:pPr algn="l"/>
             <a:r>
-              <a:rPr sz="900" b="0" i="0">
+              <a:rPr sz="900" b="0" i="0" spc="300" dirty="0">
                 <a:solidFill>
                   <a:srgbClr val="B8CCEE"/>
                 </a:solidFill>
@@ -8694,8 +9265,8 @@
         </p:nvSpPr>
         <p:spPr>
           <a:xfrm>
-            <a:off x="647700" y="704850"/>
-            <a:ext cx="6667500" cy="1047750"/>
+            <a:off x="647700" y="1538159"/>
+            <a:ext cx="6667500" cy="1077218"/>
           </a:xfrm>
           <a:prstGeom prst="rect">
             <a:avLst/>
@@ -8710,25 +9281,70 @@
           <a:p>
             <a:pPr algn="l"/>
             <a:r>
-              <a:rPr sz="3200" b="1">
-                <a:solidFill>
-                  <a:srgbClr val="EEF3FF"/>
+              <a:rPr sz="3200" b="1" dirty="0" err="1">
+                <a:solidFill>
+                  <a:schemeClr val="bg1"/>
                 </a:solidFill>
                 <a:latin typeface="Atkinson Hyperlegible"/>
               </a:rPr>
-              <a:t>Ces termes ne sont</a:t>
+              <a:t>Ces</a:t>
+            </a:r>
+            <a:r>
+              <a:rPr sz="3200" b="1" dirty="0">
+                <a:solidFill>
+                  <a:schemeClr val="bg1"/>
+                </a:solidFill>
+                <a:latin typeface="Atkinson Hyperlegible"/>
+              </a:rPr>
+              <a:t> </a:t>
+            </a:r>
+            <a:r>
+              <a:rPr sz="3200" b="1" dirty="0" err="1">
+                <a:solidFill>
+                  <a:schemeClr val="bg1"/>
+                </a:solidFill>
+                <a:latin typeface="Atkinson Hyperlegible"/>
+              </a:rPr>
+              <a:t>termes</a:t>
+            </a:r>
+            <a:r>
+              <a:rPr sz="3200" b="1" dirty="0">
+                <a:solidFill>
+                  <a:schemeClr val="bg1"/>
+                </a:solidFill>
+                <a:latin typeface="Atkinson Hyperlegible"/>
+              </a:rPr>
+              <a:t> ne sont</a:t>
             </a:r>
           </a:p>
           <a:p>
             <a:pPr algn="l"/>
             <a:r>
-              <a:rPr sz="3200" b="1">
-                <a:solidFill>
-                  <a:srgbClr val="EEF3FF"/>
+              <a:rPr sz="3200" b="1" dirty="0">
+                <a:solidFill>
+                  <a:schemeClr val="bg1"/>
                 </a:solidFill>
                 <a:latin typeface="Atkinson Hyperlegible"/>
               </a:rPr>
-              <a:t>pas synonymes.</a:t>
+              <a:t>pas </a:t>
+            </a:r>
+            <a:r>
+              <a:rPr sz="3200" b="1" dirty="0" err="1">
+                <a:solidFill>
+                  <a:schemeClr val="bg1"/>
+                </a:solidFill>
+                <a:latin typeface="Atkinson Hyperlegible"/>
+              </a:rPr>
+              <a:t>synonymes</a:t>
+            </a:r>
+            <a:r>
+              <a:rPr sz="3200" b="1" dirty="0">
+                <a:solidFill>
+                  <a:schemeClr val="bg1"/>
+                </a:solidFill>
+                <a:latin typeface="Atkinson Hyperlegible"/>
+              </a:rPr>
+              <a:t>.</a:t>
             </a:r>
           </a:p>
         </p:txBody>
@@ -8741,8 +9357,8 @@
         </p:nvSpPr>
         <p:spPr>
           <a:xfrm>
-            <a:off x="647700" y="1514475"/>
-            <a:ext cx="6667500" cy="533400"/>
+            <a:off x="647700" y="2651125"/>
+            <a:ext cx="6667500" cy="492443"/>
           </a:xfrm>
           <a:prstGeom prst="rect">
             <a:avLst/>
@@ -8756,15 +9372,138 @@
           <a:lstStyle/>
           <a:p>
             <a:r>
-              <a:rPr sz="1300">
+              <a:rPr sz="1300" dirty="0">
                 <a:solidFill>
                   <a:srgbClr val="B8CCEE"/>
                 </a:solidFill>
-                <a:latin typeface="DM Sans"/>
-              </a:rPr>
-              <a:t>Dans beaucoup d'organisations, quatre concepts sont utilisés comme s'ils désignaient
-                        la même chose. Cette confusion devient coûteuse.</a:t>
-            </a:r>
+              </a:rPr>
+              <a:t>Dans beaucoup </a:t>
+            </a:r>
+            <a:r>
+              <a:rPr sz="1300" dirty="0" err="1">
+                <a:solidFill>
+                  <a:srgbClr val="B8CCEE"/>
+                </a:solidFill>
+              </a:rPr>
+              <a:t>d'organisations</a:t>
+            </a:r>
+            <a:r>
+              <a:rPr sz="1300" dirty="0">
+                <a:solidFill>
+                  <a:srgbClr val="B8CCEE"/>
+                </a:solidFill>
+              </a:rPr>
+              <a:t>, quatre concepts sont utilisés </a:t>
+            </a:r>
+            <a:r>
+              <a:rPr sz="1300" dirty="0" err="1">
+                <a:solidFill>
+                  <a:srgbClr val="B8CCEE"/>
+                </a:solidFill>
+              </a:rPr>
+              <a:t>comme</a:t>
+            </a:r>
+            <a:r>
+              <a:rPr sz="1300" dirty="0">
+                <a:solidFill>
+                  <a:srgbClr val="B8CCEE"/>
+                </a:solidFill>
+              </a:rPr>
+              <a:t> </a:t>
+            </a:r>
+            <a:r>
+              <a:rPr sz="1300" dirty="0" err="1">
+                <a:solidFill>
+                  <a:srgbClr val="B8CCEE"/>
+                </a:solidFill>
+              </a:rPr>
+              <a:t>s'ils</a:t>
+            </a:r>
+            <a:r>
+              <a:rPr sz="1300" dirty="0">
+                <a:solidFill>
+                  <a:srgbClr val="B8CCEE"/>
+                </a:solidFill>
+              </a:rPr>
+              <a:t> </a:t>
+            </a:r>
+            <a:r>
+              <a:rPr sz="1300" dirty="0" err="1">
+                <a:solidFill>
+                  <a:srgbClr val="B8CCEE"/>
+                </a:solidFill>
+              </a:rPr>
+              <a:t>désignaient</a:t>
+            </a:r>
+            <a:r>
+              <a:rPr lang="fr-CA" sz="1300" dirty="0">
+                <a:solidFill>
+                  <a:srgbClr val="B8CCEE"/>
+                </a:solidFill>
+              </a:rPr>
+              <a:t> </a:t>
+            </a:r>
+            <a:r>
+              <a:rPr sz="1300" dirty="0">
+                <a:solidFill>
+                  <a:srgbClr val="B8CCEE"/>
+                </a:solidFill>
+              </a:rPr>
+              <a:t>la </a:t>
+            </a:r>
+            <a:r>
+              <a:rPr sz="1300" dirty="0" err="1">
+                <a:solidFill>
+                  <a:srgbClr val="B8CCEE"/>
+                </a:solidFill>
+              </a:rPr>
+              <a:t>même</a:t>
+            </a:r>
+            <a:r>
+              <a:rPr sz="1300" dirty="0">
+                <a:solidFill>
+                  <a:srgbClr val="B8CCEE"/>
+                </a:solidFill>
+              </a:rPr>
+              <a:t> chose. Cette confusion </a:t>
+            </a:r>
+            <a:r>
+              <a:rPr sz="1300" dirty="0" err="1">
+                <a:solidFill>
+                  <a:srgbClr val="B8CCEE"/>
+                </a:solidFill>
+              </a:rPr>
+              <a:t>devient</a:t>
+            </a:r>
+            <a:r>
+              <a:rPr sz="1300" dirty="0">
+                <a:solidFill>
+                  <a:srgbClr val="B8CCEE"/>
+                </a:solidFill>
+              </a:rPr>
+              <a:t> </a:t>
+            </a:r>
+            <a:r>
+              <a:rPr sz="1300" dirty="0" err="1">
+                <a:solidFill>
+                  <a:srgbClr val="B8CCEE"/>
+                </a:solidFill>
+              </a:rPr>
+              <a:t>coûteuse</a:t>
+            </a:r>
+            <a:r>
+              <a:rPr lang="fr-CA" sz="1300" dirty="0">
+                <a:solidFill>
+                  <a:srgbClr val="B8CCEE"/>
+                </a:solidFill>
+              </a:rPr>
+              <a:t>.</a:t>
+            </a:r>
+            <a:endParaRPr sz="1300" dirty="0">
+              <a:solidFill>
+                <a:srgbClr val="B8CCEE"/>
+              </a:solidFill>
+            </a:endParaRPr>
           </a:p>
         </p:txBody>
       </p:sp>
@@ -8776,7 +9515,7 @@
         </p:nvSpPr>
         <p:spPr>
           <a:xfrm>
-            <a:off x="647700" y="2085975"/>
+            <a:off x="1282700" y="3717925"/>
             <a:ext cx="38100" cy="647700"/>
           </a:xfrm>
           <a:prstGeom prst="rect">
@@ -8808,6 +9547,7 @@
           <a:lstStyle/>
           <a:p>
             <a:pPr algn="ctr"/>
+            <a:endParaRPr/>
           </a:p>
         </p:txBody>
       </p:sp>
@@ -8819,8 +9559,8 @@
         </p:nvSpPr>
         <p:spPr>
           <a:xfrm>
-            <a:off x="800100" y="2085975"/>
-            <a:ext cx="6515100" cy="647700"/>
+            <a:off x="1435100" y="3745587"/>
+            <a:ext cx="4438650" cy="430887"/>
           </a:xfrm>
           <a:prstGeom prst="rect">
             <a:avLst/>
@@ -8835,14 +9575,121 @@
           <a:p>
             <a:pPr algn="l"/>
             <a:r>
-              <a:rPr sz="1100" b="0" i="1">
-                <a:solidFill>
-                  <a:srgbClr val="EEF3FF"/>
-                </a:solidFill>
-                <a:latin typeface="DM Sans"/>
-              </a:rPr>
-              <a:t>Avant de parler d'agentique, il faut s'assurer que tout le monde part du même endroit.</a:t>
-            </a:r>
+              <a:rPr sz="1100" b="0" i="1" dirty="0">
+                <a:solidFill>
+                  <a:srgbClr val="EEF3FF"/>
+                </a:solidFill>
+              </a:rPr>
+              <a:t>Avant de </a:t>
+            </a:r>
+            <a:r>
+              <a:rPr sz="1100" b="0" i="1" dirty="0" err="1">
+                <a:solidFill>
+                  <a:srgbClr val="EEF3FF"/>
+                </a:solidFill>
+              </a:rPr>
+              <a:t>parler</a:t>
+            </a:r>
+            <a:r>
+              <a:rPr sz="1100" b="0" i="1" dirty="0">
+                <a:solidFill>
+                  <a:srgbClr val="EEF3FF"/>
+                </a:solidFill>
+              </a:rPr>
+              <a:t> </a:t>
+            </a:r>
+            <a:r>
+              <a:rPr sz="1100" b="0" i="1" dirty="0" err="1">
+                <a:solidFill>
+                  <a:srgbClr val="EEF3FF"/>
+                </a:solidFill>
+              </a:rPr>
+              <a:t>d'agentique</a:t>
+            </a:r>
+            <a:r>
+              <a:rPr sz="1100" b="0" i="1" dirty="0">
+                <a:solidFill>
+                  <a:srgbClr val="EEF3FF"/>
+                </a:solidFill>
+              </a:rPr>
+              <a:t>, il faut </a:t>
+            </a:r>
+            <a:r>
+              <a:rPr sz="1100" b="0" i="1" dirty="0" err="1">
+                <a:solidFill>
+                  <a:srgbClr val="EEF3FF"/>
+                </a:solidFill>
+              </a:rPr>
+              <a:t>s'assurer</a:t>
+            </a:r>
+            <a:r>
+              <a:rPr sz="1100" b="0" i="1" dirty="0">
+                <a:solidFill>
+                  <a:srgbClr val="EEF3FF"/>
+                </a:solidFill>
+              </a:rPr>
+              <a:t> </a:t>
+            </a:r>
+            <a:r>
+              <a:rPr sz="1100" b="0" i="1" dirty="0" err="1">
+                <a:solidFill>
+                  <a:srgbClr val="EEF3FF"/>
+                </a:solidFill>
+              </a:rPr>
+              <a:t>que</a:t>
+            </a:r>
+            <a:r>
+              <a:rPr sz="1100" b="0" i="1" dirty="0">
+                <a:solidFill>
+                  <a:srgbClr val="EEF3FF"/>
+                </a:solidFill>
+              </a:rPr>
+              <a:t> tout le monde part du </a:t>
+            </a:r>
+            <a:br>
+              <a:rPr lang="fr-CA" sz="1100" b="0" i="1" dirty="0">
+                <a:solidFill>
+                  <a:srgbClr val="EEF3FF"/>
+                </a:solidFill>
+              </a:rPr>
+            </a:br>
+            <a:r>
+              <a:rPr sz="1100" b="0" i="1" dirty="0" err="1">
+                <a:solidFill>
+                  <a:srgbClr val="EEF3FF"/>
+                </a:solidFill>
+              </a:rPr>
+              <a:t>même</a:t>
+            </a:r>
+            <a:r>
+              <a:rPr sz="1100" b="0" i="1" dirty="0">
+                <a:solidFill>
+                  <a:srgbClr val="EEF3FF"/>
+                </a:solidFill>
+              </a:rPr>
+              <a:t> </a:t>
+            </a:r>
+            <a:r>
+              <a:rPr sz="1100" b="0" i="1" dirty="0" err="1">
+                <a:solidFill>
+                  <a:srgbClr val="EEF3FF"/>
+                </a:solidFill>
+              </a:rPr>
+              <a:t>endroit</a:t>
+            </a:r>
+            <a:r>
+              <a:rPr lang="fr-CA" sz="1100" i="1" dirty="0">
+                <a:solidFill>
+                  <a:srgbClr val="EEF3FF"/>
+                </a:solidFill>
+              </a:rPr>
+              <a:t>.</a:t>
+            </a:r>
+            <a:endParaRPr sz="1100" b="0" i="1" dirty="0">
+              <a:solidFill>
+                <a:srgbClr val="EEF3FF"/>
+              </a:solidFill>
+            </a:endParaRPr>
           </a:p>
         </p:txBody>
       </p:sp>
@@ -8886,6 +9733,7 @@
           <a:lstStyle/>
           <a:p>
             <a:pPr algn="ctr"/>
+            <a:endParaRPr/>
           </a:p>
         </p:txBody>
       </p:sp>
@@ -8898,12 +9746,12 @@
 </file>
 
 <file path=ppt/slides/slide4.xml><?xml version="1.0" encoding="utf-8"?>
-<p:sld xmlns:a="http://schemas.openxmlformats.org/drawingml/2006/main" xmlns:p="http://schemas.openxmlformats.org/presentationml/2006/main" xmlns:r="http://schemas.openxmlformats.org/officeDocument/2006/relationships">
+<p:sld xmlns:a="http://schemas.openxmlformats.org/drawingml/2006/main" xmlns:r="http://schemas.openxmlformats.org/officeDocument/2006/relationships" xmlns:p="http://schemas.openxmlformats.org/presentationml/2006/main">
   <p:cSld>
     <p:bg>
       <p:bgPr>
         <a:solidFill>
-          <a:srgbClr val="060D1A"/>
+          <a:schemeClr val="tx2"/>
         </a:solidFill>
         <a:effectLst/>
       </p:bgPr>
@@ -8914,7 +9762,14 @@
         <p:cNvGrpSpPr/>
         <p:nvPr/>
       </p:nvGrpSpPr>
-      <p:grpSpPr/>
+      <p:grpSpPr>
+        <a:xfrm>
+          <a:off x="0" y="0"/>
+          <a:ext cx="0" cy="0"/>
+          <a:chOff x="0" y="0"/>
+          <a:chExt cx="0" cy="0"/>
+        </a:xfrm>
+      </p:grpSpPr>
       <p:sp>
         <p:nvSpPr>
           <p:cNvPr id="2" name="Rectangle 1"/>
@@ -8955,6 +9810,7 @@
           <a:lstStyle/>
           <a:p>
             <a:pPr algn="ctr"/>
+            <a:endParaRPr/>
           </a:p>
         </p:txBody>
       </p:sp>
@@ -8966,8 +9822,8 @@
         </p:nvSpPr>
         <p:spPr>
           <a:xfrm>
-            <a:off x="647700" y="495300"/>
-            <a:ext cx="6858000" cy="190500"/>
+            <a:off x="647700" y="1674419"/>
+            <a:ext cx="6858000" cy="230832"/>
           </a:xfrm>
           <a:prstGeom prst="rect">
             <a:avLst/>
@@ -8982,7 +9838,7 @@
           <a:p>
             <a:pPr algn="l"/>
             <a:r>
-              <a:rPr sz="900" b="0" i="0">
+              <a:rPr sz="900" b="0" i="0" spc="300" dirty="0">
                 <a:solidFill>
                   <a:srgbClr val="B8CCEE"/>
                 </a:solidFill>
@@ -9001,7 +9857,7 @@
         </p:nvSpPr>
         <p:spPr>
           <a:xfrm>
-            <a:off x="647700" y="704850"/>
+            <a:off x="647700" y="1883969"/>
             <a:ext cx="6858000" cy="1047750"/>
           </a:xfrm>
           <a:prstGeom prst="rect">
@@ -9048,8 +9904,8 @@
         </p:nvSpPr>
         <p:spPr>
           <a:xfrm>
-            <a:off x="647700" y="1514475"/>
-            <a:ext cx="6858000" cy="533400"/>
+            <a:off x="647700" y="3015463"/>
+            <a:ext cx="6858000" cy="492443"/>
           </a:xfrm>
           <a:prstGeom prst="rect">
             <a:avLst/>
@@ -9063,32 +9919,182 @@
           <a:lstStyle/>
           <a:p>
             <a:r>
-              <a:rPr sz="1300">
-                <a:solidFill>
-                  <a:srgbClr val="B8CCEE"/>
-                </a:solidFill>
-                <a:latin typeface="DM Sans"/>
-              </a:rPr>
-              <a:t>Ce qui le distingue d'un recueil visuel, c'est sa dimension de
-                        </a:t>
-            </a:r>
-            <a:r>
-              <a:rPr sz="1300" b="1">
-                <a:solidFill>
-                  <a:srgbClr val="EEF3FF"/>
-                </a:solidFill>
-                <a:latin typeface="DM Sans"/>
+              <a:rPr sz="1300" dirty="0">
+                <a:solidFill>
+                  <a:schemeClr val="bg1">
+                    <a:alpha val="85000"/>
+                  </a:schemeClr>
+                </a:solidFill>
+              </a:rPr>
+              <a:t>Ce qui le distingue d'un </a:t>
+            </a:r>
+            <a:r>
+              <a:rPr sz="1300" dirty="0" err="1">
+                <a:solidFill>
+                  <a:schemeClr val="bg1">
+                    <a:alpha val="85000"/>
+                  </a:schemeClr>
+                </a:solidFill>
+              </a:rPr>
+              <a:t>recueil</a:t>
+            </a:r>
+            <a:r>
+              <a:rPr sz="1300" dirty="0">
+                <a:solidFill>
+                  <a:schemeClr val="bg1">
+                    <a:alpha val="85000"/>
+                  </a:schemeClr>
+                </a:solidFill>
+              </a:rPr>
+              <a:t> </a:t>
+            </a:r>
+            <a:r>
+              <a:rPr sz="1300" dirty="0" err="1">
+                <a:solidFill>
+                  <a:schemeClr val="bg1">
+                    <a:alpha val="85000"/>
+                  </a:schemeClr>
+                </a:solidFill>
+              </a:rPr>
+              <a:t>visuel</a:t>
+            </a:r>
+            <a:r>
+              <a:rPr sz="1300" dirty="0">
+                <a:solidFill>
+                  <a:schemeClr val="bg1">
+                    <a:alpha val="85000"/>
+                  </a:schemeClr>
+                </a:solidFill>
+              </a:rPr>
+              <a:t>, </a:t>
+            </a:r>
+            <a:r>
+              <a:rPr sz="1300" dirty="0" err="1">
+                <a:solidFill>
+                  <a:schemeClr val="bg1">
+                    <a:alpha val="85000"/>
+                  </a:schemeClr>
+                </a:solidFill>
+              </a:rPr>
+              <a:t>c'est</a:t>
+            </a:r>
+            <a:r>
+              <a:rPr sz="1300" dirty="0">
+                <a:solidFill>
+                  <a:schemeClr val="bg1">
+                    <a:alpha val="85000"/>
+                  </a:schemeClr>
+                </a:solidFill>
+              </a:rPr>
+              <a:t> </a:t>
+            </a:r>
+            <a:r>
+              <a:rPr sz="1300" dirty="0" err="1">
+                <a:solidFill>
+                  <a:schemeClr val="bg1">
+                    <a:alpha val="85000"/>
+                  </a:schemeClr>
+                </a:solidFill>
+              </a:rPr>
+              <a:t>sa</a:t>
+            </a:r>
+            <a:r>
+              <a:rPr sz="1300" dirty="0">
+                <a:solidFill>
+                  <a:schemeClr val="bg1">
+                    <a:alpha val="85000"/>
+                  </a:schemeClr>
+                </a:solidFill>
+              </a:rPr>
+              <a:t> dimension de</a:t>
+            </a:r>
+            <a:r>
+              <a:rPr lang="fr-CA" sz="1300" dirty="0">
+                <a:solidFill>
+                  <a:schemeClr val="bg1">
+                    <a:alpha val="85000"/>
+                  </a:schemeClr>
+                </a:solidFill>
+              </a:rPr>
+              <a:t> </a:t>
+            </a:r>
+            <a:r>
+              <a:rPr sz="1300" b="1" dirty="0" err="1">
+                <a:solidFill>
+                  <a:schemeClr val="bg1"/>
+                </a:solidFill>
               </a:rPr>
               <a:t>gouvernance</a:t>
             </a:r>
             <a:r>
-              <a:rPr sz="1300">
-                <a:solidFill>
-                  <a:srgbClr val="B8CCEE"/>
-                </a:solidFill>
-                <a:latin typeface="DM Sans"/>
-              </a:rPr>
-              <a:t> : il encode des décisions, pas seulement des apparences.</a:t>
+              <a:rPr sz="1300" dirty="0">
+                <a:solidFill>
+                  <a:schemeClr val="bg1">
+                    <a:alpha val="85000"/>
+                  </a:schemeClr>
+                </a:solidFill>
+              </a:rPr>
+              <a:t> : il encode des </a:t>
+            </a:r>
+            <a:r>
+              <a:rPr sz="1300" dirty="0" err="1">
+                <a:solidFill>
+                  <a:schemeClr val="bg1">
+                    <a:alpha val="85000"/>
+                  </a:schemeClr>
+                </a:solidFill>
+              </a:rPr>
+              <a:t>décisions</a:t>
+            </a:r>
+            <a:r>
+              <a:rPr sz="1300" dirty="0">
+                <a:solidFill>
+                  <a:schemeClr val="bg1">
+                    <a:alpha val="85000"/>
+                  </a:schemeClr>
+                </a:solidFill>
+              </a:rPr>
+              <a:t>, pas </a:t>
+            </a:r>
+            <a:r>
+              <a:rPr sz="1300" dirty="0" err="1">
+                <a:solidFill>
+                  <a:schemeClr val="bg1">
+                    <a:alpha val="85000"/>
+                  </a:schemeClr>
+                </a:solidFill>
+              </a:rPr>
+              <a:t>seulement</a:t>
+            </a:r>
+            <a:r>
+              <a:rPr sz="1300" dirty="0">
+                <a:solidFill>
+                  <a:schemeClr val="bg1">
+                    <a:alpha val="85000"/>
+                  </a:schemeClr>
+                </a:solidFill>
+              </a:rPr>
+              <a:t> des </a:t>
+            </a:r>
+            <a:r>
+              <a:rPr sz="1300" dirty="0" err="1">
+                <a:solidFill>
+                  <a:schemeClr val="bg1">
+                    <a:alpha val="85000"/>
+                  </a:schemeClr>
+                </a:solidFill>
+              </a:rPr>
+              <a:t>apparences</a:t>
+            </a:r>
+            <a:r>
+              <a:rPr sz="1300" dirty="0">
+                <a:solidFill>
+                  <a:schemeClr val="bg1">
+                    <a:alpha val="85000"/>
+                  </a:schemeClr>
+                </a:solidFill>
+              </a:rPr>
+              <a:t>.</a:t>
             </a:r>
           </a:p>
         </p:txBody>
@@ -9101,8 +10107,8 @@
         </p:nvSpPr>
         <p:spPr>
           <a:xfrm>
-            <a:off x="647700" y="2085975"/>
-            <a:ext cx="6858000" cy="533400"/>
+            <a:off x="647700" y="3586963"/>
+            <a:ext cx="6858000" cy="461665"/>
           </a:xfrm>
           <a:prstGeom prst="rect">
             <a:avLst/>
@@ -9116,15 +10122,411 @@
           <a:lstStyle/>
           <a:p>
             <a:r>
-              <a:rPr sz="1200">
-                <a:solidFill>
-                  <a:srgbClr val="7A90B8"/>
+              <a:rPr sz="1200" dirty="0">
+                <a:solidFill>
+                  <a:schemeClr val="tx2">
+                    <a:lumMod val="40000"/>
+                    <a:lumOff val="60000"/>
+                  </a:schemeClr>
                 </a:solidFill>
                 <a:latin typeface="DM Sans"/>
               </a:rPr>
-              <a:t>Il répond à des questions comme : « Dans
-                        quel contexte utilise-t-on ce composant ? », « Quelles variantes sont permises ? », « Que se
-                        passe-t-il quand on dépasse cette limite ? »</a:t>
+              <a:t>Il </a:t>
+            </a:r>
+            <a:r>
+              <a:rPr sz="1200" dirty="0" err="1">
+                <a:solidFill>
+                  <a:schemeClr val="tx2">
+                    <a:lumMod val="40000"/>
+                    <a:lumOff val="60000"/>
+                  </a:schemeClr>
+                </a:solidFill>
+                <a:latin typeface="DM Sans"/>
+              </a:rPr>
+              <a:t>répond</a:t>
+            </a:r>
+            <a:r>
+              <a:rPr sz="1200" dirty="0">
+                <a:solidFill>
+                  <a:schemeClr val="tx2">
+                    <a:lumMod val="40000"/>
+                    <a:lumOff val="60000"/>
+                  </a:schemeClr>
+                </a:solidFill>
+                <a:latin typeface="DM Sans"/>
+              </a:rPr>
+              <a:t> à des questions </a:t>
+            </a:r>
+            <a:r>
+              <a:rPr sz="1200" dirty="0" err="1">
+                <a:solidFill>
+                  <a:schemeClr val="tx2">
+                    <a:lumMod val="40000"/>
+                    <a:lumOff val="60000"/>
+                  </a:schemeClr>
+                </a:solidFill>
+                <a:latin typeface="DM Sans"/>
+              </a:rPr>
+              <a:t>comme</a:t>
+            </a:r>
+            <a:r>
+              <a:rPr sz="1200" dirty="0">
+                <a:solidFill>
+                  <a:schemeClr val="tx2">
+                    <a:lumMod val="40000"/>
+                    <a:lumOff val="60000"/>
+                  </a:schemeClr>
+                </a:solidFill>
+                <a:latin typeface="DM Sans"/>
+              </a:rPr>
+              <a:t> : « Dans</a:t>
+            </a:r>
+            <a:r>
+              <a:rPr lang="fr-CA" sz="1200" dirty="0">
+                <a:solidFill>
+                  <a:schemeClr val="tx2">
+                    <a:lumMod val="40000"/>
+                    <a:lumOff val="60000"/>
+                  </a:schemeClr>
+                </a:solidFill>
+                <a:latin typeface="DM Sans"/>
+              </a:rPr>
+              <a:t> </a:t>
+            </a:r>
+            <a:r>
+              <a:rPr sz="1200" dirty="0" err="1">
+                <a:solidFill>
+                  <a:schemeClr val="tx2">
+                    <a:lumMod val="40000"/>
+                    <a:lumOff val="60000"/>
+                  </a:schemeClr>
+                </a:solidFill>
+                <a:latin typeface="DM Sans"/>
+              </a:rPr>
+              <a:t>quel</a:t>
+            </a:r>
+            <a:r>
+              <a:rPr sz="1200" dirty="0">
+                <a:solidFill>
+                  <a:schemeClr val="tx2">
+                    <a:lumMod val="40000"/>
+                    <a:lumOff val="60000"/>
+                  </a:schemeClr>
+                </a:solidFill>
+                <a:latin typeface="DM Sans"/>
+              </a:rPr>
+              <a:t> </a:t>
+            </a:r>
+            <a:r>
+              <a:rPr sz="1200" dirty="0" err="1">
+                <a:solidFill>
+                  <a:schemeClr val="tx2">
+                    <a:lumMod val="40000"/>
+                    <a:lumOff val="60000"/>
+                  </a:schemeClr>
+                </a:solidFill>
+                <a:latin typeface="DM Sans"/>
+              </a:rPr>
+              <a:t>contexte</a:t>
+            </a:r>
+            <a:r>
+              <a:rPr sz="1200" dirty="0">
+                <a:solidFill>
+                  <a:schemeClr val="tx2">
+                    <a:lumMod val="40000"/>
+                    <a:lumOff val="60000"/>
+                  </a:schemeClr>
+                </a:solidFill>
+                <a:latin typeface="DM Sans"/>
+              </a:rPr>
+              <a:t> </a:t>
+            </a:r>
+            <a:r>
+              <a:rPr sz="1200" dirty="0" err="1">
+                <a:solidFill>
+                  <a:schemeClr val="tx2">
+                    <a:lumMod val="40000"/>
+                    <a:lumOff val="60000"/>
+                  </a:schemeClr>
+                </a:solidFill>
+                <a:latin typeface="DM Sans"/>
+              </a:rPr>
+              <a:t>utilise</a:t>
+            </a:r>
+            <a:r>
+              <a:rPr sz="1200" dirty="0">
+                <a:solidFill>
+                  <a:schemeClr val="tx2">
+                    <a:lumMod val="40000"/>
+                    <a:lumOff val="60000"/>
+                  </a:schemeClr>
+                </a:solidFill>
+                <a:latin typeface="DM Sans"/>
+              </a:rPr>
+              <a:t>-t-on </a:t>
+            </a:r>
+            <a:r>
+              <a:rPr sz="1200" dirty="0" err="1">
+                <a:solidFill>
+                  <a:schemeClr val="tx2">
+                    <a:lumMod val="40000"/>
+                    <a:lumOff val="60000"/>
+                  </a:schemeClr>
+                </a:solidFill>
+                <a:latin typeface="DM Sans"/>
+              </a:rPr>
+              <a:t>ce</a:t>
+            </a:r>
+            <a:r>
+              <a:rPr sz="1200" dirty="0">
+                <a:solidFill>
+                  <a:schemeClr val="tx2">
+                    <a:lumMod val="40000"/>
+                    <a:lumOff val="60000"/>
+                  </a:schemeClr>
+                </a:solidFill>
+                <a:latin typeface="DM Sans"/>
+              </a:rPr>
+              <a:t> </a:t>
+            </a:r>
+            <a:r>
+              <a:rPr sz="1200" dirty="0" err="1">
+                <a:solidFill>
+                  <a:schemeClr val="tx2">
+                    <a:lumMod val="40000"/>
+                    <a:lumOff val="60000"/>
+                  </a:schemeClr>
+                </a:solidFill>
+                <a:latin typeface="DM Sans"/>
+              </a:rPr>
+              <a:t>composant</a:t>
+            </a:r>
+            <a:r>
+              <a:rPr sz="1200" dirty="0">
+                <a:solidFill>
+                  <a:schemeClr val="tx2">
+                    <a:lumMod val="40000"/>
+                    <a:lumOff val="60000"/>
+                  </a:schemeClr>
+                </a:solidFill>
+                <a:latin typeface="DM Sans"/>
+              </a:rPr>
+              <a:t> ? », « </a:t>
+            </a:r>
+            <a:r>
+              <a:rPr sz="1200" dirty="0" err="1">
+                <a:solidFill>
+                  <a:schemeClr val="tx2">
+                    <a:lumMod val="40000"/>
+                    <a:lumOff val="60000"/>
+                  </a:schemeClr>
+                </a:solidFill>
+              </a:rPr>
+              <a:t>Quelles</a:t>
+            </a:r>
+            <a:r>
+              <a:rPr sz="1200" dirty="0">
+                <a:solidFill>
+                  <a:schemeClr val="tx2">
+                    <a:lumMod val="40000"/>
+                    <a:lumOff val="60000"/>
+                  </a:schemeClr>
+                </a:solidFill>
+                <a:latin typeface="DM Sans"/>
+              </a:rPr>
+              <a:t> </a:t>
+            </a:r>
+            <a:r>
+              <a:rPr sz="1200" dirty="0" err="1">
+                <a:solidFill>
+                  <a:schemeClr val="tx2">
+                    <a:lumMod val="40000"/>
+                    <a:lumOff val="60000"/>
+                  </a:schemeClr>
+                </a:solidFill>
+                <a:latin typeface="DM Sans"/>
+              </a:rPr>
+              <a:t>variantes</a:t>
+            </a:r>
+            <a:r>
+              <a:rPr sz="1200" dirty="0">
+                <a:solidFill>
+                  <a:schemeClr val="tx2">
+                    <a:lumMod val="40000"/>
+                    <a:lumOff val="60000"/>
+                  </a:schemeClr>
+                </a:solidFill>
+                <a:latin typeface="DM Sans"/>
+              </a:rPr>
+              <a:t> sont </a:t>
+            </a:r>
+            <a:r>
+              <a:rPr sz="1200" dirty="0" err="1">
+                <a:solidFill>
+                  <a:schemeClr val="tx2">
+                    <a:lumMod val="40000"/>
+                    <a:lumOff val="60000"/>
+                  </a:schemeClr>
+                </a:solidFill>
+                <a:latin typeface="DM Sans"/>
+              </a:rPr>
+              <a:t>permises</a:t>
+            </a:r>
+            <a:r>
+              <a:rPr sz="1200" dirty="0">
+                <a:solidFill>
+                  <a:schemeClr val="tx2">
+                    <a:lumMod val="40000"/>
+                    <a:lumOff val="60000"/>
+                  </a:schemeClr>
+                </a:solidFill>
+                <a:latin typeface="DM Sans"/>
+              </a:rPr>
+              <a:t> ? », « </a:t>
+            </a:r>
+            <a:r>
+              <a:rPr sz="1200" dirty="0" err="1">
+                <a:solidFill>
+                  <a:schemeClr val="tx2">
+                    <a:lumMod val="40000"/>
+                    <a:lumOff val="60000"/>
+                  </a:schemeClr>
+                </a:solidFill>
+                <a:latin typeface="DM Sans"/>
+              </a:rPr>
+              <a:t>Que</a:t>
+            </a:r>
+            <a:r>
+              <a:rPr sz="1200" dirty="0">
+                <a:solidFill>
+                  <a:schemeClr val="tx2">
+                    <a:lumMod val="40000"/>
+                    <a:lumOff val="60000"/>
+                  </a:schemeClr>
+                </a:solidFill>
+                <a:latin typeface="DM Sans"/>
+              </a:rPr>
+              <a:t> se</a:t>
+            </a:r>
+            <a:r>
+              <a:rPr lang="fr-CA" sz="1200" dirty="0">
+                <a:solidFill>
+                  <a:schemeClr val="tx2">
+                    <a:lumMod val="40000"/>
+                    <a:lumOff val="60000"/>
+                  </a:schemeClr>
+                </a:solidFill>
+                <a:latin typeface="DM Sans"/>
+              </a:rPr>
+              <a:t> </a:t>
+            </a:r>
+            <a:r>
+              <a:rPr sz="1200" dirty="0">
+                <a:solidFill>
+                  <a:schemeClr val="tx2">
+                    <a:lumMod val="40000"/>
+                    <a:lumOff val="60000"/>
+                  </a:schemeClr>
+                </a:solidFill>
+                <a:latin typeface="DM Sans"/>
+              </a:rPr>
+              <a:t>passe-t-il </a:t>
+            </a:r>
+            <a:r>
+              <a:rPr sz="1200" dirty="0" err="1">
+                <a:solidFill>
+                  <a:schemeClr val="tx2">
+                    <a:lumMod val="40000"/>
+                    <a:lumOff val="60000"/>
+                  </a:schemeClr>
+                </a:solidFill>
+                <a:latin typeface="DM Sans"/>
+              </a:rPr>
+              <a:t>quand</a:t>
+            </a:r>
+            <a:r>
+              <a:rPr sz="1200" dirty="0">
+                <a:solidFill>
+                  <a:schemeClr val="tx2">
+                    <a:lumMod val="40000"/>
+                    <a:lumOff val="60000"/>
+                  </a:schemeClr>
+                </a:solidFill>
+                <a:latin typeface="DM Sans"/>
+              </a:rPr>
+              <a:t> on </a:t>
+            </a:r>
+            <a:r>
+              <a:rPr sz="1200" dirty="0" err="1">
+                <a:solidFill>
+                  <a:schemeClr val="tx2">
+                    <a:lumMod val="40000"/>
+                    <a:lumOff val="60000"/>
+                  </a:schemeClr>
+                </a:solidFill>
+                <a:latin typeface="DM Sans"/>
+              </a:rPr>
+              <a:t>dépasse</a:t>
+            </a:r>
+            <a:r>
+              <a:rPr sz="1200" dirty="0">
+                <a:solidFill>
+                  <a:schemeClr val="tx2">
+                    <a:lumMod val="40000"/>
+                    <a:lumOff val="60000"/>
+                  </a:schemeClr>
+                </a:solidFill>
+                <a:latin typeface="DM Sans"/>
+              </a:rPr>
+              <a:t> </a:t>
+            </a:r>
+            <a:r>
+              <a:rPr sz="1200" dirty="0" err="1">
+                <a:solidFill>
+                  <a:schemeClr val="tx2">
+                    <a:lumMod val="40000"/>
+                    <a:lumOff val="60000"/>
+                  </a:schemeClr>
+                </a:solidFill>
+                <a:latin typeface="DM Sans"/>
+              </a:rPr>
+              <a:t>cette</a:t>
+            </a:r>
+            <a:r>
+              <a:rPr sz="1200" dirty="0">
+                <a:solidFill>
+                  <a:schemeClr val="tx2">
+                    <a:lumMod val="40000"/>
+                    <a:lumOff val="60000"/>
+                  </a:schemeClr>
+                </a:solidFill>
+                <a:latin typeface="DM Sans"/>
+              </a:rPr>
+              <a:t> </a:t>
+            </a:r>
+            <a:r>
+              <a:rPr sz="1200" dirty="0" err="1">
+                <a:solidFill>
+                  <a:schemeClr val="tx2">
+                    <a:lumMod val="40000"/>
+                    <a:lumOff val="60000"/>
+                  </a:schemeClr>
+                </a:solidFill>
+                <a:latin typeface="DM Sans"/>
+              </a:rPr>
+              <a:t>limite</a:t>
+            </a:r>
+            <a:r>
+              <a:rPr sz="1200" dirty="0">
+                <a:solidFill>
+                  <a:schemeClr val="tx2">
+                    <a:lumMod val="40000"/>
+                    <a:lumOff val="60000"/>
+                  </a:schemeClr>
+                </a:solidFill>
+                <a:latin typeface="DM Sans"/>
+              </a:rPr>
+              <a:t> ? »</a:t>
             </a:r>
           </a:p>
         </p:txBody>
@@ -9137,8 +10539,8 @@
         </p:nvSpPr>
         <p:spPr>
           <a:xfrm>
-            <a:off x="647700" y="2657475"/>
-            <a:ext cx="6858000" cy="533400"/>
+            <a:off x="647700" y="4158463"/>
+            <a:ext cx="6858000" cy="261610"/>
           </a:xfrm>
           <a:prstGeom prst="rect">
             <a:avLst/>
@@ -9152,14 +10554,213 @@
           <a:lstStyle/>
           <a:p>
             <a:r>
-              <a:rPr sz="1100">
-                <a:solidFill>
-                  <a:srgbClr val="7A90B8"/>
-                </a:solidFill>
-                <a:latin typeface="DM Sans"/>
-              </a:rPr>
-              <a:t>Ces décisions ne se voient pas toujours
-                        dans une interface — mais ce sont elles qui font tenir l'ensemble.</a:t>
+              <a:rPr sz="1100" dirty="0" err="1">
+                <a:solidFill>
+                  <a:schemeClr val="tx2">
+                    <a:lumMod val="40000"/>
+                    <a:lumOff val="60000"/>
+                  </a:schemeClr>
+                </a:solidFill>
+              </a:rPr>
+              <a:t>Ces</a:t>
+            </a:r>
+            <a:r>
+              <a:rPr sz="1100" dirty="0">
+                <a:solidFill>
+                  <a:schemeClr val="tx2">
+                    <a:lumMod val="40000"/>
+                    <a:lumOff val="60000"/>
+                  </a:schemeClr>
+                </a:solidFill>
+              </a:rPr>
+              <a:t> </a:t>
+            </a:r>
+            <a:r>
+              <a:rPr sz="1100" dirty="0" err="1">
+                <a:solidFill>
+                  <a:schemeClr val="tx2">
+                    <a:lumMod val="40000"/>
+                    <a:lumOff val="60000"/>
+                  </a:schemeClr>
+                </a:solidFill>
+              </a:rPr>
+              <a:t>décisions</a:t>
+            </a:r>
+            <a:r>
+              <a:rPr sz="1100" dirty="0">
+                <a:solidFill>
+                  <a:schemeClr val="tx2">
+                    <a:lumMod val="40000"/>
+                    <a:lumOff val="60000"/>
+                  </a:schemeClr>
+                </a:solidFill>
+              </a:rPr>
+              <a:t> ne se </a:t>
+            </a:r>
+            <a:r>
+              <a:rPr sz="1100" dirty="0" err="1">
+                <a:solidFill>
+                  <a:schemeClr val="tx2">
+                    <a:lumMod val="40000"/>
+                    <a:lumOff val="60000"/>
+                  </a:schemeClr>
+                </a:solidFill>
+              </a:rPr>
+              <a:t>voient</a:t>
+            </a:r>
+            <a:r>
+              <a:rPr sz="1100" dirty="0">
+                <a:solidFill>
+                  <a:schemeClr val="tx2">
+                    <a:lumMod val="40000"/>
+                    <a:lumOff val="60000"/>
+                  </a:schemeClr>
+                </a:solidFill>
+              </a:rPr>
+              <a:t> pas </a:t>
+            </a:r>
+            <a:r>
+              <a:rPr sz="1100" dirty="0" err="1">
+                <a:solidFill>
+                  <a:schemeClr val="tx2">
+                    <a:lumMod val="40000"/>
+                    <a:lumOff val="60000"/>
+                  </a:schemeClr>
+                </a:solidFill>
+              </a:rPr>
+              <a:t>toujours</a:t>
+            </a:r>
+            <a:r>
+              <a:rPr lang="fr-CA" sz="1100" dirty="0">
+                <a:solidFill>
+                  <a:schemeClr val="tx2">
+                    <a:lumMod val="40000"/>
+                    <a:lumOff val="60000"/>
+                  </a:schemeClr>
+                </a:solidFill>
+              </a:rPr>
+              <a:t> </a:t>
+            </a:r>
+            <a:r>
+              <a:rPr sz="1100" dirty="0">
+                <a:solidFill>
+                  <a:schemeClr val="tx2">
+                    <a:lumMod val="40000"/>
+                    <a:lumOff val="60000"/>
+                  </a:schemeClr>
+                </a:solidFill>
+              </a:rPr>
+              <a:t>dans une interface — </a:t>
+            </a:r>
+            <a:r>
+              <a:rPr sz="1100" dirty="0" err="1">
+                <a:solidFill>
+                  <a:schemeClr val="tx2">
+                    <a:lumMod val="40000"/>
+                    <a:lumOff val="60000"/>
+                  </a:schemeClr>
+                </a:solidFill>
+              </a:rPr>
+              <a:t>mais</a:t>
+            </a:r>
+            <a:r>
+              <a:rPr sz="1100" dirty="0">
+                <a:solidFill>
+                  <a:schemeClr val="tx2">
+                    <a:lumMod val="40000"/>
+                    <a:lumOff val="60000"/>
+                  </a:schemeClr>
+                </a:solidFill>
+              </a:rPr>
+              <a:t> </a:t>
+            </a:r>
+            <a:r>
+              <a:rPr sz="1100" dirty="0" err="1">
+                <a:solidFill>
+                  <a:schemeClr val="tx2">
+                    <a:lumMod val="40000"/>
+                    <a:lumOff val="60000"/>
+                  </a:schemeClr>
+                </a:solidFill>
+              </a:rPr>
+              <a:t>ce</a:t>
+            </a:r>
+            <a:r>
+              <a:rPr sz="1100" dirty="0">
+                <a:solidFill>
+                  <a:schemeClr val="tx2">
+                    <a:lumMod val="40000"/>
+                    <a:lumOff val="60000"/>
+                  </a:schemeClr>
+                </a:solidFill>
+              </a:rPr>
+              <a:t> sont </a:t>
+            </a:r>
+            <a:r>
+              <a:rPr sz="1100" dirty="0" err="1">
+                <a:solidFill>
+                  <a:schemeClr val="tx2">
+                    <a:lumMod val="40000"/>
+                    <a:lumOff val="60000"/>
+                  </a:schemeClr>
+                </a:solidFill>
+              </a:rPr>
+              <a:t>elles</a:t>
+            </a:r>
+            <a:r>
+              <a:rPr sz="1100" dirty="0">
+                <a:solidFill>
+                  <a:schemeClr val="tx2">
+                    <a:lumMod val="40000"/>
+                    <a:lumOff val="60000"/>
+                  </a:schemeClr>
+                </a:solidFill>
+              </a:rPr>
+              <a:t> qui font </a:t>
+            </a:r>
+            <a:r>
+              <a:rPr sz="1100" dirty="0" err="1">
+                <a:solidFill>
+                  <a:schemeClr val="tx2">
+                    <a:lumMod val="40000"/>
+                    <a:lumOff val="60000"/>
+                  </a:schemeClr>
+                </a:solidFill>
+              </a:rPr>
+              <a:t>tenir</a:t>
+            </a:r>
+            <a:r>
+              <a:rPr sz="1100" dirty="0">
+                <a:solidFill>
+                  <a:schemeClr val="tx2">
+                    <a:lumMod val="40000"/>
+                    <a:lumOff val="60000"/>
+                  </a:schemeClr>
+                </a:solidFill>
+              </a:rPr>
+              <a:t> </a:t>
+            </a:r>
+            <a:r>
+              <a:rPr sz="1100" dirty="0" err="1">
+                <a:solidFill>
+                  <a:schemeClr val="tx2">
+                    <a:lumMod val="40000"/>
+                    <a:lumOff val="60000"/>
+                  </a:schemeClr>
+                </a:solidFill>
+              </a:rPr>
+              <a:t>l'ensemble</a:t>
+            </a:r>
+            <a:r>
+              <a:rPr sz="1100" dirty="0">
+                <a:solidFill>
+                  <a:schemeClr val="tx2">
+                    <a:lumMod val="40000"/>
+                    <a:lumOff val="60000"/>
+                  </a:schemeClr>
+                </a:solidFill>
+              </a:rPr>
+              <a:t>.</a:t>
             </a:r>
           </a:p>
         </p:txBody>
@@ -9178,9 +10779,25 @@
           <a:prstGeom prst="rect">
             <a:avLst/>
           </a:prstGeom>
-          <a:solidFill>
-            <a:srgbClr val="2B7FFF"/>
-          </a:solidFill>
+          <a:gradFill flip="none" rotWithShape="1">
+            <a:gsLst>
+              <a:gs pos="0">
+                <a:srgbClr val="3F47EB"/>
+              </a:gs>
+              <a:gs pos="100000">
+                <a:schemeClr val="tx2">
+                  <a:lumMod val="50000"/>
+                </a:schemeClr>
+              </a:gs>
+              <a:gs pos="46000">
+                <a:srgbClr val="183466"/>
+              </a:gs>
+            </a:gsLst>
+            <a:path path="circle">
+              <a:fillToRect l="50000" t="50000" r="50000" b="50000"/>
+            </a:path>
+            <a:tileRect/>
+          </a:gradFill>
           <a:ln>
             <a:noFill/>
           </a:ln>
@@ -9204,6 +10821,7 @@
           <a:lstStyle/>
           <a:p>
             <a:pPr algn="ctr"/>
+            <a:endParaRPr/>
           </a:p>
         </p:txBody>
       </p:sp>
@@ -9215,8 +10833,8 @@
         </p:nvSpPr>
         <p:spPr>
           <a:xfrm>
-            <a:off x="8267700" y="1333500"/>
-            <a:ext cx="3467100" cy="1238250"/>
+            <a:off x="8267700" y="1949793"/>
+            <a:ext cx="3467100" cy="1846659"/>
           </a:xfrm>
           <a:prstGeom prst="rect">
             <a:avLst/>
@@ -9230,33 +10848,208 @@
           <a:lstStyle/>
           <a:p>
             <a:r>
-              <a:rPr sz="1900" b="1">
+              <a:rPr sz="1900" b="1" dirty="0">
                 <a:solidFill>
                   <a:srgbClr val="EEF3FF"/>
                 </a:solidFill>
                 <a:latin typeface="Atkinson Hyperlegible"/>
               </a:rPr>
+              <a:t>Un ensemble </a:t>
+            </a:r>
+            <a:r>
+              <a:rPr sz="1900" b="1" dirty="0" err="1">
+                <a:solidFill>
+                  <a:srgbClr val="EEF3FF"/>
+                </a:solidFill>
+                <a:latin typeface="Atkinson Hyperlegible"/>
+              </a:rPr>
+              <a:t>structuré</a:t>
+            </a:r>
+            <a:r>
+              <a:rPr sz="1900" b="1" dirty="0">
+                <a:solidFill>
+                  <a:srgbClr val="EEF3FF"/>
+                </a:solidFill>
+                <a:latin typeface="Atkinson Hyperlegible"/>
+              </a:rPr>
+              <a:t> de </a:t>
+            </a:r>
+            <a:r>
+              <a:rPr sz="1900" b="1" dirty="0" err="1">
+                <a:solidFill>
+                  <a:srgbClr val="14D9C8"/>
+                </a:solidFill>
+                <a:latin typeface="Atkinson Hyperlegible"/>
+              </a:rPr>
+              <a:t>décisions</a:t>
+            </a:r>
+            <a:r>
+              <a:rPr sz="1900" b="1" dirty="0">
+                <a:solidFill>
+                  <a:srgbClr val="14D9C8"/>
+                </a:solidFill>
+                <a:latin typeface="Atkinson Hyperlegible"/>
+              </a:rPr>
+              <a:t> </a:t>
+            </a:r>
+            <a:r>
+              <a:rPr sz="1900" b="1" dirty="0" err="1">
+                <a:solidFill>
+                  <a:srgbClr val="14D9C8"/>
+                </a:solidFill>
+                <a:latin typeface="Atkinson Hyperlegible"/>
+              </a:rPr>
+              <a:t>partagées</a:t>
+            </a:r>
+            <a:r>
+              <a:rPr sz="1900" b="1" dirty="0">
+                <a:solidFill>
+                  <a:srgbClr val="EEF3FF"/>
+                </a:solidFill>
+                <a:latin typeface="Atkinson Hyperlegible"/>
+              </a:rPr>
+              <a:t>, </a:t>
+            </a:r>
+            <a:br>
+              <a:rPr lang="fr-CA" sz="1900" b="1" dirty="0">
+                <a:solidFill>
+                  <a:srgbClr val="EEF3FF"/>
+                </a:solidFill>
+                <a:latin typeface="Atkinson Hyperlegible"/>
+              </a:rPr>
+            </a:br>
+            <a:r>
+              <a:rPr sz="1900" b="1" dirty="0">
+                <a:solidFill>
+                  <a:srgbClr val="EEF3FF"/>
+                </a:solidFill>
+                <a:latin typeface="Atkinson Hyperlegible"/>
+              </a:rPr>
+              <a:t>permettant de </a:t>
+            </a:r>
+            <a:r>
+              <a:rPr sz="1900" b="1" dirty="0" err="1">
+                <a:solidFill>
+                  <a:srgbClr val="EEF3FF"/>
+                </a:solidFill>
+                <a:latin typeface="Atkinson Hyperlegible"/>
+              </a:rPr>
+              <a:t>produire</a:t>
+            </a:r>
+            <a:r>
+              <a:rPr sz="1900" b="1" dirty="0">
+                <a:solidFill>
+                  <a:srgbClr val="EEF3FF"/>
+                </a:solidFill>
+                <a:latin typeface="Atkinson Hyperlegible"/>
+              </a:rPr>
+              <a:t> </a:t>
+            </a:r>
+            <a:br>
+              <a:rPr lang="fr-CA" sz="1900" b="1" dirty="0">
+                <a:solidFill>
+                  <a:srgbClr val="EEF3FF"/>
+                </a:solidFill>
+                <a:latin typeface="Atkinson Hyperlegible"/>
+              </a:rPr>
+            </a:br>
+            <a:r>
+              <a:rPr sz="1900" b="1" dirty="0">
+                <a:solidFill>
+                  <a:srgbClr val="EEF3FF"/>
+                </a:solidFill>
+                <a:latin typeface="Atkinson Hyperlegible"/>
+              </a:rPr>
+              <a:t>des</a:t>
+            </a:r>
+            <a:r>
+              <a:rPr lang="fr-CA" sz="1900" b="1" dirty="0">
+                <a:solidFill>
+                  <a:srgbClr val="EEF3FF"/>
+                </a:solidFill>
+                <a:latin typeface="Atkinson Hyperlegible"/>
+              </a:rPr>
+              <a:t> </a:t>
+            </a:r>
+            <a:r>
+              <a:rPr sz="1900" b="1" dirty="0" err="1">
+                <a:solidFill>
+                  <a:srgbClr val="EEF3FF"/>
+                </a:solidFill>
+                <a:latin typeface="Atkinson Hyperlegible"/>
+              </a:rPr>
+              <a:t>expériences</a:t>
+            </a:r>
+            <a:r>
+              <a:rPr sz="1900" b="1" dirty="0">
+                <a:solidFill>
+                  <a:srgbClr val="EEF3FF"/>
+                </a:solidFill>
+                <a:latin typeface="Atkinson Hyperlegible"/>
+              </a:rPr>
+              <a:t> </a:t>
+            </a:r>
+            <a:r>
+              <a:rPr sz="1900" b="1" dirty="0" err="1">
+                <a:solidFill>
+                  <a:srgbClr val="EEF3FF"/>
+                </a:solidFill>
+                <a:latin typeface="Atkinson Hyperlegible"/>
+              </a:rPr>
+              <a:t>cohérentes</a:t>
+            </a:r>
+            <a:r>
+              <a:rPr sz="1900" b="1" dirty="0">
+                <a:solidFill>
+                  <a:srgbClr val="EEF3FF"/>
+                </a:solidFill>
+                <a:latin typeface="Atkinson Hyperlegible"/>
+              </a:rPr>
+              <a:t> </a:t>
+            </a:r>
+            <a:br>
+              <a:rPr lang="fr-CA" sz="1900" b="1" dirty="0">
+                <a:solidFill>
+                  <a:srgbClr val="EEF3FF"/>
+                </a:solidFill>
+                <a:latin typeface="Atkinson Hyperlegible"/>
+              </a:rPr>
+            </a:br>
+            <a:r>
+              <a:rPr sz="1900" b="1" dirty="0">
+                <a:solidFill>
+                  <a:srgbClr val="EEF3FF"/>
+                </a:solidFill>
+                <a:latin typeface="Atkinson Hyperlegible"/>
+              </a:rPr>
+              <a:t>à grande </a:t>
+            </a:r>
+            <a:r>
+              <a:rPr sz="1900" b="1" dirty="0" err="1">
+                <a:solidFill>
+                  <a:srgbClr val="EEF3FF"/>
+                </a:solidFill>
+                <a:latin typeface="Atkinson Hyperlegible"/>
+              </a:rPr>
+              <a:t>échelle</a:t>
+            </a:r>
+            <a:r>
+              <a:rPr lang="fr-CA" sz="1900" b="1" dirty="0">
+                <a:solidFill>
+                  <a:srgbClr val="EEF3FF"/>
+                </a:solidFill>
+                <a:latin typeface="Atkinson Hyperlegible"/>
+              </a:rPr>
+              <a:t>.</a:t>
+            </a:r>
+            <a:r>
+              <a:rPr sz="1900" b="1" dirty="0">
+                <a:solidFill>
+                  <a:srgbClr val="EEF3FF"/>
+                </a:solidFill>
+                <a:latin typeface="Atkinson Hyperlegible"/>
+              </a:rPr>
               <a:t>
-                            Un ensemble structuré de </a:t>
-            </a:r>
-            <a:r>
-              <a:rPr sz="1900" b="1">
-                <a:solidFill>
-                  <a:srgbClr val="14D9C8"/>
-                </a:solidFill>
-                <a:latin typeface="Atkinson Hyperlegible"/>
-              </a:rPr>
-              <a:t>décisions partagées</a:t>
-            </a:r>
-            <a:r>
-              <a:rPr sz="1900" b="1">
-                <a:solidFill>
-                  <a:srgbClr val="EEF3FF"/>
-                </a:solidFill>
-                <a:latin typeface="Atkinson Hyperlegible"/>
-              </a:rPr>
-              <a:t>, permettant de produire des
-                            expériences cohérentes à grande échelle.
                             </a:t>
             </a:r>
           </a:p>
@@ -9270,8 +11063,8 @@
         </p:nvSpPr>
         <p:spPr>
           <a:xfrm>
-            <a:off x="8267700" y="2667000"/>
-            <a:ext cx="3467100" cy="190500"/>
+            <a:off x="8267700" y="3516784"/>
+            <a:ext cx="3467100" cy="230832"/>
           </a:xfrm>
           <a:prstGeom prst="rect">
             <a:avLst/>
@@ -9286,9 +11079,9 @@
           <a:p>
             <a:pPr algn="l"/>
             <a:r>
-              <a:rPr sz="900" b="0" i="1">
-                <a:solidFill>
-                  <a:srgbClr val="7A90B8"/>
+              <a:rPr sz="900" b="0" dirty="0">
+                <a:solidFill>
+                  <a:schemeClr val="bg1"/>
                 </a:solidFill>
                 <a:latin typeface="DM Sans"/>
               </a:rPr>
@@ -9305,14 +11098,16 @@
         </p:nvSpPr>
         <p:spPr>
           <a:xfrm>
-            <a:off x="8267700" y="2895600"/>
+            <a:off x="8267700" y="3878453"/>
             <a:ext cx="3467100" cy="9525"/>
           </a:xfrm>
           <a:prstGeom prst="rect">
             <a:avLst/>
           </a:prstGeom>
           <a:solidFill>
-            <a:srgbClr val="FFFFFF"/>
+            <a:srgbClr val="FFFFFF">
+              <a:alpha val="19000"/>
+            </a:srgbClr>
           </a:solidFill>
           <a:ln>
             <a:noFill/>
@@ -9337,6 +11132,7 @@
           <a:lstStyle/>
           <a:p>
             <a:pPr algn="ctr"/>
+            <a:endParaRPr/>
           </a:p>
         </p:txBody>
       </p:sp>
@@ -9348,8 +11144,8 @@
         </p:nvSpPr>
         <p:spPr>
           <a:xfrm>
-            <a:off x="8267700" y="3048000"/>
-            <a:ext cx="3467100" cy="571500"/>
+            <a:off x="8267700" y="4088003"/>
+            <a:ext cx="3467100" cy="461665"/>
           </a:xfrm>
           <a:prstGeom prst="rect">
             <a:avLst/>
@@ -9363,33 +11159,111 @@
           <a:lstStyle/>
           <a:p>
             <a:r>
-              <a:rPr sz="1200">
-                <a:solidFill>
-                  <a:srgbClr val="7A90B8"/>
-                </a:solidFill>
-                <a:latin typeface="DM Sans"/>
-              </a:rPr>
-              <a:t>Le système de design transforme des décisions
-                            individuelles en </a:t>
-            </a:r>
-            <a:r>
-              <a:rPr sz="1200" b="1">
-                <a:solidFill>
-                  <a:srgbClr val="EEF3FF"/>
-                </a:solidFill>
-                <a:latin typeface="DM Sans"/>
-              </a:rPr>
-              <a:t>cadre collectif</a:t>
-            </a:r>
-            <a:r>
-              <a:rPr sz="1200">
-                <a:solidFill>
-                  <a:srgbClr val="7A90B8"/>
-                </a:solidFill>
-                <a:latin typeface="DM Sans"/>
+              <a:rPr sz="1200" dirty="0">
+                <a:solidFill>
+                  <a:schemeClr val="tx2">
+                    <a:lumMod val="20000"/>
+                    <a:lumOff val="80000"/>
+                  </a:schemeClr>
+                </a:solidFill>
+              </a:rPr>
+              <a:t>Le système de design </a:t>
+            </a:r>
+            <a:r>
+              <a:rPr sz="1200" dirty="0" err="1">
+                <a:solidFill>
+                  <a:schemeClr val="tx2">
+                    <a:lumMod val="20000"/>
+                    <a:lumOff val="80000"/>
+                  </a:schemeClr>
+                </a:solidFill>
+              </a:rPr>
+              <a:t>transforme</a:t>
+            </a:r>
+            <a:r>
+              <a:rPr sz="1200" dirty="0">
+                <a:solidFill>
+                  <a:schemeClr val="tx2">
+                    <a:lumMod val="20000"/>
+                    <a:lumOff val="80000"/>
+                  </a:schemeClr>
+                </a:solidFill>
+              </a:rPr>
+              <a:t> des </a:t>
+            </a:r>
+            <a:r>
+              <a:rPr sz="1200" dirty="0" err="1">
+                <a:solidFill>
+                  <a:schemeClr val="tx2">
+                    <a:lumMod val="20000"/>
+                    <a:lumOff val="80000"/>
+                  </a:schemeClr>
+                </a:solidFill>
+              </a:rPr>
+              <a:t>décisions</a:t>
+            </a:r>
+            <a:r>
+              <a:rPr lang="fr-CA" sz="1200" dirty="0">
+                <a:solidFill>
+                  <a:schemeClr val="tx2">
+                    <a:lumMod val="20000"/>
+                    <a:lumOff val="80000"/>
+                  </a:schemeClr>
+                </a:solidFill>
+              </a:rPr>
+              <a:t> </a:t>
+            </a:r>
+            <a:r>
+              <a:rPr sz="1200" dirty="0" err="1">
+                <a:solidFill>
+                  <a:schemeClr val="tx2">
+                    <a:lumMod val="20000"/>
+                    <a:lumOff val="80000"/>
+                  </a:schemeClr>
+                </a:solidFill>
+              </a:rPr>
+              <a:t>individuelles</a:t>
+            </a:r>
+            <a:r>
+              <a:rPr sz="1200" dirty="0">
+                <a:solidFill>
+                  <a:schemeClr val="tx2">
+                    <a:lumMod val="20000"/>
+                    <a:lumOff val="80000"/>
+                  </a:schemeClr>
+                </a:solidFill>
+              </a:rPr>
+              <a:t> en </a:t>
+            </a:r>
+            <a:r>
+              <a:rPr sz="1200" b="1" dirty="0">
+                <a:solidFill>
+                  <a:schemeClr val="bg1"/>
+                </a:solidFill>
+              </a:rPr>
+              <a:t>cadre </a:t>
+            </a:r>
+            <a:r>
+              <a:rPr sz="1200" b="1" dirty="0" err="1">
+                <a:solidFill>
+                  <a:schemeClr val="bg1"/>
+                </a:solidFill>
+              </a:rPr>
+              <a:t>collectif</a:t>
+            </a:r>
+            <a:r>
+              <a:rPr lang="fr-CA" sz="1200" b="1" dirty="0">
+                <a:solidFill>
+                  <a:schemeClr val="bg1"/>
+                </a:solidFill>
               </a:rPr>
               <a:t>.</a:t>
             </a:r>
+            <a:endParaRPr sz="1200" dirty="0">
+              <a:solidFill>
+                <a:schemeClr val="bg1"/>
+              </a:solidFill>
+            </a:endParaRPr>
           </a:p>
         </p:txBody>
       </p:sp>
@@ -9402,12 +11276,12 @@
 </file>
 
 <file path=ppt/slides/slide5.xml><?xml version="1.0" encoding="utf-8"?>
-<p:sld xmlns:a="http://schemas.openxmlformats.org/drawingml/2006/main" xmlns:p="http://schemas.openxmlformats.org/presentationml/2006/main" xmlns:r="http://schemas.openxmlformats.org/officeDocument/2006/relationships">
+<p:sld xmlns:a="http://schemas.openxmlformats.org/drawingml/2006/main" xmlns:r="http://schemas.openxmlformats.org/officeDocument/2006/relationships" xmlns:p="http://schemas.openxmlformats.org/presentationml/2006/main">
   <p:cSld>
     <p:bg>
       <p:bgPr>
         <a:solidFill>
-          <a:srgbClr val="060D1A"/>
+          <a:schemeClr val="tx2"/>
         </a:solidFill>
         <a:effectLst/>
       </p:bgPr>
@@ -9418,7 +11292,14 @@
         <p:cNvGrpSpPr/>
         <p:nvPr/>
       </p:nvGrpSpPr>
-      <p:grpSpPr/>
+      <p:grpSpPr>
+        <a:xfrm>
+          <a:off x="0" y="0"/>
+          <a:ext cx="0" cy="0"/>
+          <a:chOff x="0" y="0"/>
+          <a:chExt cx="0" cy="0"/>
+        </a:xfrm>
+      </p:grpSpPr>
       <p:sp>
         <p:nvSpPr>
           <p:cNvPr id="2" name="Rectangle 1"/>
@@ -9459,6 +11340,7 @@
           <a:lstStyle/>
           <a:p>
             <a:pPr algn="ctr"/>
+            <a:endParaRPr/>
           </a:p>
         </p:txBody>
       </p:sp>
@@ -9470,8 +11352,8 @@
         </p:nvSpPr>
         <p:spPr>
           <a:xfrm>
-            <a:off x="685800" y="495300"/>
-            <a:ext cx="6667500" cy="190500"/>
+            <a:off x="685800" y="1447800"/>
+            <a:ext cx="6667500" cy="230832"/>
           </a:xfrm>
           <a:prstGeom prst="rect">
             <a:avLst/>
@@ -9486,7 +11368,7 @@
           <a:p>
             <a:pPr algn="l"/>
             <a:r>
-              <a:rPr sz="900" b="0" i="0">
+              <a:rPr sz="900" b="0" i="0" spc="300" dirty="0">
                 <a:solidFill>
                   <a:srgbClr val="B8CCEE"/>
                 </a:solidFill>
@@ -9505,8 +11387,8 @@
         </p:nvSpPr>
         <p:spPr>
           <a:xfrm>
-            <a:off x="685800" y="704850"/>
-            <a:ext cx="10820400" cy="1047750"/>
+            <a:off x="685800" y="1657350"/>
+            <a:ext cx="10820400" cy="523220"/>
           </a:xfrm>
           <a:prstGeom prst="rect">
             <a:avLst/>
@@ -9521,14 +11403,47 @@
           <a:p>
             <a:pPr algn="l"/>
             <a:r>
-              <a:rPr sz="2800" b="1">
+              <a:rPr sz="2800" b="1" dirty="0">
                 <a:solidFill>
                   <a:srgbClr val="EEF3FF"/>
                 </a:solidFill>
                 <a:latin typeface="Atkinson Hyperlegible"/>
               </a:rPr>
-              <a:t>Un système de design sert à…</a:t>
-            </a:r>
+              <a:t>Un système de design </a:t>
+            </a:r>
+            <a:r>
+              <a:rPr sz="2800" b="1" dirty="0" err="1">
+                <a:solidFill>
+                  <a:srgbClr val="EEF3FF"/>
+                </a:solidFill>
+                <a:latin typeface="Atkinson Hyperlegible"/>
+              </a:rPr>
+              <a:t>sert</a:t>
+            </a:r>
+            <a:r>
+              <a:rPr sz="2800" b="1" dirty="0">
+                <a:solidFill>
+                  <a:srgbClr val="EEF3FF"/>
+                </a:solidFill>
+                <a:latin typeface="Atkinson Hyperlegible"/>
+              </a:rPr>
+              <a:t> à</a:t>
+            </a:r>
+            <a:r>
+              <a:rPr lang="fr-CA" sz="2800" b="1" dirty="0">
+                <a:solidFill>
+                  <a:srgbClr val="EEF3FF"/>
+                </a:solidFill>
+                <a:latin typeface="Atkinson Hyperlegible"/>
+              </a:rPr>
+              <a:t>…</a:t>
+            </a:r>
+            <a:endParaRPr sz="2800" b="1" dirty="0">
+              <a:solidFill>
+                <a:srgbClr val="EEF3FF"/>
+              </a:solidFill>
+              <a:latin typeface="Atkinson Hyperlegible"/>
+            </a:endParaRPr>
           </a:p>
         </p:txBody>
       </p:sp>
@@ -9540,18 +11455,22 @@
         </p:nvSpPr>
         <p:spPr>
           <a:xfrm>
-            <a:off x="685800" y="1352550"/>
-            <a:ext cx="5905500" cy="1314450"/>
+            <a:off x="685800" y="2305050"/>
+            <a:ext cx="4689475" cy="1314450"/>
           </a:xfrm>
           <a:prstGeom prst="rect">
             <a:avLst/>
           </a:prstGeom>
           <a:solidFill>
-            <a:srgbClr val="3421CB"/>
+            <a:srgbClr val="183466">
+              <a:alpha val="15000"/>
+            </a:srgbClr>
           </a:solidFill>
           <a:ln>
             <a:solidFill>
-              <a:srgbClr val="FFFFFF"/>
+              <a:srgbClr val="FFFFFF">
+                <a:alpha val="15000"/>
+              </a:srgbClr>
             </a:solidFill>
           </a:ln>
         </p:spPr>
@@ -9574,6 +11493,7 @@
           <a:lstStyle/>
           <a:p>
             <a:pPr algn="ctr"/>
+            <a:endParaRPr/>
           </a:p>
         </p:txBody>
       </p:sp>
@@ -9585,8 +11505,8 @@
         </p:nvSpPr>
         <p:spPr>
           <a:xfrm>
-            <a:off x="857250" y="1524000"/>
-            <a:ext cx="419100" cy="419100"/>
+            <a:off x="857250" y="2476500"/>
+            <a:ext cx="332801" cy="430887"/>
           </a:xfrm>
           <a:prstGeom prst="rect">
             <a:avLst/>
@@ -9620,8 +11540,8 @@
         </p:nvSpPr>
         <p:spPr>
           <a:xfrm>
-            <a:off x="1333500" y="1524000"/>
-            <a:ext cx="5067300" cy="266700"/>
+            <a:off x="1333500" y="2476500"/>
+            <a:ext cx="4023872" cy="307777"/>
           </a:xfrm>
           <a:prstGeom prst="rect">
             <a:avLst/>
@@ -9655,8 +11575,8 @@
         </p:nvSpPr>
         <p:spPr>
           <a:xfrm>
-            <a:off x="1333500" y="1828800"/>
-            <a:ext cx="5067300" cy="685800"/>
+            <a:off x="1333500" y="2781300"/>
+            <a:ext cx="3790950" cy="430887"/>
           </a:xfrm>
           <a:prstGeom prst="rect">
             <a:avLst/>
@@ -9670,32 +11590,140 @@
           <a:lstStyle/>
           <a:p>
             <a:r>
-              <a:rPr sz="1100">
+              <a:rPr sz="1100" dirty="0" err="1">
                 <a:solidFill>
                   <a:srgbClr val="B8CCEE"/>
                 </a:solidFill>
-                <a:latin typeface="DM Sans"/>
-              </a:rPr>
-              <a:t>Plusieurs équipes autour des mêmes choix, </a:t>
-            </a:r>
-            <a:r>
-              <a:rPr sz="1100" b="1">
-                <a:solidFill>
-                  <a:srgbClr val="EEF3FF"/>
-                </a:solidFill>
-                <a:latin typeface="DM Sans"/>
-              </a:rPr>
-              <a:t>sans coordination constante</a:t>
-            </a:r>
-            <a:r>
-              <a:rPr sz="1100">
+              </a:rPr>
+              <a:t>Plusieurs</a:t>
+            </a:r>
+            <a:r>
+              <a:rPr sz="1100" dirty="0">
                 <a:solidFill>
                   <a:srgbClr val="B8CCEE"/>
                 </a:solidFill>
-                <a:latin typeface="DM Sans"/>
-              </a:rPr>
-              <a:t>. Un langage partagé remplace les échanges répétés.
-                                </a:t>
+              </a:rPr>
+              <a:t> équipes </a:t>
+            </a:r>
+            <a:r>
+              <a:rPr sz="1100" dirty="0" err="1">
+                <a:solidFill>
+                  <a:srgbClr val="B8CCEE"/>
+                </a:solidFill>
+              </a:rPr>
+              <a:t>autour</a:t>
+            </a:r>
+            <a:r>
+              <a:rPr sz="1100" dirty="0">
+                <a:solidFill>
+                  <a:srgbClr val="B8CCEE"/>
+                </a:solidFill>
+              </a:rPr>
+              <a:t> des </a:t>
+            </a:r>
+            <a:r>
+              <a:rPr sz="1100" dirty="0" err="1">
+                <a:solidFill>
+                  <a:srgbClr val="B8CCEE"/>
+                </a:solidFill>
+              </a:rPr>
+              <a:t>mêmes</a:t>
+            </a:r>
+            <a:r>
+              <a:rPr sz="1100" dirty="0">
+                <a:solidFill>
+                  <a:srgbClr val="B8CCEE"/>
+                </a:solidFill>
+              </a:rPr>
+              <a:t> choix, </a:t>
+            </a:r>
+            <a:r>
+              <a:rPr sz="1100" b="1" dirty="0">
+                <a:solidFill>
+                  <a:srgbClr val="EEF3FF"/>
+                </a:solidFill>
+              </a:rPr>
+              <a:t>sans coordination </a:t>
+            </a:r>
+            <a:r>
+              <a:rPr sz="1100" b="1" dirty="0" err="1">
+                <a:solidFill>
+                  <a:srgbClr val="EEF3FF"/>
+                </a:solidFill>
+              </a:rPr>
+              <a:t>constante</a:t>
+            </a:r>
+            <a:r>
+              <a:rPr sz="1100" dirty="0">
+                <a:solidFill>
+                  <a:srgbClr val="B8CCEE"/>
+                </a:solidFill>
+              </a:rPr>
+              <a:t>. Un langage </a:t>
+            </a:r>
+            <a:r>
+              <a:rPr sz="1100" dirty="0" err="1">
+                <a:solidFill>
+                  <a:srgbClr val="B8CCEE"/>
+                </a:solidFill>
+              </a:rPr>
+              <a:t>partagé</a:t>
+            </a:r>
+            <a:r>
+              <a:rPr sz="1100" dirty="0">
+                <a:solidFill>
+                  <a:srgbClr val="B8CCEE"/>
+                </a:solidFill>
+              </a:rPr>
+              <a:t> </a:t>
+            </a:r>
+            <a:r>
+              <a:rPr sz="1100" dirty="0" err="1">
+                <a:solidFill>
+                  <a:srgbClr val="B8CCEE"/>
+                </a:solidFill>
+              </a:rPr>
+              <a:t>remplace</a:t>
+            </a:r>
+            <a:r>
+              <a:rPr sz="1100" dirty="0">
+                <a:solidFill>
+                  <a:srgbClr val="B8CCEE"/>
+                </a:solidFill>
+              </a:rPr>
+              <a:t> les </a:t>
+            </a:r>
+            <a:r>
+              <a:rPr sz="1100" dirty="0" err="1">
+                <a:solidFill>
+                  <a:srgbClr val="B8CCEE"/>
+                </a:solidFill>
+              </a:rPr>
+              <a:t>échanges</a:t>
+            </a:r>
+            <a:r>
+              <a:rPr sz="1100" dirty="0">
+                <a:solidFill>
+                  <a:srgbClr val="B8CCEE"/>
+                </a:solidFill>
+              </a:rPr>
+              <a:t> </a:t>
+            </a:r>
+            <a:r>
+              <a:rPr sz="1100" dirty="0" err="1">
+                <a:solidFill>
+                  <a:srgbClr val="B8CCEE"/>
+                </a:solidFill>
+              </a:rPr>
+              <a:t>répétés</a:t>
+            </a:r>
+            <a:r>
+              <a:rPr sz="1100" dirty="0">
+                <a:solidFill>
+                  <a:srgbClr val="B8CCEE"/>
+                </a:solidFill>
+              </a:rPr>
+              <a:t>.</a:t>
             </a:r>
           </a:p>
         </p:txBody>
@@ -9708,18 +11736,22 @@
         </p:nvSpPr>
         <p:spPr>
           <a:xfrm>
-            <a:off x="6686550" y="1352550"/>
-            <a:ext cx="5905500" cy="1314450"/>
+            <a:off x="5546725" y="2305050"/>
+            <a:ext cx="4689475" cy="1314450"/>
           </a:xfrm>
           <a:prstGeom prst="rect">
             <a:avLst/>
           </a:prstGeom>
           <a:solidFill>
-            <a:srgbClr val="3421CB"/>
+            <a:srgbClr val="183466">
+              <a:alpha val="15000"/>
+            </a:srgbClr>
           </a:solidFill>
           <a:ln>
             <a:solidFill>
-              <a:srgbClr val="FFFFFF"/>
+              <a:srgbClr val="FFFFFF">
+                <a:alpha val="15000"/>
+              </a:srgbClr>
             </a:solidFill>
           </a:ln>
         </p:spPr>
@@ -9742,6 +11774,7 @@
           <a:lstStyle/>
           <a:p>
             <a:pPr algn="ctr"/>
+            <a:endParaRPr/>
           </a:p>
         </p:txBody>
       </p:sp>
@@ -9753,8 +11786,8 @@
         </p:nvSpPr>
         <p:spPr>
           <a:xfrm>
-            <a:off x="6858000" y="1524000"/>
-            <a:ext cx="419100" cy="419100"/>
+            <a:off x="5718175" y="2476500"/>
+            <a:ext cx="332801" cy="430887"/>
           </a:xfrm>
           <a:prstGeom prst="rect">
             <a:avLst/>
@@ -9788,8 +11821,8 @@
         </p:nvSpPr>
         <p:spPr>
           <a:xfrm>
-            <a:off x="7334250" y="1524000"/>
-            <a:ext cx="5067300" cy="266700"/>
+            <a:off x="6194425" y="2476500"/>
+            <a:ext cx="4023872" cy="307777"/>
           </a:xfrm>
           <a:prstGeom prst="rect">
             <a:avLst/>
@@ -9823,8 +11856,8 @@
         </p:nvSpPr>
         <p:spPr>
           <a:xfrm>
-            <a:off x="7334250" y="1828800"/>
-            <a:ext cx="5067300" cy="685800"/>
+            <a:off x="6194425" y="2781300"/>
+            <a:ext cx="3749675" cy="430887"/>
           </a:xfrm>
           <a:prstGeom prst="rect">
             <a:avLst/>
@@ -9838,32 +11871,92 @@
           <a:lstStyle/>
           <a:p>
             <a:r>
-              <a:rPr sz="1100">
+              <a:rPr sz="1100" dirty="0">
                 <a:solidFill>
                   <a:srgbClr val="B8CCEE"/>
                 </a:solidFill>
-                <a:latin typeface="DM Sans"/>
-              </a:rPr>
-              <a:t>Des choses déjà tranchées. Réduit la </a:t>
-            </a:r>
-            <a:r>
-              <a:rPr sz="1100" b="1">
-                <a:solidFill>
-                  <a:srgbClr val="EEF3FF"/>
-                </a:solidFill>
-                <a:latin typeface="DM Sans"/>
-              </a:rPr>
-              <a:t>dette de gouvernance</a:t>
-            </a:r>
-            <a:r>
-              <a:rPr sz="1100">
+              </a:rPr>
+              <a:t>Des choses déjà </a:t>
+            </a:r>
+            <a:r>
+              <a:rPr sz="1100" dirty="0" err="1">
                 <a:solidFill>
                   <a:srgbClr val="B8CCEE"/>
                 </a:solidFill>
-                <a:latin typeface="DM Sans"/>
-              </a:rPr>
-              <a:t> et les incohérences qui en découlent.
-                                </a:t>
+              </a:rPr>
+              <a:t>tranchées</a:t>
+            </a:r>
+            <a:r>
+              <a:rPr sz="1100" dirty="0">
+                <a:solidFill>
+                  <a:srgbClr val="B8CCEE"/>
+                </a:solidFill>
+              </a:rPr>
+              <a:t>. Réduit la </a:t>
+            </a:r>
+            <a:r>
+              <a:rPr sz="1100" b="1" dirty="0" err="1">
+                <a:solidFill>
+                  <a:srgbClr val="EEF3FF"/>
+                </a:solidFill>
+              </a:rPr>
+              <a:t>dette</a:t>
+            </a:r>
+            <a:r>
+              <a:rPr sz="1100" b="1" dirty="0">
+                <a:solidFill>
+                  <a:srgbClr val="EEF3FF"/>
+                </a:solidFill>
+              </a:rPr>
+              <a:t> de </a:t>
+            </a:r>
+            <a:r>
+              <a:rPr sz="1100" b="1" dirty="0" err="1">
+                <a:solidFill>
+                  <a:srgbClr val="EEF3FF"/>
+                </a:solidFill>
+              </a:rPr>
+              <a:t>gouvernance</a:t>
+            </a:r>
+            <a:r>
+              <a:rPr sz="1100" dirty="0">
+                <a:solidFill>
+                  <a:srgbClr val="B8CCEE"/>
+                </a:solidFill>
+              </a:rPr>
+              <a:t> et les </a:t>
+            </a:r>
+            <a:r>
+              <a:rPr sz="1100" dirty="0" err="1">
+                <a:solidFill>
+                  <a:srgbClr val="B8CCEE"/>
+                </a:solidFill>
+              </a:rPr>
+              <a:t>incohérences</a:t>
+            </a:r>
+            <a:r>
+              <a:rPr sz="1100" dirty="0">
+                <a:solidFill>
+                  <a:srgbClr val="B8CCEE"/>
+                </a:solidFill>
+              </a:rPr>
+              <a:t> qui en </a:t>
+            </a:r>
+            <a:r>
+              <a:rPr sz="1100" dirty="0" err="1">
+                <a:solidFill>
+                  <a:srgbClr val="B8CCEE"/>
+                </a:solidFill>
+              </a:rPr>
+              <a:t>découlent</a:t>
+            </a:r>
+            <a:r>
+              <a:rPr sz="1100" dirty="0">
+                <a:solidFill>
+                  <a:srgbClr val="B8CCEE"/>
+                </a:solidFill>
+              </a:rPr>
+              <a:t>.</a:t>
             </a:r>
           </a:p>
         </p:txBody>
@@ -9876,18 +11969,22 @@
         </p:nvSpPr>
         <p:spPr>
           <a:xfrm>
-            <a:off x="685800" y="2762250"/>
-            <a:ext cx="5905500" cy="1314450"/>
+            <a:off x="685800" y="3714750"/>
+            <a:ext cx="4689475" cy="1314450"/>
           </a:xfrm>
           <a:prstGeom prst="rect">
             <a:avLst/>
           </a:prstGeom>
           <a:solidFill>
-            <a:srgbClr val="3421CB"/>
+            <a:srgbClr val="183466">
+              <a:alpha val="15000"/>
+            </a:srgbClr>
           </a:solidFill>
           <a:ln>
             <a:solidFill>
-              <a:srgbClr val="FFFFFF"/>
+              <a:srgbClr val="FFFFFF">
+                <a:alpha val="15000"/>
+              </a:srgbClr>
             </a:solidFill>
           </a:ln>
         </p:spPr>
@@ -9910,6 +12007,7 @@
           <a:lstStyle/>
           <a:p>
             <a:pPr algn="ctr"/>
+            <a:endParaRPr/>
           </a:p>
         </p:txBody>
       </p:sp>
@@ -9921,8 +12019,8 @@
         </p:nvSpPr>
         <p:spPr>
           <a:xfrm>
-            <a:off x="857250" y="2933700"/>
-            <a:ext cx="419100" cy="419100"/>
+            <a:off x="857250" y="3886200"/>
+            <a:ext cx="332801" cy="430887"/>
           </a:xfrm>
           <a:prstGeom prst="rect">
             <a:avLst/>
@@ -9956,8 +12054,8 @@
         </p:nvSpPr>
         <p:spPr>
           <a:xfrm>
-            <a:off x="1333500" y="2933700"/>
-            <a:ext cx="5067300" cy="266700"/>
+            <a:off x="1333500" y="3886200"/>
+            <a:ext cx="4023872" cy="307777"/>
           </a:xfrm>
           <a:prstGeom prst="rect">
             <a:avLst/>
@@ -9991,8 +12089,8 @@
         </p:nvSpPr>
         <p:spPr>
           <a:xfrm>
-            <a:off x="1333500" y="3238500"/>
-            <a:ext cx="5067300" cy="685800"/>
+            <a:off x="1333500" y="4191000"/>
+            <a:ext cx="4023872" cy="430887"/>
           </a:xfrm>
           <a:prstGeom prst="rect">
             <a:avLst/>
@@ -10006,32 +12104,132 @@
           <a:lstStyle/>
           <a:p>
             <a:r>
-              <a:rPr sz="1100">
+              <a:rPr sz="1100" dirty="0">
                 <a:solidFill>
                   <a:srgbClr val="B8CCEE"/>
                 </a:solidFill>
-                <a:latin typeface="DM Sans"/>
-              </a:rPr>
-              <a:t>Dans l'expérience utilisateur, même quand les équipes travaillent
-                                    en </a:t>
-            </a:r>
-            <a:r>
-              <a:rPr sz="1100" b="1">
-                <a:solidFill>
-                  <a:srgbClr val="EEF3FF"/>
-                </a:solidFill>
-                <a:latin typeface="DM Sans"/>
+              </a:rPr>
+              <a:t>Dans </a:t>
+            </a:r>
+            <a:r>
+              <a:rPr sz="1100" dirty="0" err="1">
+                <a:solidFill>
+                  <a:srgbClr val="B8CCEE"/>
+                </a:solidFill>
+              </a:rPr>
+              <a:t>l'expérience</a:t>
+            </a:r>
+            <a:r>
+              <a:rPr sz="1100" dirty="0">
+                <a:solidFill>
+                  <a:srgbClr val="B8CCEE"/>
+                </a:solidFill>
+              </a:rPr>
+              <a:t> </a:t>
+            </a:r>
+            <a:r>
+              <a:rPr sz="1100" dirty="0" err="1">
+                <a:solidFill>
+                  <a:srgbClr val="B8CCEE"/>
+                </a:solidFill>
+              </a:rPr>
+              <a:t>utilisateur</a:t>
+            </a:r>
+            <a:r>
+              <a:rPr sz="1100" dirty="0">
+                <a:solidFill>
+                  <a:srgbClr val="B8CCEE"/>
+                </a:solidFill>
+              </a:rPr>
+              <a:t>, </a:t>
+            </a:r>
+            <a:r>
+              <a:rPr sz="1100" dirty="0" err="1">
+                <a:solidFill>
+                  <a:srgbClr val="B8CCEE"/>
+                </a:solidFill>
+              </a:rPr>
+              <a:t>même</a:t>
+            </a:r>
+            <a:r>
+              <a:rPr sz="1100" dirty="0">
+                <a:solidFill>
+                  <a:srgbClr val="B8CCEE"/>
+                </a:solidFill>
+              </a:rPr>
+              <a:t> </a:t>
+            </a:r>
+            <a:r>
+              <a:rPr sz="1100" dirty="0" err="1">
+                <a:solidFill>
+                  <a:srgbClr val="B8CCEE"/>
+                </a:solidFill>
+              </a:rPr>
+              <a:t>quand</a:t>
+            </a:r>
+            <a:r>
+              <a:rPr sz="1100" dirty="0">
+                <a:solidFill>
+                  <a:srgbClr val="B8CCEE"/>
+                </a:solidFill>
+              </a:rPr>
+              <a:t> les équipes </a:t>
+            </a:r>
+            <a:r>
+              <a:rPr sz="1100" dirty="0" err="1">
+                <a:solidFill>
+                  <a:srgbClr val="B8CCEE"/>
+                </a:solidFill>
+              </a:rPr>
+              <a:t>travaillent</a:t>
+            </a:r>
+            <a:r>
+              <a:rPr lang="fr-CA" sz="1100" dirty="0">
+                <a:solidFill>
+                  <a:srgbClr val="B8CCEE"/>
+                </a:solidFill>
+              </a:rPr>
+              <a:t> </a:t>
+            </a:r>
+            <a:r>
+              <a:rPr sz="1100" dirty="0">
+                <a:solidFill>
+                  <a:srgbClr val="B8CCEE"/>
+                </a:solidFill>
+              </a:rPr>
+              <a:t>en </a:t>
+            </a:r>
+            <a:r>
+              <a:rPr sz="1100" b="1" dirty="0">
+                <a:solidFill>
+                  <a:srgbClr val="EEF3FF"/>
+                </a:solidFill>
               </a:rPr>
               <a:t>silos</a:t>
             </a:r>
             <a:r>
-              <a:rPr sz="1100">
+              <a:rPr sz="1100" dirty="0">
                 <a:solidFill>
                   <a:srgbClr val="B8CCEE"/>
                 </a:solidFill>
-                <a:latin typeface="DM Sans"/>
-              </a:rPr>
-              <a:t> sans se coordonner.</a:t>
+              </a:rPr>
+              <a:t> sans se </a:t>
+            </a:r>
+            <a:r>
+              <a:rPr sz="1100" dirty="0" err="1">
+                <a:solidFill>
+                  <a:srgbClr val="B8CCEE"/>
+                </a:solidFill>
+              </a:rPr>
+              <a:t>coordonner</a:t>
+            </a:r>
+            <a:r>
+              <a:rPr sz="1100" dirty="0">
+                <a:solidFill>
+                  <a:srgbClr val="B8CCEE"/>
+                </a:solidFill>
+              </a:rPr>
+              <a:t>.</a:t>
             </a:r>
           </a:p>
         </p:txBody>
@@ -10044,18 +12242,22 @@
         </p:nvSpPr>
         <p:spPr>
           <a:xfrm>
-            <a:off x="6686550" y="2762250"/>
-            <a:ext cx="5905500" cy="1314450"/>
+            <a:off x="5546725" y="3714750"/>
+            <a:ext cx="4689475" cy="1314450"/>
           </a:xfrm>
           <a:prstGeom prst="rect">
             <a:avLst/>
           </a:prstGeom>
           <a:solidFill>
-            <a:srgbClr val="3421CB"/>
+            <a:srgbClr val="183466">
+              <a:alpha val="15000"/>
+            </a:srgbClr>
           </a:solidFill>
           <a:ln>
             <a:solidFill>
-              <a:srgbClr val="FFFFFF"/>
+              <a:srgbClr val="FFFFFF">
+                <a:alpha val="15000"/>
+              </a:srgbClr>
             </a:solidFill>
           </a:ln>
         </p:spPr>
@@ -10078,6 +12280,7 @@
           <a:lstStyle/>
           <a:p>
             <a:pPr algn="ctr"/>
+            <a:endParaRPr/>
           </a:p>
         </p:txBody>
       </p:sp>
@@ -10089,8 +12292,8 @@
         </p:nvSpPr>
         <p:spPr>
           <a:xfrm>
-            <a:off x="6858000" y="2933700"/>
-            <a:ext cx="419100" cy="419100"/>
+            <a:off x="5718175" y="3886200"/>
+            <a:ext cx="332801" cy="430887"/>
           </a:xfrm>
           <a:prstGeom prst="rect">
             <a:avLst/>
@@ -10124,8 +12327,8 @@
         </p:nvSpPr>
         <p:spPr>
           <a:xfrm>
-            <a:off x="7334250" y="2933700"/>
-            <a:ext cx="5067300" cy="266700"/>
+            <a:off x="6194425" y="3886200"/>
+            <a:ext cx="4023872" cy="307777"/>
           </a:xfrm>
           <a:prstGeom prst="rect">
             <a:avLst/>
@@ -10159,8 +12362,8 @@
         </p:nvSpPr>
         <p:spPr>
           <a:xfrm>
-            <a:off x="7334250" y="3238500"/>
-            <a:ext cx="5067300" cy="685800"/>
+            <a:off x="6194425" y="4191000"/>
+            <a:ext cx="4023872" cy="430887"/>
           </a:xfrm>
           <a:prstGeom prst="rect">
             <a:avLst/>
@@ -10174,33 +12377,100 @@
           <a:lstStyle/>
           <a:p>
             <a:r>
-              <a:rPr sz="1100">
+              <a:rPr sz="1100" dirty="0">
                 <a:solidFill>
                   <a:srgbClr val="B8CCEE"/>
                 </a:solidFill>
-                <a:latin typeface="DM Sans"/>
-              </a:rPr>
-              <a:t>Sans sacrifier la qualité. Les décisions de base sont déjà posées
-                                    — </a:t>
-            </a:r>
-            <a:r>
-              <a:rPr sz="1100" b="1">
-                <a:solidFill>
-                  <a:srgbClr val="EEF3FF"/>
-                </a:solidFill>
-                <a:latin typeface="DM Sans"/>
-              </a:rPr>
-              <a:t>plus de temps à créer</a:t>
-            </a:r>
-            <a:r>
-              <a:rPr sz="1100">
+              </a:rPr>
+              <a:t>Sans </a:t>
+            </a:r>
+            <a:r>
+              <a:rPr sz="1100" dirty="0" err="1">
                 <a:solidFill>
                   <a:srgbClr val="B8CCEE"/>
                 </a:solidFill>
-                <a:latin typeface="DM Sans"/>
-              </a:rPr>
-              <a:t>.
-                                </a:t>
+              </a:rPr>
+              <a:t>sacrifier</a:t>
+            </a:r>
+            <a:r>
+              <a:rPr sz="1100" dirty="0">
+                <a:solidFill>
+                  <a:srgbClr val="B8CCEE"/>
+                </a:solidFill>
+              </a:rPr>
+              <a:t> la </a:t>
+            </a:r>
+            <a:r>
+              <a:rPr sz="1100" dirty="0" err="1">
+                <a:solidFill>
+                  <a:srgbClr val="B8CCEE"/>
+                </a:solidFill>
+              </a:rPr>
+              <a:t>qualité</a:t>
+            </a:r>
+            <a:r>
+              <a:rPr sz="1100" dirty="0">
+                <a:solidFill>
+                  <a:srgbClr val="B8CCEE"/>
+                </a:solidFill>
+              </a:rPr>
+              <a:t>. Les </a:t>
+            </a:r>
+            <a:r>
+              <a:rPr sz="1100" dirty="0" err="1">
+                <a:solidFill>
+                  <a:srgbClr val="B8CCEE"/>
+                </a:solidFill>
+              </a:rPr>
+              <a:t>décisions</a:t>
+            </a:r>
+            <a:r>
+              <a:rPr sz="1100" dirty="0">
+                <a:solidFill>
+                  <a:srgbClr val="B8CCEE"/>
+                </a:solidFill>
+              </a:rPr>
+              <a:t> de base sont déjà </a:t>
+            </a:r>
+            <a:r>
+              <a:rPr sz="1100" dirty="0" err="1">
+                <a:solidFill>
+                  <a:srgbClr val="B8CCEE"/>
+                </a:solidFill>
+              </a:rPr>
+              <a:t>posées</a:t>
+            </a:r>
+            <a:r>
+              <a:rPr sz="1100" dirty="0">
+                <a:solidFill>
+                  <a:srgbClr val="B8CCEE"/>
+                </a:solidFill>
+              </a:rPr>
+              <a:t> — </a:t>
+            </a:r>
+            <a:r>
+              <a:rPr sz="1100" b="1" dirty="0">
+                <a:solidFill>
+                  <a:srgbClr val="EEF3FF"/>
+                </a:solidFill>
+              </a:rPr>
+              <a:t>plus de temps à </a:t>
+            </a:r>
+            <a:r>
+              <a:rPr sz="1100" b="1" dirty="0" err="1">
+                <a:solidFill>
+                  <a:srgbClr val="EEF3FF"/>
+                </a:solidFill>
+              </a:rPr>
+              <a:t>créer</a:t>
+            </a:r>
+            <a:r>
+              <a:rPr sz="1100" dirty="0">
+                <a:solidFill>
+                  <a:srgbClr val="B8CCEE"/>
+                </a:solidFill>
+              </a:rPr>
+              <a:t>.</a:t>
             </a:r>
           </a:p>
         </p:txBody>
@@ -10214,12 +12484,12 @@
 </file>
 
 <file path=ppt/slides/slide6.xml><?xml version="1.0" encoding="utf-8"?>
-<p:sld xmlns:a="http://schemas.openxmlformats.org/drawingml/2006/main" xmlns:p="http://schemas.openxmlformats.org/presentationml/2006/main" xmlns:r="http://schemas.openxmlformats.org/officeDocument/2006/relationships">
+<p:sld xmlns:a="http://schemas.openxmlformats.org/drawingml/2006/main" xmlns:r="http://schemas.openxmlformats.org/officeDocument/2006/relationships" xmlns:p="http://schemas.openxmlformats.org/presentationml/2006/main">
   <p:cSld>
     <p:bg>
       <p:bgPr>
         <a:solidFill>
-          <a:srgbClr val="060D1A"/>
+          <a:srgbClr val="183466"/>
         </a:solidFill>
         <a:effectLst/>
       </p:bgPr>
@@ -10230,7 +12500,14 @@
         <p:cNvGrpSpPr/>
         <p:nvPr/>
       </p:nvGrpSpPr>
-      <p:grpSpPr/>
+      <p:grpSpPr>
+        <a:xfrm>
+          <a:off x="0" y="0"/>
+          <a:ext cx="0" cy="0"/>
+          <a:chOff x="0" y="0"/>
+          <a:chExt cx="0" cy="0"/>
+        </a:xfrm>
+      </p:grpSpPr>
       <p:sp>
         <p:nvSpPr>
           <p:cNvPr id="2" name="Rectangle 1"/>
@@ -10271,6 +12548,7 @@
           <a:lstStyle/>
           <a:p>
             <a:pPr algn="ctr"/>
+            <a:endParaRPr/>
           </a:p>
         </p:txBody>
       </p:sp>
@@ -10282,8 +12560,8 @@
         </p:nvSpPr>
         <p:spPr>
           <a:xfrm>
-            <a:off x="647700" y="495300"/>
-            <a:ext cx="5334000" cy="190500"/>
+            <a:off x="647700" y="2000250"/>
+            <a:ext cx="5334000" cy="230832"/>
           </a:xfrm>
           <a:prstGeom prst="rect">
             <a:avLst/>
@@ -10298,7 +12576,7 @@
           <a:p>
             <a:pPr algn="l"/>
             <a:r>
-              <a:rPr sz="900" b="0" i="0">
+              <a:rPr sz="900" b="0" i="0" spc="300" dirty="0">
                 <a:solidFill>
                   <a:srgbClr val="B8CCEE"/>
                 </a:solidFill>
@@ -10317,7 +12595,7 @@
         </p:nvSpPr>
         <p:spPr>
           <a:xfrm>
-            <a:off x="647700" y="704850"/>
+            <a:off x="647700" y="2209800"/>
             <a:ext cx="5334000" cy="1047750"/>
           </a:xfrm>
           <a:prstGeom prst="rect">
@@ -10333,19 +12611,34 @@
           <a:p>
             <a:pPr algn="l"/>
             <a:r>
-              <a:rPr sz="2800" b="1">
+              <a:rPr sz="2800" b="1" dirty="0">
                 <a:solidFill>
                   <a:srgbClr val="EEF3FF"/>
                 </a:solidFill>
                 <a:latin typeface="Atkinson Hyperlegible"/>
               </a:rPr>
-              <a:t>De quoi est composé</a:t>
-            </a:r>
+              <a:t>De quoi est </a:t>
+            </a:r>
+            <a:r>
+              <a:rPr sz="2800" b="1" dirty="0" err="1">
+                <a:solidFill>
+                  <a:srgbClr val="EEF3FF"/>
+                </a:solidFill>
+                <a:latin typeface="Atkinson Hyperlegible"/>
+              </a:rPr>
+              <a:t>composé</a:t>
+            </a:r>
+            <a:endParaRPr sz="2800" b="1" dirty="0">
+              <a:solidFill>
+                <a:srgbClr val="EEF3FF"/>
+              </a:solidFill>
+              <a:latin typeface="Atkinson Hyperlegible"/>
+            </a:endParaRPr>
           </a:p>
           <a:p>
             <a:pPr algn="l"/>
             <a:r>
-              <a:rPr sz="2800" b="1">
+              <a:rPr sz="2800" b="1" dirty="0">
                 <a:solidFill>
                   <a:srgbClr val="EEF3FF"/>
                 </a:solidFill>
@@ -10364,8 +12657,8 @@
         </p:nvSpPr>
         <p:spPr>
           <a:xfrm>
-            <a:off x="647700" y="1514475"/>
-            <a:ext cx="5334000" cy="533400"/>
+            <a:off x="647700" y="3182778"/>
+            <a:ext cx="5334000" cy="492443"/>
           </a:xfrm>
           <a:prstGeom prst="rect">
             <a:avLst/>
@@ -10379,50 +12672,196 @@
           <a:lstStyle/>
           <a:p>
             <a:r>
-              <a:rPr sz="1300">
+              <a:rPr sz="1300" dirty="0">
                 <a:solidFill>
                   <a:srgbClr val="B8CCEE"/>
                 </a:solidFill>
-                <a:latin typeface="DM Sans"/>
-              </a:rPr>
-              <a:t>Les composants sont la partie la plus </a:t>
-            </a:r>
-            <a:r>
-              <a:rPr sz="1300" b="1">
-                <a:solidFill>
-                  <a:srgbClr val="EEF3FF"/>
-                </a:solidFill>
-                <a:latin typeface="DM Sans"/>
+              </a:rPr>
+              <a:t>Les composants sont la </a:t>
+            </a:r>
+            <a:r>
+              <a:rPr sz="1300" dirty="0" err="1">
+                <a:solidFill>
+                  <a:srgbClr val="B8CCEE"/>
+                </a:solidFill>
+              </a:rPr>
+              <a:t>partie</a:t>
+            </a:r>
+            <a:r>
+              <a:rPr sz="1300" dirty="0">
+                <a:solidFill>
+                  <a:srgbClr val="B8CCEE"/>
+                </a:solidFill>
+              </a:rPr>
+              <a:t> la plus </a:t>
+            </a:r>
+            <a:r>
+              <a:rPr sz="1300" b="1" dirty="0">
+                <a:solidFill>
+                  <a:srgbClr val="EEF3FF"/>
+                </a:solidFill>
               </a:rPr>
               <a:t>visible</a:t>
             </a:r>
             <a:r>
-              <a:rPr sz="1300">
+              <a:rPr sz="1300" dirty="0">
                 <a:solidFill>
                   <a:srgbClr val="B8CCEE"/>
                 </a:solidFill>
-                <a:latin typeface="DM Sans"/>
-              </a:rPr>
-              <a:t> — mais ils ne sont
-                        pas le cœur. Le cœur, ce sont les </a:t>
-            </a:r>
-            <a:r>
-              <a:rPr sz="1300">
+              </a:rPr>
+              <a:t> — </a:t>
+            </a:r>
+            <a:r>
+              <a:rPr sz="1300" dirty="0" err="1">
+                <a:solidFill>
+                  <a:srgbClr val="B8CCEE"/>
+                </a:solidFill>
+              </a:rPr>
+              <a:t>mais</a:t>
+            </a:r>
+            <a:r>
+              <a:rPr sz="1300" dirty="0">
+                <a:solidFill>
+                  <a:srgbClr val="B8CCEE"/>
+                </a:solidFill>
+              </a:rPr>
+              <a:t> </a:t>
+            </a:r>
+            <a:r>
+              <a:rPr sz="1300" dirty="0" err="1">
+                <a:solidFill>
+                  <a:srgbClr val="B8CCEE"/>
+                </a:solidFill>
+              </a:rPr>
+              <a:t>ils</a:t>
+            </a:r>
+            <a:r>
+              <a:rPr sz="1300" dirty="0">
+                <a:solidFill>
+                  <a:srgbClr val="B8CCEE"/>
+                </a:solidFill>
+              </a:rPr>
+              <a:t> ne sont</a:t>
+            </a:r>
+            <a:r>
+              <a:rPr lang="fr-CA" sz="1300" dirty="0">
+                <a:solidFill>
+                  <a:srgbClr val="B8CCEE"/>
+                </a:solidFill>
+              </a:rPr>
+              <a:t> </a:t>
+            </a:r>
+            <a:r>
+              <a:rPr sz="1300" dirty="0">
+                <a:solidFill>
+                  <a:srgbClr val="B8CCEE"/>
+                </a:solidFill>
+              </a:rPr>
+              <a:t>pas le </a:t>
+            </a:r>
+            <a:r>
+              <a:rPr sz="1300" dirty="0" err="1">
+                <a:solidFill>
+                  <a:srgbClr val="B8CCEE"/>
+                </a:solidFill>
+              </a:rPr>
+              <a:t>cœur</a:t>
+            </a:r>
+            <a:r>
+              <a:rPr sz="1300" dirty="0">
+                <a:solidFill>
+                  <a:srgbClr val="B8CCEE"/>
+                </a:solidFill>
+              </a:rPr>
+              <a:t>. Le </a:t>
+            </a:r>
+            <a:r>
+              <a:rPr sz="1300" dirty="0" err="1">
+                <a:solidFill>
+                  <a:srgbClr val="B8CCEE"/>
+                </a:solidFill>
+              </a:rPr>
+              <a:t>cœur</a:t>
+            </a:r>
+            <a:r>
+              <a:rPr sz="1300" dirty="0">
+                <a:solidFill>
+                  <a:srgbClr val="B8CCEE"/>
+                </a:solidFill>
+              </a:rPr>
+              <a:t>, </a:t>
+            </a:r>
+            <a:r>
+              <a:rPr sz="1300" dirty="0" err="1">
+                <a:solidFill>
+                  <a:srgbClr val="B8CCEE"/>
+                </a:solidFill>
+              </a:rPr>
+              <a:t>ce</a:t>
+            </a:r>
+            <a:r>
+              <a:rPr sz="1300" dirty="0">
+                <a:solidFill>
+                  <a:srgbClr val="B8CCEE"/>
+                </a:solidFill>
+              </a:rPr>
+              <a:t> sont les </a:t>
+            </a:r>
+            <a:r>
+              <a:rPr sz="1300" b="1" dirty="0" err="1">
                 <a:solidFill>
                   <a:srgbClr val="ED6B41"/>
                 </a:solidFill>
-                <a:latin typeface="DM Sans"/>
-              </a:rPr>
-              <a:t>décisions et règles</a:t>
-            </a:r>
-            <a:r>
-              <a:rPr sz="1300">
+              </a:rPr>
+              <a:t>décisions</a:t>
+            </a:r>
+            <a:r>
+              <a:rPr sz="1300" b="1" dirty="0">
+                <a:solidFill>
+                  <a:srgbClr val="ED6B41"/>
+                </a:solidFill>
+              </a:rPr>
+              <a:t> et règles</a:t>
+            </a:r>
+            <a:r>
+              <a:rPr sz="1300" b="1" dirty="0">
                 <a:solidFill>
                   <a:srgbClr val="B8CCEE"/>
                 </a:solidFill>
-                <a:latin typeface="DM Sans"/>
-              </a:rPr>
-              <a:t> qu'ils incarnent.</a:t>
+              </a:rPr>
+              <a:t> </a:t>
+            </a:r>
+            <a:r>
+              <a:rPr sz="1300" dirty="0" err="1">
+                <a:solidFill>
+                  <a:srgbClr val="B8CCEE"/>
+                </a:solidFill>
+              </a:rPr>
+              <a:t>qu'ils</a:t>
+            </a:r>
+            <a:r>
+              <a:rPr sz="1300" dirty="0">
+                <a:solidFill>
+                  <a:srgbClr val="B8CCEE"/>
+                </a:solidFill>
+              </a:rPr>
+              <a:t> </a:t>
+            </a:r>
+            <a:r>
+              <a:rPr sz="1300" dirty="0" err="1">
+                <a:solidFill>
+                  <a:srgbClr val="B8CCEE"/>
+                </a:solidFill>
+              </a:rPr>
+              <a:t>incarnent</a:t>
+            </a:r>
+            <a:r>
+              <a:rPr sz="1300" dirty="0">
+                <a:solidFill>
+                  <a:srgbClr val="B8CCEE"/>
+                </a:solidFill>
+              </a:rPr>
+              <a:t>.</a:t>
             </a:r>
           </a:p>
         </p:txBody>
@@ -10435,7 +12874,7 @@
         </p:nvSpPr>
         <p:spPr>
           <a:xfrm>
-            <a:off x="647700" y="2085975"/>
+            <a:off x="1028700" y="3754278"/>
             <a:ext cx="38100" cy="647700"/>
           </a:xfrm>
           <a:prstGeom prst="rect">
@@ -10467,6 +12906,7 @@
           <a:lstStyle/>
           <a:p>
             <a:pPr algn="ctr"/>
+            <a:endParaRPr/>
           </a:p>
         </p:txBody>
       </p:sp>
@@ -10478,8 +12918,8 @@
         </p:nvSpPr>
         <p:spPr>
           <a:xfrm>
-            <a:off x="800100" y="2085975"/>
-            <a:ext cx="5181600" cy="647700"/>
+            <a:off x="1181100" y="3797924"/>
+            <a:ext cx="4210050" cy="430887"/>
           </a:xfrm>
           <a:prstGeom prst="rect">
             <a:avLst/>
@@ -10494,14 +12934,164 @@
           <a:p>
             <a:pPr algn="l"/>
             <a:r>
-              <a:rPr sz="1100" b="0" i="1">
-                <a:solidFill>
-                  <a:srgbClr val="EEF3FF"/>
-                </a:solidFill>
-                <a:latin typeface="DM Sans"/>
-              </a:rPr>
-              <a:t>Un bouton primaire n'est pas qu'une forme bleue — c'est l'expression d'une décision sur la
-                        hiérarchie des actions.</a:t>
+              <a:rPr sz="1100" b="0" i="1" dirty="0">
+                <a:solidFill>
+                  <a:srgbClr val="EEF3FF"/>
+                </a:solidFill>
+              </a:rPr>
+              <a:t>Un bouton </a:t>
+            </a:r>
+            <a:r>
+              <a:rPr sz="1100" b="0" i="1" dirty="0" err="1">
+                <a:solidFill>
+                  <a:srgbClr val="EEF3FF"/>
+                </a:solidFill>
+              </a:rPr>
+              <a:t>primaire</a:t>
+            </a:r>
+            <a:r>
+              <a:rPr sz="1100" b="0" i="1" dirty="0">
+                <a:solidFill>
+                  <a:srgbClr val="EEF3FF"/>
+                </a:solidFill>
+              </a:rPr>
+              <a:t> n'est pas </a:t>
+            </a:r>
+            <a:r>
+              <a:rPr sz="1100" b="0" i="1" dirty="0" err="1">
+                <a:solidFill>
+                  <a:srgbClr val="EEF3FF"/>
+                </a:solidFill>
+              </a:rPr>
+              <a:t>qu'une</a:t>
+            </a:r>
+            <a:r>
+              <a:rPr sz="1100" b="0" i="1" dirty="0">
+                <a:solidFill>
+                  <a:srgbClr val="EEF3FF"/>
+                </a:solidFill>
+              </a:rPr>
+              <a:t> </a:t>
+            </a:r>
+            <a:r>
+              <a:rPr sz="1100" b="0" i="1" dirty="0" err="1">
+                <a:solidFill>
+                  <a:srgbClr val="EEF3FF"/>
+                </a:solidFill>
+              </a:rPr>
+              <a:t>forme</a:t>
+            </a:r>
+            <a:r>
+              <a:rPr sz="1100" b="0" i="1" dirty="0">
+                <a:solidFill>
+                  <a:srgbClr val="EEF3FF"/>
+                </a:solidFill>
+              </a:rPr>
+              <a:t> </a:t>
+            </a:r>
+            <a:r>
+              <a:rPr sz="1100" b="0" i="1" dirty="0" err="1">
+                <a:solidFill>
+                  <a:srgbClr val="EEF3FF"/>
+                </a:solidFill>
+              </a:rPr>
+              <a:t>bleue</a:t>
+            </a:r>
+            <a:r>
+              <a:rPr sz="1100" b="0" i="1" dirty="0">
+                <a:solidFill>
+                  <a:srgbClr val="EEF3FF"/>
+                </a:solidFill>
+              </a:rPr>
+              <a:t> — </a:t>
+            </a:r>
+            <a:r>
+              <a:rPr sz="1100" b="0" i="1" dirty="0" err="1">
+                <a:solidFill>
+                  <a:srgbClr val="EEF3FF"/>
+                </a:solidFill>
+              </a:rPr>
+              <a:t>c'est</a:t>
+            </a:r>
+            <a:r>
+              <a:rPr sz="1100" b="0" i="1" dirty="0">
+                <a:solidFill>
+                  <a:srgbClr val="EEF3FF"/>
+                </a:solidFill>
+              </a:rPr>
+              <a:t> </a:t>
+            </a:r>
+            <a:r>
+              <a:rPr sz="1100" b="0" i="1" dirty="0" err="1">
+                <a:solidFill>
+                  <a:srgbClr val="EEF3FF"/>
+                </a:solidFill>
+              </a:rPr>
+              <a:t>l'expression</a:t>
+            </a:r>
+            <a:r>
+              <a:rPr sz="1100" b="0" i="1" dirty="0">
+                <a:solidFill>
+                  <a:srgbClr val="EEF3FF"/>
+                </a:solidFill>
+              </a:rPr>
+              <a:t> </a:t>
+            </a:r>
+            <a:r>
+              <a:rPr sz="1100" b="0" i="1" dirty="0" err="1">
+                <a:solidFill>
+                  <a:srgbClr val="EEF3FF"/>
+                </a:solidFill>
+              </a:rPr>
+              <a:t>d'une</a:t>
+            </a:r>
+            <a:r>
+              <a:rPr sz="1100" b="0" i="1" dirty="0">
+                <a:solidFill>
+                  <a:srgbClr val="EEF3FF"/>
+                </a:solidFill>
+              </a:rPr>
+              <a:t> </a:t>
+            </a:r>
+            <a:r>
+              <a:rPr sz="1100" b="0" i="1" dirty="0" err="1">
+                <a:solidFill>
+                  <a:srgbClr val="EEF3FF"/>
+                </a:solidFill>
+              </a:rPr>
+              <a:t>décision</a:t>
+            </a:r>
+            <a:r>
+              <a:rPr sz="1100" b="0" i="1" dirty="0">
+                <a:solidFill>
+                  <a:srgbClr val="EEF3FF"/>
+                </a:solidFill>
+              </a:rPr>
+              <a:t> sur la</a:t>
+            </a:r>
+            <a:r>
+              <a:rPr lang="fr-CA" sz="1100" b="0" i="1" dirty="0">
+                <a:solidFill>
+                  <a:srgbClr val="EEF3FF"/>
+                </a:solidFill>
+              </a:rPr>
+              <a:t> </a:t>
+            </a:r>
+            <a:r>
+              <a:rPr sz="1100" b="0" i="1" dirty="0" err="1">
+                <a:solidFill>
+                  <a:srgbClr val="EEF3FF"/>
+                </a:solidFill>
+              </a:rPr>
+              <a:t>hiérarchie</a:t>
+            </a:r>
+            <a:r>
+              <a:rPr sz="1100" b="0" i="1" dirty="0">
+                <a:solidFill>
+                  <a:srgbClr val="EEF3FF"/>
+                </a:solidFill>
+              </a:rPr>
+              <a:t> des actions.</a:t>
             </a:r>
           </a:p>
         </p:txBody>
@@ -10521,7 +13111,7 @@
             <a:avLst/>
           </a:prstGeom>
           <a:solidFill>
-            <a:srgbClr val="0A1628"/>
+            <a:schemeClr val="tx1"/>
           </a:solidFill>
           <a:ln>
             <a:noFill/>
@@ -10546,6 +13136,7 @@
           <a:lstStyle/>
           <a:p>
             <a:pPr algn="ctr"/>
+            <a:endParaRPr/>
           </a:p>
         </p:txBody>
       </p:sp>
@@ -10558,7 +13149,9 @@
           <p:nvPr/>
         </p:nvPicPr>
         <p:blipFill>
-          <a:blip r:embed="rId2"/>
+          <a:blip r:embed="rId2">
+            <a:alphaModFix/>
+          </a:blip>
           <a:stretch>
             <a:fillRect/>
           </a:stretch>
@@ -10582,12 +13175,12 @@
 </file>
 
 <file path=ppt/slides/slide7.xml><?xml version="1.0" encoding="utf-8"?>
-<p:sld xmlns:a="http://schemas.openxmlformats.org/drawingml/2006/main" xmlns:p="http://schemas.openxmlformats.org/presentationml/2006/main" xmlns:r="http://schemas.openxmlformats.org/officeDocument/2006/relationships">
+<p:sld xmlns:a="http://schemas.openxmlformats.org/drawingml/2006/main" xmlns:r="http://schemas.openxmlformats.org/officeDocument/2006/relationships" xmlns:p="http://schemas.openxmlformats.org/presentationml/2006/main">
   <p:cSld>
     <p:bg>
       <p:bgPr>
         <a:solidFill>
-          <a:srgbClr val="060D1A"/>
+          <a:schemeClr val="tx2"/>
         </a:solidFill>
         <a:effectLst/>
       </p:bgPr>
@@ -10598,7 +13191,14 @@
         <p:cNvGrpSpPr/>
         <p:nvPr/>
       </p:nvGrpSpPr>
-      <p:grpSpPr/>
+      <p:grpSpPr>
+        <a:xfrm>
+          <a:off x="0" y="0"/>
+          <a:ext cx="0" cy="0"/>
+          <a:chOff x="0" y="0"/>
+          <a:chExt cx="0" cy="0"/>
+        </a:xfrm>
+      </p:grpSpPr>
       <p:sp>
         <p:nvSpPr>
           <p:cNvPr id="2" name="Rectangle 1"/>
@@ -10639,6 +13239,7 @@
           <a:lstStyle/>
           <a:p>
             <a:pPr algn="ctr"/>
+            <a:endParaRPr/>
           </a:p>
         </p:txBody>
       </p:sp>
@@ -10727,10 +13328,16 @@
             <a:avLst/>
           </a:prstGeom>
           <a:solidFill>
-            <a:srgbClr val="FFFFFF"/>
+            <a:schemeClr val="tx1">
+              <a:alpha val="15000"/>
+            </a:schemeClr>
           </a:solidFill>
-          <a:ln>
-            <a:noFill/>
+          <a:ln w="12700">
+            <a:solidFill>
+              <a:schemeClr val="bg1">
+                <a:alpha val="40000"/>
+              </a:schemeClr>
+            </a:solidFill>
           </a:ln>
         </p:spPr>
         <p:style>
@@ -10752,6 +13359,7 @@
           <a:lstStyle/>
           <a:p>
             <a:pPr algn="ctr"/>
+            <a:endParaRPr/>
           </a:p>
         </p:txBody>
       </p:sp>
@@ -10763,8 +13371,8 @@
         </p:nvSpPr>
         <p:spPr>
           <a:xfrm>
-            <a:off x="838200" y="1438275"/>
-            <a:ext cx="5410200" cy="171450"/>
+            <a:off x="838200" y="1390650"/>
+            <a:ext cx="5410200" cy="246221"/>
           </a:xfrm>
           <a:prstGeom prst="rect">
             <a:avLst/>
@@ -10779,11 +13387,10 @@
           <a:p>
             <a:pPr algn="l"/>
             <a:r>
-              <a:rPr sz="1000" b="1" i="0">
+              <a:rPr sz="1000" b="1" i="0" dirty="0">
                 <a:solidFill>
                   <a:srgbClr val="ED6B41"/>
                 </a:solidFill>
-                <a:latin typeface="Atkinson Hyperlegible"/>
               </a:rPr>
               <a:t>CE QU'ON CROIT</a:t>
             </a:r>
@@ -10798,8 +13405,8 @@
         </p:nvSpPr>
         <p:spPr>
           <a:xfrm>
-            <a:off x="6248400" y="1438275"/>
-            <a:ext cx="5410200" cy="171450"/>
+            <a:off x="6248400" y="1390650"/>
+            <a:ext cx="5410200" cy="246221"/>
           </a:xfrm>
           <a:prstGeom prst="rect">
             <a:avLst/>
@@ -10818,7 +13425,6 @@
                 <a:solidFill>
                   <a:srgbClr val="14D9C8"/>
                 </a:solidFill>
-                <a:latin typeface="Atkinson Hyperlegible"/>
               </a:rPr>
               <a:t>CE QUE C'EST VRAIMENT</a:t>
             </a:r>
@@ -10840,10 +13446,16 @@
             <a:avLst/>
           </a:prstGeom>
           <a:solidFill>
-            <a:srgbClr val="FF5555"/>
+            <a:srgbClr val="FF5555">
+              <a:alpha val="21000"/>
+            </a:srgbClr>
           </a:solidFill>
-          <a:ln>
-            <a:noFill/>
+          <a:ln w="12700">
+            <a:solidFill>
+              <a:schemeClr val="bg1">
+                <a:alpha val="40000"/>
+              </a:schemeClr>
+            </a:solidFill>
           </a:ln>
         </p:spPr>
         <p:style>
@@ -10865,6 +13477,7 @@
           <a:lstStyle/>
           <a:p>
             <a:pPr algn="ctr"/>
+            <a:endParaRPr/>
           </a:p>
         </p:txBody>
       </p:sp>
@@ -10883,10 +13496,16 @@
             <a:avLst/>
           </a:prstGeom>
           <a:solidFill>
-            <a:srgbClr val="060D1A"/>
+            <a:schemeClr val="tx1">
+              <a:alpha val="15000"/>
+            </a:schemeClr>
           </a:solidFill>
-          <a:ln>
-            <a:noFill/>
+          <a:ln w="12700">
+            <a:solidFill>
+              <a:schemeClr val="bg1">
+                <a:alpha val="40000"/>
+              </a:schemeClr>
+            </a:solidFill>
           </a:ln>
         </p:spPr>
         <p:style>
@@ -10908,6 +13527,7 @@
           <a:lstStyle/>
           <a:p>
             <a:pPr algn="ctr"/>
+            <a:endParaRPr/>
           </a:p>
         </p:txBody>
       </p:sp>
@@ -10919,7 +13539,7 @@
         </p:nvSpPr>
         <p:spPr>
           <a:xfrm>
-            <a:off x="819150" y="1943100"/>
+            <a:off x="819150" y="1954371"/>
             <a:ext cx="266700" cy="419100"/>
           </a:xfrm>
           <a:prstGeom prst="rect">
@@ -10935,7 +13555,7 @@
           <a:p>
             <a:pPr algn="l"/>
             <a:r>
-              <a:rPr sz="1800" b="0" i="0">
+              <a:rPr sz="1800" b="0" i="0" dirty="0">
                 <a:solidFill>
                   <a:srgbClr val="EEF3FF"/>
                 </a:solidFill>
@@ -10954,7 +13574,7 @@
         </p:nvSpPr>
         <p:spPr>
           <a:xfrm>
-            <a:off x="1162050" y="1790700"/>
+            <a:off x="1162050" y="1954371"/>
             <a:ext cx="4800600" cy="266700"/>
           </a:xfrm>
           <a:prstGeom prst="rect">
@@ -10970,7 +13590,7 @@
           <a:p>
             <a:pPr algn="l"/>
             <a:r>
-              <a:rPr sz="1300" b="1" i="0">
+              <a:rPr sz="1300" b="1" i="0" dirty="0">
                 <a:solidFill>
                   <a:srgbClr val="ED6B41"/>
                 </a:solidFill>
@@ -10989,8 +13609,8 @@
         </p:nvSpPr>
         <p:spPr>
           <a:xfrm>
-            <a:off x="1162050" y="2095500"/>
-            <a:ext cx="4800600" cy="400050"/>
+            <a:off x="1162050" y="2259171"/>
+            <a:ext cx="4800600" cy="246221"/>
           </a:xfrm>
           <a:prstGeom prst="rect">
             <a:avLst/>
@@ -11005,14 +13625,52 @@
           <a:p>
             <a:pPr algn="l"/>
             <a:r>
-              <a:rPr sz="1000" b="0" i="0">
-                <a:solidFill>
-                  <a:srgbClr val="7A90B8"/>
-                </a:solidFill>
-                <a:latin typeface="DM Sans"/>
-              </a:rPr>
-              <a:t>Conventions visuelles ou éditoriales</a:t>
-            </a:r>
+              <a:rPr sz="1000" b="0" i="0" dirty="0">
+                <a:solidFill>
+                  <a:schemeClr val="bg1">
+                    <a:alpha val="70000"/>
+                  </a:schemeClr>
+                </a:solidFill>
+              </a:rPr>
+              <a:t>Conventions </a:t>
+            </a:r>
+            <a:r>
+              <a:rPr sz="1000" b="0" i="0" dirty="0" err="1">
+                <a:solidFill>
+                  <a:schemeClr val="bg1">
+                    <a:alpha val="70000"/>
+                  </a:schemeClr>
+                </a:solidFill>
+              </a:rPr>
+              <a:t>visuelles</a:t>
+            </a:r>
+            <a:r>
+              <a:rPr sz="1000" b="0" i="0" dirty="0">
+                <a:solidFill>
+                  <a:schemeClr val="bg1">
+                    <a:alpha val="70000"/>
+                  </a:schemeClr>
+                </a:solidFill>
+              </a:rPr>
+              <a:t> ou </a:t>
+            </a:r>
+            <a:r>
+              <a:rPr sz="1000" b="0" i="0" dirty="0" err="1">
+                <a:solidFill>
+                  <a:schemeClr val="bg1">
+                    <a:alpha val="70000"/>
+                  </a:schemeClr>
+                </a:solidFill>
+              </a:rPr>
+              <a:t>éditoriales</a:t>
+            </a:r>
+            <a:endParaRPr sz="1000" b="0" i="0" dirty="0">
+              <a:solidFill>
+                <a:schemeClr val="bg1">
+                  <a:alpha val="70000"/>
+                </a:schemeClr>
+              </a:solidFill>
+            </a:endParaRPr>
           </a:p>
         </p:txBody>
       </p:sp>
@@ -11024,7 +13682,7 @@
         </p:nvSpPr>
         <p:spPr>
           <a:xfrm>
-            <a:off x="6248400" y="1790700"/>
+            <a:off x="6248400" y="1885951"/>
             <a:ext cx="5105400" cy="266700"/>
           </a:xfrm>
           <a:prstGeom prst="rect">
@@ -11059,8 +13717,8 @@
         </p:nvSpPr>
         <p:spPr>
           <a:xfrm>
-            <a:off x="6248400" y="2095500"/>
-            <a:ext cx="5105400" cy="419100"/>
+            <a:off x="6248400" y="2190751"/>
+            <a:ext cx="5105400" cy="246221"/>
           </a:xfrm>
           <a:prstGeom prst="rect">
             <a:avLst/>
@@ -11077,7 +13735,7 @@
             <a:r>
               <a:rPr sz="1000" b="0" i="0">
                 <a:solidFill>
-                  <a:srgbClr val="7A90B8"/>
+                  <a:schemeClr val="bg1"/>
                 </a:solidFill>
                 <a:latin typeface="DM Sans"/>
               </a:rPr>
@@ -11101,10 +13759,16 @@
             <a:avLst/>
           </a:prstGeom>
           <a:solidFill>
-            <a:srgbClr val="FF5555"/>
+            <a:srgbClr val="FF5555">
+              <a:alpha val="21000"/>
+            </a:srgbClr>
           </a:solidFill>
-          <a:ln>
-            <a:noFill/>
+          <a:ln w="12700">
+            <a:solidFill>
+              <a:schemeClr val="bg1">
+                <a:alpha val="40000"/>
+              </a:schemeClr>
+            </a:solidFill>
           </a:ln>
         </p:spPr>
         <p:style>
@@ -11126,6 +13790,7 @@
           <a:lstStyle/>
           <a:p>
             <a:pPr algn="ctr"/>
+            <a:endParaRPr/>
           </a:p>
         </p:txBody>
       </p:sp>
@@ -11144,10 +13809,16 @@
             <a:avLst/>
           </a:prstGeom>
           <a:solidFill>
-            <a:srgbClr val="060D1A"/>
+            <a:schemeClr val="tx1">
+              <a:alpha val="15000"/>
+            </a:schemeClr>
           </a:solidFill>
-          <a:ln>
-            <a:noFill/>
+          <a:ln w="12700">
+            <a:solidFill>
+              <a:schemeClr val="bg1">
+                <a:alpha val="40000"/>
+              </a:schemeClr>
+            </a:solidFill>
           </a:ln>
         </p:spPr>
         <p:style>
@@ -11169,6 +13840,7 @@
           <a:lstStyle/>
           <a:p>
             <a:pPr algn="ctr"/>
+            <a:endParaRPr/>
           </a:p>
         </p:txBody>
       </p:sp>
@@ -11180,7 +13852,7 @@
         </p:nvSpPr>
         <p:spPr>
           <a:xfrm>
-            <a:off x="819150" y="2914650"/>
+            <a:off x="819150" y="2925921"/>
             <a:ext cx="266700" cy="419100"/>
           </a:xfrm>
           <a:prstGeom prst="rect">
@@ -11215,7 +13887,7 @@
         </p:nvSpPr>
         <p:spPr>
           <a:xfrm>
-            <a:off x="1162050" y="2762250"/>
+            <a:off x="1162050" y="2925921"/>
             <a:ext cx="4800600" cy="266700"/>
           </a:xfrm>
           <a:prstGeom prst="rect">
@@ -11250,8 +13922,8 @@
         </p:nvSpPr>
         <p:spPr>
           <a:xfrm>
-            <a:off x="1162050" y="3067050"/>
-            <a:ext cx="4800600" cy="400050"/>
+            <a:off x="1162050" y="3230721"/>
+            <a:ext cx="4800600" cy="246221"/>
           </a:xfrm>
           <a:prstGeom prst="rect">
             <a:avLst/>
@@ -11268,9 +13940,10 @@
             <a:r>
               <a:rPr sz="1000" b="0" i="0">
                 <a:solidFill>
-                  <a:srgbClr val="7A90B8"/>
-                </a:solidFill>
-                <a:latin typeface="DM Sans"/>
+                  <a:schemeClr val="bg1">
+                    <a:alpha val="70000"/>
+                  </a:schemeClr>
+                </a:solidFill>
               </a:rPr>
               <a:t>Identité visuelle, logo, couleurs</a:t>
             </a:r>
@@ -11285,7 +13958,7 @@
         </p:nvSpPr>
         <p:spPr>
           <a:xfrm>
-            <a:off x="6248400" y="2762250"/>
+            <a:off x="6248400" y="2857501"/>
             <a:ext cx="5105400" cy="266700"/>
           </a:xfrm>
           <a:prstGeom prst="rect">
@@ -11320,8 +13993,8 @@
         </p:nvSpPr>
         <p:spPr>
           <a:xfrm>
-            <a:off x="6248400" y="3067050"/>
-            <a:ext cx="5105400" cy="419100"/>
+            <a:off x="6248400" y="3162301"/>
+            <a:ext cx="5105400" cy="246221"/>
           </a:xfrm>
           <a:prstGeom prst="rect">
             <a:avLst/>
@@ -11338,7 +14011,7 @@
             <a:r>
               <a:rPr sz="1000" b="0" i="0">
                 <a:solidFill>
-                  <a:srgbClr val="7A90B8"/>
+                  <a:schemeClr val="bg1"/>
                 </a:solidFill>
                 <a:latin typeface="DM Sans"/>
               </a:rPr>
@@ -11362,10 +14035,16 @@
             <a:avLst/>
           </a:prstGeom>
           <a:solidFill>
-            <a:srgbClr val="FF5555"/>
+            <a:srgbClr val="FF5555">
+              <a:alpha val="21000"/>
+            </a:srgbClr>
           </a:solidFill>
-          <a:ln>
-            <a:noFill/>
+          <a:ln w="12700">
+            <a:solidFill>
+              <a:schemeClr val="bg1">
+                <a:alpha val="40000"/>
+              </a:schemeClr>
+            </a:solidFill>
           </a:ln>
         </p:spPr>
         <p:style>
@@ -11387,6 +14066,7 @@
           <a:lstStyle/>
           <a:p>
             <a:pPr algn="ctr"/>
+            <a:endParaRPr/>
           </a:p>
         </p:txBody>
       </p:sp>
@@ -11405,10 +14085,16 @@
             <a:avLst/>
           </a:prstGeom>
           <a:solidFill>
-            <a:srgbClr val="060D1A"/>
+            <a:schemeClr val="tx1">
+              <a:alpha val="15000"/>
+            </a:schemeClr>
           </a:solidFill>
-          <a:ln>
-            <a:noFill/>
+          <a:ln w="12700">
+            <a:solidFill>
+              <a:schemeClr val="bg1">
+                <a:alpha val="40000"/>
+              </a:schemeClr>
+            </a:solidFill>
           </a:ln>
         </p:spPr>
         <p:style>
@@ -11430,6 +14116,7 @@
           <a:lstStyle/>
           <a:p>
             <a:pPr algn="ctr"/>
+            <a:endParaRPr/>
           </a:p>
         </p:txBody>
       </p:sp>
@@ -11441,7 +14128,7 @@
         </p:nvSpPr>
         <p:spPr>
           <a:xfrm>
-            <a:off x="819150" y="3886200"/>
+            <a:off x="819150" y="3897471"/>
             <a:ext cx="266700" cy="419100"/>
           </a:xfrm>
           <a:prstGeom prst="rect">
@@ -11476,7 +14163,7 @@
         </p:nvSpPr>
         <p:spPr>
           <a:xfrm>
-            <a:off x="1162050" y="3733800"/>
+            <a:off x="1162050" y="3897471"/>
             <a:ext cx="4800600" cy="266700"/>
           </a:xfrm>
           <a:prstGeom prst="rect">
@@ -11511,8 +14198,8 @@
         </p:nvSpPr>
         <p:spPr>
           <a:xfrm>
-            <a:off x="1162050" y="4038600"/>
-            <a:ext cx="4800600" cy="400050"/>
+            <a:off x="1162050" y="4202271"/>
+            <a:ext cx="4800600" cy="246221"/>
           </a:xfrm>
           <a:prstGeom prst="rect">
             <a:avLst/>
@@ -11529,9 +14216,10 @@
             <a:r>
               <a:rPr sz="1000" b="0" i="0">
                 <a:solidFill>
-                  <a:srgbClr val="7A90B8"/>
-                </a:solidFill>
-                <a:latin typeface="DM Sans"/>
+                  <a:schemeClr val="bg1">
+                    <a:alpha val="70000"/>
+                  </a:schemeClr>
+                </a:solidFill>
               </a:rPr>
               <a:t>Outil de travail, même très bien organisé</a:t>
             </a:r>
@@ -11546,7 +14234,7 @@
         </p:nvSpPr>
         <p:spPr>
           <a:xfrm>
-            <a:off x="6248400" y="3733800"/>
+            <a:off x="6248400" y="3829051"/>
             <a:ext cx="5105400" cy="266700"/>
           </a:xfrm>
           <a:prstGeom prst="rect">
@@ -11581,8 +14269,8 @@
         </p:nvSpPr>
         <p:spPr>
           <a:xfrm>
-            <a:off x="6248400" y="4038600"/>
-            <a:ext cx="5105400" cy="419100"/>
+            <a:off x="6248400" y="4133851"/>
+            <a:ext cx="5105400" cy="246221"/>
           </a:xfrm>
           <a:prstGeom prst="rect">
             <a:avLst/>
@@ -11599,7 +14287,7 @@
             <a:r>
               <a:rPr sz="1000" b="0" i="0">
                 <a:solidFill>
-                  <a:srgbClr val="7A90B8"/>
+                  <a:schemeClr val="bg1"/>
                 </a:solidFill>
                 <a:latin typeface="DM Sans"/>
               </a:rPr>
@@ -11623,10 +14311,16 @@
             <a:avLst/>
           </a:prstGeom>
           <a:solidFill>
-            <a:srgbClr val="FF5555"/>
+            <a:srgbClr val="FF5555">
+              <a:alpha val="21000"/>
+            </a:srgbClr>
           </a:solidFill>
-          <a:ln>
-            <a:noFill/>
+          <a:ln w="12700">
+            <a:solidFill>
+              <a:schemeClr val="bg1">
+                <a:alpha val="40000"/>
+              </a:schemeClr>
+            </a:solidFill>
           </a:ln>
         </p:spPr>
         <p:style>
@@ -11648,6 +14342,7 @@
           <a:lstStyle/>
           <a:p>
             <a:pPr algn="ctr"/>
+            <a:endParaRPr/>
           </a:p>
         </p:txBody>
       </p:sp>
@@ -11666,10 +14361,16 @@
             <a:avLst/>
           </a:prstGeom>
           <a:solidFill>
-            <a:srgbClr val="060D1A"/>
+            <a:schemeClr val="tx1">
+              <a:alpha val="15000"/>
+            </a:schemeClr>
           </a:solidFill>
-          <a:ln>
-            <a:noFill/>
+          <a:ln w="12700">
+            <a:solidFill>
+              <a:schemeClr val="bg1">
+                <a:alpha val="40000"/>
+              </a:schemeClr>
+            </a:solidFill>
           </a:ln>
         </p:spPr>
         <p:style>
@@ -11691,6 +14392,7 @@
           <a:lstStyle/>
           <a:p>
             <a:pPr algn="ctr"/>
+            <a:endParaRPr/>
           </a:p>
         </p:txBody>
       </p:sp>
@@ -11702,7 +14404,7 @@
         </p:nvSpPr>
         <p:spPr>
           <a:xfrm>
-            <a:off x="819150" y="4857750"/>
+            <a:off x="819150" y="4869021"/>
             <a:ext cx="266700" cy="419100"/>
           </a:xfrm>
           <a:prstGeom prst="rect">
@@ -11737,7 +14439,7 @@
         </p:nvSpPr>
         <p:spPr>
           <a:xfrm>
-            <a:off x="1162050" y="4705350"/>
+            <a:off x="1162050" y="4869021"/>
             <a:ext cx="4800600" cy="266700"/>
           </a:xfrm>
           <a:prstGeom prst="rect">
@@ -11772,8 +14474,8 @@
         </p:nvSpPr>
         <p:spPr>
           <a:xfrm>
-            <a:off x="1162050" y="5010150"/>
-            <a:ext cx="4800600" cy="400050"/>
+            <a:off x="1162050" y="5173821"/>
+            <a:ext cx="4800600" cy="246221"/>
           </a:xfrm>
           <a:prstGeom prst="rect">
             <a:avLst/>
@@ -11790,9 +14492,10 @@
             <a:r>
               <a:rPr sz="1000" b="0" i="0">
                 <a:solidFill>
-                  <a:srgbClr val="7A90B8"/>
-                </a:solidFill>
-                <a:latin typeface="DM Sans"/>
+                  <a:schemeClr val="bg1">
+                    <a:alpha val="70000"/>
+                  </a:schemeClr>
+                </a:solidFill>
               </a:rPr>
               <a:t>Ressource visuelle réutilisable</a:t>
             </a:r>
@@ -11807,7 +14510,7 @@
         </p:nvSpPr>
         <p:spPr>
           <a:xfrm>
-            <a:off x="6248400" y="4705350"/>
+            <a:off x="6248400" y="4800601"/>
             <a:ext cx="5105400" cy="266700"/>
           </a:xfrm>
           <a:prstGeom prst="rect">
@@ -11842,8 +14545,8 @@
         </p:nvSpPr>
         <p:spPr>
           <a:xfrm>
-            <a:off x="6248400" y="5010150"/>
-            <a:ext cx="5105400" cy="419100"/>
+            <a:off x="6248400" y="5105401"/>
+            <a:ext cx="5105400" cy="246221"/>
           </a:xfrm>
           <a:prstGeom prst="rect">
             <a:avLst/>
@@ -11860,7 +14563,7 @@
             <a:r>
               <a:rPr sz="1000" b="0" i="0">
                 <a:solidFill>
-                  <a:srgbClr val="7A90B8"/>
+                  <a:schemeClr val="bg1"/>
                 </a:solidFill>
                 <a:latin typeface="DM Sans"/>
               </a:rPr>
@@ -11878,12 +14581,1004 @@
 </file>
 
 <file path=ppt/slides/slide8.xml><?xml version="1.0" encoding="utf-8"?>
-<p:sld xmlns:a="http://schemas.openxmlformats.org/drawingml/2006/main" xmlns:p="http://schemas.openxmlformats.org/presentationml/2006/main" xmlns:r="http://schemas.openxmlformats.org/officeDocument/2006/relationships">
+<p:sld xmlns:a="http://schemas.openxmlformats.org/drawingml/2006/main" xmlns:r="http://schemas.openxmlformats.org/officeDocument/2006/relationships" xmlns:p="http://schemas.openxmlformats.org/presentationml/2006/main">
+  <p:cSld>
+    <p:bg>
+      <p:bgPr>
+        <a:gradFill flip="none" rotWithShape="1">
+          <a:gsLst>
+            <a:gs pos="0">
+              <a:schemeClr val="tx2"/>
+            </a:gs>
+            <a:gs pos="100000">
+              <a:schemeClr val="tx1"/>
+            </a:gs>
+            <a:gs pos="21000">
+              <a:srgbClr val="183466"/>
+            </a:gs>
+          </a:gsLst>
+          <a:lin ang="0" scaled="0"/>
+          <a:tileRect/>
+        </a:gradFill>
+        <a:effectLst/>
+      </p:bgPr>
+    </p:bg>
+    <p:spTree>
+      <p:nvGrpSpPr>
+        <p:cNvPr id="1" name=""/>
+        <p:cNvGrpSpPr/>
+        <p:nvPr/>
+      </p:nvGrpSpPr>
+      <p:grpSpPr>
+        <a:xfrm>
+          <a:off x="0" y="0"/>
+          <a:ext cx="0" cy="0"/>
+          <a:chOff x="0" y="0"/>
+          <a:chExt cx="0" cy="0"/>
+        </a:xfrm>
+      </p:grpSpPr>
+      <p:sp>
+        <p:nvSpPr>
+          <p:cNvPr id="2" name="Rectangle 1"/>
+          <p:cNvSpPr/>
+          <p:nvPr/>
+        </p:nvSpPr>
+        <p:spPr>
+          <a:xfrm>
+            <a:off x="0" y="0"/>
+            <a:ext cx="47625" cy="6858000"/>
+          </a:xfrm>
+          <a:prstGeom prst="rect">
+            <a:avLst/>
+          </a:prstGeom>
+          <a:solidFill>
+            <a:srgbClr val="14D9C8"/>
+          </a:solidFill>
+          <a:ln>
+            <a:noFill/>
+          </a:ln>
+        </p:spPr>
+        <p:style>
+          <a:lnRef idx="1">
+            <a:schemeClr val="accent1"/>
+          </a:lnRef>
+          <a:fillRef idx="3">
+            <a:schemeClr val="accent1"/>
+          </a:fillRef>
+          <a:effectRef idx="2">
+            <a:schemeClr val="accent1"/>
+          </a:effectRef>
+          <a:fontRef idx="minor">
+            <a:schemeClr val="lt1"/>
+          </a:fontRef>
+        </p:style>
+        <p:txBody>
+          <a:bodyPr rtlCol="0" anchor="ctr"/>
+          <a:lstStyle/>
+          <a:p>
+            <a:pPr algn="ctr"/>
+            <a:endParaRPr/>
+          </a:p>
+        </p:txBody>
+      </p:sp>
+      <p:sp>
+        <p:nvSpPr>
+          <p:cNvPr id="3" name="TextBox 2"/>
+          <p:cNvSpPr txBox="1"/>
+          <p:nvPr/>
+        </p:nvSpPr>
+        <p:spPr>
+          <a:xfrm>
+            <a:off x="647700" y="1534815"/>
+            <a:ext cx="7048500" cy="230832"/>
+          </a:xfrm>
+          <a:prstGeom prst="rect">
+            <a:avLst/>
+          </a:prstGeom>
+          <a:noFill/>
+        </p:spPr>
+        <p:txBody>
+          <a:bodyPr wrap="square">
+            <a:spAutoFit/>
+          </a:bodyPr>
+          <a:lstStyle/>
+          <a:p>
+            <a:pPr algn="l"/>
+            <a:r>
+              <a:rPr sz="900" b="0" i="0" spc="300" dirty="0">
+                <a:solidFill>
+                  <a:srgbClr val="B8CCEE"/>
+                </a:solidFill>
+                <a:latin typeface="DM Sans"/>
+              </a:rPr>
+              <a:t>CONTEXTE HISTORIQUE</a:t>
+            </a:r>
+          </a:p>
+        </p:txBody>
+      </p:sp>
+      <p:sp>
+        <p:nvSpPr>
+          <p:cNvPr id="4" name="TextBox 3"/>
+          <p:cNvSpPr txBox="1"/>
+          <p:nvPr/>
+        </p:nvSpPr>
+        <p:spPr>
+          <a:xfrm>
+            <a:off x="647700" y="1744365"/>
+            <a:ext cx="7048500" cy="1047750"/>
+          </a:xfrm>
+          <a:prstGeom prst="rect">
+            <a:avLst/>
+          </a:prstGeom>
+          <a:noFill/>
+        </p:spPr>
+        <p:txBody>
+          <a:bodyPr wrap="square">
+            <a:spAutoFit/>
+          </a:bodyPr>
+          <a:lstStyle/>
+          <a:p>
+            <a:pPr algn="l"/>
+            <a:r>
+              <a:rPr sz="3200" b="1">
+                <a:solidFill>
+                  <a:srgbClr val="EEF3FF"/>
+                </a:solidFill>
+                <a:latin typeface="Atkinson Hyperlegible"/>
+              </a:rPr>
+              <a:t>Le système était fait</a:t>
+            </a:r>
+          </a:p>
+          <a:p>
+            <a:pPr algn="l"/>
+            <a:r>
+              <a:rPr sz="3200" b="1">
+                <a:solidFill>
+                  <a:srgbClr val="EEF3FF"/>
+                </a:solidFill>
+                <a:latin typeface="Atkinson Hyperlegible"/>
+              </a:rPr>
+              <a:t>pour des </a:t>
+            </a:r>
+            <a:r>
+              <a:rPr sz="3200" b="1">
+                <a:solidFill>
+                  <a:srgbClr val="14D9C8"/>
+                </a:solidFill>
+                <a:latin typeface="Atkinson Hyperlegible"/>
+              </a:rPr>
+              <a:t>humains</a:t>
+            </a:r>
+            <a:r>
+              <a:rPr sz="3200" b="1">
+                <a:solidFill>
+                  <a:srgbClr val="EEF3FF"/>
+                </a:solidFill>
+                <a:latin typeface="Atkinson Hyperlegible"/>
+              </a:rPr>
+              <a:t>.</a:t>
+            </a:r>
+          </a:p>
+        </p:txBody>
+      </p:sp>
+      <p:sp>
+        <p:nvSpPr>
+          <p:cNvPr id="5" name="TextBox 4"/>
+          <p:cNvSpPr txBox="1"/>
+          <p:nvPr/>
+        </p:nvSpPr>
+        <p:spPr>
+          <a:xfrm>
+            <a:off x="647700" y="2894657"/>
+            <a:ext cx="7048500" cy="492443"/>
+          </a:xfrm>
+          <a:prstGeom prst="rect">
+            <a:avLst/>
+          </a:prstGeom>
+          <a:noFill/>
+        </p:spPr>
+        <p:txBody>
+          <a:bodyPr wrap="square">
+            <a:spAutoFit/>
+          </a:bodyPr>
+          <a:lstStyle/>
+          <a:p>
+            <a:r>
+              <a:rPr sz="1300" dirty="0">
+                <a:solidFill>
+                  <a:schemeClr val="bg1">
+                    <a:alpha val="80000"/>
+                  </a:schemeClr>
+                </a:solidFill>
+              </a:rPr>
+              <a:t>Les </a:t>
+            </a:r>
+            <a:r>
+              <a:rPr sz="1300" dirty="0" err="1">
+                <a:solidFill>
+                  <a:schemeClr val="bg1">
+                    <a:alpha val="80000"/>
+                  </a:schemeClr>
+                </a:solidFill>
+              </a:rPr>
+              <a:t>humains</a:t>
+            </a:r>
+            <a:r>
+              <a:rPr sz="1300" dirty="0">
+                <a:solidFill>
+                  <a:schemeClr val="bg1">
+                    <a:alpha val="80000"/>
+                  </a:schemeClr>
+                </a:solidFill>
+              </a:rPr>
+              <a:t> </a:t>
+            </a:r>
+            <a:r>
+              <a:rPr sz="1300" dirty="0" err="1">
+                <a:solidFill>
+                  <a:schemeClr val="bg1">
+                    <a:alpha val="80000"/>
+                  </a:schemeClr>
+                </a:solidFill>
+              </a:rPr>
+              <a:t>interprètent</a:t>
+            </a:r>
+            <a:r>
+              <a:rPr sz="1300" dirty="0">
+                <a:solidFill>
+                  <a:schemeClr val="bg1">
+                    <a:alpha val="80000"/>
+                  </a:schemeClr>
+                </a:solidFill>
+              </a:rPr>
+              <a:t> une </a:t>
+            </a:r>
+            <a:r>
+              <a:rPr sz="1300" dirty="0" err="1">
+                <a:solidFill>
+                  <a:schemeClr val="bg1">
+                    <a:alpha val="80000"/>
+                  </a:schemeClr>
+                </a:solidFill>
+              </a:rPr>
+              <a:t>règle</a:t>
+            </a:r>
+            <a:r>
+              <a:rPr sz="1300" dirty="0">
+                <a:solidFill>
+                  <a:schemeClr val="bg1">
+                    <a:alpha val="80000"/>
+                  </a:schemeClr>
+                </a:solidFill>
+              </a:rPr>
+              <a:t> </a:t>
+            </a:r>
+            <a:r>
+              <a:rPr sz="1300" dirty="0" err="1">
+                <a:solidFill>
+                  <a:schemeClr val="bg1">
+                    <a:alpha val="80000"/>
+                  </a:schemeClr>
+                </a:solidFill>
+              </a:rPr>
+              <a:t>floue</a:t>
+            </a:r>
+            <a:r>
+              <a:rPr sz="1300" dirty="0">
+                <a:solidFill>
+                  <a:schemeClr val="bg1">
+                    <a:alpha val="80000"/>
+                  </a:schemeClr>
+                </a:solidFill>
+              </a:rPr>
+              <a:t>, </a:t>
+            </a:r>
+            <a:r>
+              <a:rPr sz="1300" dirty="0" err="1">
+                <a:solidFill>
+                  <a:schemeClr val="bg1">
+                    <a:alpha val="80000"/>
+                  </a:schemeClr>
+                </a:solidFill>
+              </a:rPr>
+              <a:t>adaptent</a:t>
+            </a:r>
+            <a:r>
+              <a:rPr sz="1300" dirty="0">
+                <a:solidFill>
+                  <a:schemeClr val="bg1">
+                    <a:alpha val="80000"/>
+                  </a:schemeClr>
+                </a:solidFill>
+              </a:rPr>
+              <a:t> un </a:t>
+            </a:r>
+            <a:r>
+              <a:rPr sz="1300" dirty="0" err="1">
+                <a:solidFill>
+                  <a:schemeClr val="bg1">
+                    <a:alpha val="80000"/>
+                  </a:schemeClr>
+                </a:solidFill>
+              </a:rPr>
+              <a:t>composant</a:t>
+            </a:r>
+            <a:r>
+              <a:rPr sz="1300" dirty="0">
+                <a:solidFill>
+                  <a:schemeClr val="bg1">
+                    <a:alpha val="80000"/>
+                  </a:schemeClr>
+                </a:solidFill>
+              </a:rPr>
+              <a:t> à un </a:t>
+            </a:r>
+            <a:r>
+              <a:rPr sz="1300" dirty="0" err="1">
+                <a:solidFill>
+                  <a:schemeClr val="bg1">
+                    <a:alpha val="80000"/>
+                  </a:schemeClr>
+                </a:solidFill>
+              </a:rPr>
+              <a:t>contexte</a:t>
+            </a:r>
+            <a:r>
+              <a:rPr sz="1300" dirty="0">
+                <a:solidFill>
+                  <a:schemeClr val="bg1">
+                    <a:alpha val="80000"/>
+                  </a:schemeClr>
+                </a:solidFill>
+              </a:rPr>
+              <a:t> non</a:t>
+            </a:r>
+            <a:r>
+              <a:rPr lang="fr-CA" sz="1300" dirty="0">
+                <a:solidFill>
+                  <a:schemeClr val="bg1">
+                    <a:alpha val="80000"/>
+                  </a:schemeClr>
+                </a:solidFill>
+              </a:rPr>
+              <a:t> </a:t>
+            </a:r>
+            <a:r>
+              <a:rPr sz="1300" dirty="0" err="1">
+                <a:solidFill>
+                  <a:schemeClr val="bg1">
+                    <a:alpha val="80000"/>
+                  </a:schemeClr>
+                </a:solidFill>
+              </a:rPr>
+              <a:t>prévu</a:t>
+            </a:r>
+            <a:r>
+              <a:rPr sz="1300" dirty="0">
+                <a:solidFill>
+                  <a:schemeClr val="bg1">
+                    <a:alpha val="80000"/>
+                  </a:schemeClr>
+                </a:solidFill>
+              </a:rPr>
+              <a:t>, </a:t>
+            </a:r>
+            <a:br>
+              <a:rPr lang="fr-CA" sz="1300" dirty="0">
+                <a:solidFill>
+                  <a:schemeClr val="bg1">
+                    <a:alpha val="80000"/>
+                  </a:schemeClr>
+                </a:solidFill>
+              </a:rPr>
+            </a:br>
+            <a:r>
+              <a:rPr sz="1300" dirty="0">
+                <a:solidFill>
+                  <a:schemeClr val="bg1">
+                    <a:alpha val="80000"/>
+                  </a:schemeClr>
+                </a:solidFill>
+              </a:rPr>
+              <a:t>et </a:t>
+            </a:r>
+            <a:r>
+              <a:rPr sz="1300" dirty="0" err="1">
+                <a:solidFill>
+                  <a:schemeClr val="bg1">
+                    <a:alpha val="80000"/>
+                  </a:schemeClr>
+                </a:solidFill>
+              </a:rPr>
+              <a:t>devinent</a:t>
+            </a:r>
+            <a:r>
+              <a:rPr sz="1300" dirty="0">
+                <a:solidFill>
+                  <a:schemeClr val="bg1">
+                    <a:alpha val="80000"/>
+                  </a:schemeClr>
+                </a:solidFill>
+              </a:rPr>
+              <a:t> </a:t>
+            </a:r>
+            <a:r>
+              <a:rPr sz="1300" dirty="0" err="1">
+                <a:solidFill>
+                  <a:schemeClr val="bg1">
+                    <a:alpha val="80000"/>
+                  </a:schemeClr>
+                </a:solidFill>
+              </a:rPr>
+              <a:t>l'intention</a:t>
+            </a:r>
+            <a:r>
+              <a:rPr sz="1300" dirty="0">
+                <a:solidFill>
+                  <a:schemeClr val="bg1">
+                    <a:alpha val="80000"/>
+                  </a:schemeClr>
+                </a:solidFill>
+              </a:rPr>
+              <a:t> derrière un </a:t>
+            </a:r>
+            <a:r>
+              <a:rPr sz="1300" dirty="0" err="1">
+                <a:solidFill>
+                  <a:schemeClr val="bg1">
+                    <a:alpha val="80000"/>
+                  </a:schemeClr>
+                </a:solidFill>
+              </a:rPr>
+              <a:t>exemple</a:t>
+            </a:r>
+            <a:r>
+              <a:rPr sz="1300" dirty="0">
+                <a:solidFill>
+                  <a:schemeClr val="bg1">
+                    <a:alpha val="80000"/>
+                  </a:schemeClr>
+                </a:solidFill>
+              </a:rPr>
+              <a:t>.</a:t>
+            </a:r>
+          </a:p>
+        </p:txBody>
+      </p:sp>
+      <p:sp>
+        <p:nvSpPr>
+          <p:cNvPr id="6" name="TextBox 5"/>
+          <p:cNvSpPr txBox="1"/>
+          <p:nvPr/>
+        </p:nvSpPr>
+        <p:spPr>
+          <a:xfrm>
+            <a:off x="647700" y="3466157"/>
+            <a:ext cx="7048500" cy="461665"/>
+          </a:xfrm>
+          <a:prstGeom prst="rect">
+            <a:avLst/>
+          </a:prstGeom>
+          <a:noFill/>
+        </p:spPr>
+        <p:txBody>
+          <a:bodyPr wrap="square">
+            <a:spAutoFit/>
+          </a:bodyPr>
+          <a:lstStyle/>
+          <a:p>
+            <a:r>
+              <a:rPr sz="1200" dirty="0">
+                <a:solidFill>
+                  <a:schemeClr val="bg1">
+                    <a:alpha val="80000"/>
+                  </a:schemeClr>
+                </a:solidFill>
+              </a:rPr>
+              <a:t>Les systèmes classiques </a:t>
+            </a:r>
+            <a:r>
+              <a:rPr sz="1200" dirty="0" err="1">
+                <a:solidFill>
+                  <a:schemeClr val="bg1">
+                    <a:alpha val="80000"/>
+                  </a:schemeClr>
+                </a:solidFill>
+              </a:rPr>
+              <a:t>pouvaient</a:t>
+            </a:r>
+            <a:r>
+              <a:rPr sz="1200" dirty="0">
+                <a:solidFill>
+                  <a:schemeClr val="bg1">
+                    <a:alpha val="80000"/>
+                  </a:schemeClr>
+                </a:solidFill>
+              </a:rPr>
+              <a:t> se</a:t>
+            </a:r>
+            <a:r>
+              <a:rPr lang="fr-CA" sz="1200" dirty="0">
+                <a:solidFill>
+                  <a:schemeClr val="bg1">
+                    <a:alpha val="80000"/>
+                  </a:schemeClr>
+                </a:solidFill>
+              </a:rPr>
+              <a:t> </a:t>
+            </a:r>
+            <a:r>
+              <a:rPr sz="1200" dirty="0" err="1">
+                <a:solidFill>
+                  <a:schemeClr val="bg1">
+                    <a:alpha val="80000"/>
+                  </a:schemeClr>
+                </a:solidFill>
+              </a:rPr>
+              <a:t>permettre</a:t>
+            </a:r>
+            <a:r>
+              <a:rPr sz="1200" dirty="0">
+                <a:solidFill>
+                  <a:schemeClr val="bg1">
+                    <a:alpha val="80000"/>
+                  </a:schemeClr>
+                </a:solidFill>
+              </a:rPr>
+              <a:t> d'être </a:t>
+            </a:r>
+            <a:r>
+              <a:rPr sz="1200" dirty="0" err="1">
+                <a:solidFill>
+                  <a:schemeClr val="bg1">
+                    <a:alpha val="80000"/>
+                  </a:schemeClr>
+                </a:solidFill>
+              </a:rPr>
+              <a:t>partiellement</a:t>
+            </a:r>
+            <a:r>
+              <a:rPr sz="1200" dirty="0">
+                <a:solidFill>
+                  <a:schemeClr val="bg1">
+                    <a:alpha val="80000"/>
+                  </a:schemeClr>
+                </a:solidFill>
+              </a:rPr>
+              <a:t> </a:t>
+            </a:r>
+            <a:r>
+              <a:rPr sz="1200" b="1" dirty="0" err="1">
+                <a:solidFill>
+                  <a:schemeClr val="bg1"/>
+                </a:solidFill>
+              </a:rPr>
+              <a:t>implicites</a:t>
+            </a:r>
+            <a:r>
+              <a:rPr sz="1200" dirty="0">
+                <a:solidFill>
+                  <a:schemeClr val="bg1">
+                    <a:alpha val="80000"/>
+                  </a:schemeClr>
+                </a:solidFill>
+              </a:rPr>
+              <a:t>. Les</a:t>
+            </a:r>
+            <a:r>
+              <a:rPr lang="fr-CA" sz="1200" dirty="0">
+                <a:solidFill>
+                  <a:schemeClr val="bg1">
+                    <a:alpha val="80000"/>
+                  </a:schemeClr>
+                </a:solidFill>
+              </a:rPr>
+              <a:t> </a:t>
+            </a:r>
+            <a:r>
+              <a:rPr sz="1200" dirty="0" err="1">
+                <a:solidFill>
+                  <a:schemeClr val="bg1">
+                    <a:alpha val="80000"/>
+                  </a:schemeClr>
+                </a:solidFill>
+              </a:rPr>
+              <a:t>humains</a:t>
+            </a:r>
+            <a:r>
+              <a:rPr sz="1200" dirty="0">
+                <a:solidFill>
+                  <a:schemeClr val="bg1">
+                    <a:alpha val="80000"/>
+                  </a:schemeClr>
+                </a:solidFill>
+              </a:rPr>
+              <a:t> </a:t>
+            </a:r>
+            <a:br>
+              <a:rPr lang="fr-CA" sz="1200" dirty="0">
+                <a:solidFill>
+                  <a:schemeClr val="bg1">
+                    <a:alpha val="80000"/>
+                  </a:schemeClr>
+                </a:solidFill>
+              </a:rPr>
+            </a:br>
+            <a:r>
+              <a:rPr sz="1200" dirty="0" err="1">
+                <a:solidFill>
+                  <a:schemeClr val="bg1">
+                    <a:alpha val="80000"/>
+                  </a:schemeClr>
+                </a:solidFill>
+              </a:rPr>
+              <a:t>comblaient</a:t>
+            </a:r>
+            <a:r>
+              <a:rPr sz="1200" dirty="0">
+                <a:solidFill>
+                  <a:schemeClr val="bg1">
+                    <a:alpha val="80000"/>
+                  </a:schemeClr>
+                </a:solidFill>
+              </a:rPr>
+              <a:t> les lacunes.</a:t>
+            </a:r>
+          </a:p>
+        </p:txBody>
+      </p:sp>
+      <p:sp>
+        <p:nvSpPr>
+          <p:cNvPr id="7" name="Rectangle 6"/>
+          <p:cNvSpPr/>
+          <p:nvPr/>
+        </p:nvSpPr>
+        <p:spPr>
+          <a:xfrm>
+            <a:off x="647700" y="4327872"/>
+            <a:ext cx="7048500" cy="323850"/>
+          </a:xfrm>
+          <a:prstGeom prst="rect">
+            <a:avLst/>
+          </a:prstGeom>
+          <a:solidFill>
+            <a:srgbClr val="3421CB">
+              <a:alpha val="40000"/>
+            </a:srgbClr>
+          </a:solidFill>
+          <a:ln>
+            <a:noFill/>
+          </a:ln>
+        </p:spPr>
+        <p:style>
+          <a:lnRef idx="1">
+            <a:schemeClr val="accent1"/>
+          </a:lnRef>
+          <a:fillRef idx="3">
+            <a:schemeClr val="accent1"/>
+          </a:fillRef>
+          <a:effectRef idx="2">
+            <a:schemeClr val="accent1"/>
+          </a:effectRef>
+          <a:fontRef idx="minor">
+            <a:schemeClr val="lt1"/>
+          </a:fontRef>
+        </p:style>
+        <p:txBody>
+          <a:bodyPr rtlCol="0" anchor="ctr"/>
+          <a:lstStyle/>
+          <a:p>
+            <a:pPr algn="ctr"/>
+            <a:endParaRPr/>
+          </a:p>
+        </p:txBody>
+      </p:sp>
+      <p:sp>
+        <p:nvSpPr>
+          <p:cNvPr id="8" name="TextBox 7"/>
+          <p:cNvSpPr txBox="1"/>
+          <p:nvPr/>
+        </p:nvSpPr>
+        <p:spPr>
+          <a:xfrm>
+            <a:off x="762000" y="4399607"/>
+            <a:ext cx="6819900" cy="261610"/>
+          </a:xfrm>
+          <a:prstGeom prst="rect">
+            <a:avLst/>
+          </a:prstGeom>
+          <a:noFill/>
+        </p:spPr>
+        <p:txBody>
+          <a:bodyPr wrap="square">
+            <a:spAutoFit/>
+          </a:bodyPr>
+          <a:lstStyle/>
+          <a:p>
+            <a:pPr algn="l"/>
+            <a:r>
+              <a:rPr sz="1100" b="0" i="0" dirty="0">
+                <a:solidFill>
+                  <a:schemeClr val="bg1"/>
+                </a:solidFill>
+              </a:rPr>
+              <a:t>🧠  </a:t>
+            </a:r>
+            <a:r>
+              <a:rPr sz="1100" b="0" i="0" dirty="0" err="1">
+                <a:solidFill>
+                  <a:schemeClr val="bg1"/>
+                </a:solidFill>
+              </a:rPr>
+              <a:t>Interprètent</a:t>
+            </a:r>
+            <a:r>
+              <a:rPr sz="1100" b="0" i="0" dirty="0">
+                <a:solidFill>
+                  <a:schemeClr val="bg1"/>
+                </a:solidFill>
+              </a:rPr>
+              <a:t> les règles </a:t>
+            </a:r>
+            <a:r>
+              <a:rPr sz="1100" b="0" i="0" dirty="0" err="1">
+                <a:solidFill>
+                  <a:schemeClr val="bg1"/>
+                </a:solidFill>
+              </a:rPr>
+              <a:t>floues</a:t>
+            </a:r>
+            <a:endParaRPr sz="1100" b="0" i="0" dirty="0">
+              <a:solidFill>
+                <a:schemeClr val="bg1"/>
+              </a:solidFill>
+            </a:endParaRPr>
+          </a:p>
+        </p:txBody>
+      </p:sp>
+      <p:sp>
+        <p:nvSpPr>
+          <p:cNvPr id="9" name="Rectangle 8"/>
+          <p:cNvSpPr/>
+          <p:nvPr/>
+        </p:nvSpPr>
+        <p:spPr>
+          <a:xfrm>
+            <a:off x="647700" y="4689822"/>
+            <a:ext cx="7048500" cy="323850"/>
+          </a:xfrm>
+          <a:prstGeom prst="rect">
+            <a:avLst/>
+          </a:prstGeom>
+          <a:solidFill>
+            <a:srgbClr val="3421CB">
+              <a:alpha val="40000"/>
+            </a:srgbClr>
+          </a:solidFill>
+          <a:ln>
+            <a:noFill/>
+          </a:ln>
+        </p:spPr>
+        <p:style>
+          <a:lnRef idx="1">
+            <a:schemeClr val="accent1"/>
+          </a:lnRef>
+          <a:fillRef idx="3">
+            <a:schemeClr val="accent1"/>
+          </a:fillRef>
+          <a:effectRef idx="2">
+            <a:schemeClr val="accent1"/>
+          </a:effectRef>
+          <a:fontRef idx="minor">
+            <a:schemeClr val="lt1"/>
+          </a:fontRef>
+        </p:style>
+        <p:txBody>
+          <a:bodyPr rtlCol="0" anchor="ctr"/>
+          <a:lstStyle/>
+          <a:p>
+            <a:pPr algn="ctr"/>
+            <a:endParaRPr/>
+          </a:p>
+        </p:txBody>
+      </p:sp>
+      <p:sp>
+        <p:nvSpPr>
+          <p:cNvPr id="10" name="TextBox 9"/>
+          <p:cNvSpPr txBox="1"/>
+          <p:nvPr/>
+        </p:nvSpPr>
+        <p:spPr>
+          <a:xfrm>
+            <a:off x="762000" y="4761557"/>
+            <a:ext cx="6819900" cy="261610"/>
+          </a:xfrm>
+          <a:prstGeom prst="rect">
+            <a:avLst/>
+          </a:prstGeom>
+          <a:noFill/>
+        </p:spPr>
+        <p:txBody>
+          <a:bodyPr wrap="square">
+            <a:spAutoFit/>
+          </a:bodyPr>
+          <a:lstStyle/>
+          <a:p>
+            <a:pPr algn="l"/>
+            <a:r>
+              <a:rPr sz="1100" b="0" i="0">
+                <a:solidFill>
+                  <a:schemeClr val="bg1"/>
+                </a:solidFill>
+              </a:rPr>
+              <a:t>🎯  Adaptent selon le contexte</a:t>
+            </a:r>
+          </a:p>
+        </p:txBody>
+      </p:sp>
+      <p:sp>
+        <p:nvSpPr>
+          <p:cNvPr id="11" name="Rectangle 10"/>
+          <p:cNvSpPr/>
+          <p:nvPr/>
+        </p:nvSpPr>
+        <p:spPr>
+          <a:xfrm>
+            <a:off x="647700" y="5051772"/>
+            <a:ext cx="7048500" cy="323850"/>
+          </a:xfrm>
+          <a:prstGeom prst="rect">
+            <a:avLst/>
+          </a:prstGeom>
+          <a:solidFill>
+            <a:srgbClr val="3421CB">
+              <a:alpha val="40000"/>
+            </a:srgbClr>
+          </a:solidFill>
+          <a:ln>
+            <a:noFill/>
+          </a:ln>
+        </p:spPr>
+        <p:style>
+          <a:lnRef idx="1">
+            <a:schemeClr val="accent1"/>
+          </a:lnRef>
+          <a:fillRef idx="3">
+            <a:schemeClr val="accent1"/>
+          </a:fillRef>
+          <a:effectRef idx="2">
+            <a:schemeClr val="accent1"/>
+          </a:effectRef>
+          <a:fontRef idx="minor">
+            <a:schemeClr val="lt1"/>
+          </a:fontRef>
+        </p:style>
+        <p:txBody>
+          <a:bodyPr rtlCol="0" anchor="ctr"/>
+          <a:lstStyle/>
+          <a:p>
+            <a:pPr algn="ctr"/>
+            <a:endParaRPr/>
+          </a:p>
+        </p:txBody>
+      </p:sp>
+      <p:sp>
+        <p:nvSpPr>
+          <p:cNvPr id="12" name="TextBox 11"/>
+          <p:cNvSpPr txBox="1"/>
+          <p:nvPr/>
+        </p:nvSpPr>
+        <p:spPr>
+          <a:xfrm>
+            <a:off x="762000" y="5123507"/>
+            <a:ext cx="6819900" cy="261610"/>
+          </a:xfrm>
+          <a:prstGeom prst="rect">
+            <a:avLst/>
+          </a:prstGeom>
+          <a:noFill/>
+        </p:spPr>
+        <p:txBody>
+          <a:bodyPr wrap="square">
+            <a:spAutoFit/>
+          </a:bodyPr>
+          <a:lstStyle/>
+          <a:p>
+            <a:pPr algn="l"/>
+            <a:r>
+              <a:rPr sz="1100" b="0" i="0">
+                <a:solidFill>
+                  <a:schemeClr val="bg1"/>
+                </a:solidFill>
+              </a:rPr>
+              <a:t>💬  Comprennent l'intention implicite</a:t>
+            </a:r>
+          </a:p>
+        </p:txBody>
+      </p:sp>
+      <p:sp>
+        <p:nvSpPr>
+          <p:cNvPr id="13" name="Rectangle 12"/>
+          <p:cNvSpPr/>
+          <p:nvPr/>
+        </p:nvSpPr>
+        <p:spPr>
+          <a:xfrm>
+            <a:off x="8001000" y="0"/>
+            <a:ext cx="4191000" cy="6858000"/>
+          </a:xfrm>
+          <a:prstGeom prst="rect">
+            <a:avLst/>
+          </a:prstGeom>
+          <a:solidFill>
+            <a:srgbClr val="0A1628"/>
+          </a:solidFill>
+          <a:ln>
+            <a:noFill/>
+          </a:ln>
+        </p:spPr>
+        <p:style>
+          <a:lnRef idx="1">
+            <a:schemeClr val="accent1"/>
+          </a:lnRef>
+          <a:fillRef idx="3">
+            <a:schemeClr val="accent1"/>
+          </a:fillRef>
+          <a:effectRef idx="2">
+            <a:schemeClr val="accent1"/>
+          </a:effectRef>
+          <a:fontRef idx="minor">
+            <a:schemeClr val="lt1"/>
+          </a:fontRef>
+        </p:style>
+        <p:txBody>
+          <a:bodyPr rtlCol="0" anchor="ctr"/>
+          <a:lstStyle/>
+          <a:p>
+            <a:pPr algn="ctr"/>
+            <a:endParaRPr/>
+          </a:p>
+        </p:txBody>
+      </p:sp>
+      <p:pic>
+        <p:nvPicPr>
+          <p:cNvPr id="14" name="Picture 13" descr="image.jpg"/>
+          <p:cNvPicPr>
+            <a:picLocks noChangeAspect="1"/>
+          </p:cNvPicPr>
+          <p:nvPr/>
+        </p:nvPicPr>
+        <p:blipFill>
+          <a:blip r:embed="rId2"/>
+          <a:stretch>
+            <a:fillRect/>
+          </a:stretch>
+        </p:blipFill>
+        <p:spPr>
+          <a:xfrm>
+            <a:off x="8001000" y="0"/>
+            <a:ext cx="4191000" cy="6858000"/>
+          </a:xfrm>
+          <a:prstGeom prst="rect">
+            <a:avLst/>
+          </a:prstGeom>
+        </p:spPr>
+      </p:pic>
+    </p:spTree>
+  </p:cSld>
+  <p:clrMapOvr>
+    <a:masterClrMapping/>
+  </p:clrMapOvr>
+</p:sld>
+</file>
+
+<file path=ppt/slides/slide9.xml><?xml version="1.0" encoding="utf-8"?>
+<p:sld xmlns:a="http://schemas.openxmlformats.org/drawingml/2006/main" xmlns:r="http://schemas.openxmlformats.org/officeDocument/2006/relationships" xmlns:p="http://schemas.openxmlformats.org/presentationml/2006/main">
   <p:cSld>
     <p:bg>
       <p:bgPr>
         <a:solidFill>
-          <a:srgbClr val="060D1A"/>
+          <a:schemeClr val="tx2"/>
         </a:solidFill>
         <a:effectLst/>
       </p:bgPr>
@@ -11894,7 +15589,14 @@
         <p:cNvGrpSpPr/>
         <p:nvPr/>
       </p:nvGrpSpPr>
-      <p:grpSpPr/>
+      <p:grpSpPr>
+        <a:xfrm>
+          <a:off x="0" y="0"/>
+          <a:ext cx="0" cy="0"/>
+          <a:chOff x="0" y="0"/>
+          <a:chExt cx="0" cy="0"/>
+        </a:xfrm>
+      </p:grpSpPr>
       <p:sp>
         <p:nvSpPr>
           <p:cNvPr id="2" name="Rectangle 1"/>
@@ -11935,6 +15637,7 @@
           <a:lstStyle/>
           <a:p>
             <a:pPr algn="ctr"/>
+            <a:endParaRPr/>
           </a:p>
         </p:txBody>
       </p:sp>
@@ -11946,8 +15649,8 @@
         </p:nvSpPr>
         <p:spPr>
           <a:xfrm>
-            <a:off x="647700" y="495300"/>
-            <a:ext cx="7048500" cy="190500"/>
+            <a:off x="647700" y="1614160"/>
+            <a:ext cx="5715000" cy="230832"/>
           </a:xfrm>
           <a:prstGeom prst="rect">
             <a:avLst/>
@@ -11962,13 +15665,13 @@
           <a:p>
             <a:pPr algn="l"/>
             <a:r>
-              <a:rPr sz="900" b="0" i="0">
+              <a:rPr sz="900" b="0" i="0" spc="300" dirty="0">
                 <a:solidFill>
                   <a:srgbClr val="B8CCEE"/>
                 </a:solidFill>
                 <a:latin typeface="DM Sans"/>
               </a:rPr>
-              <a:t>CONTEXTE HISTORIQUE</a:t>
+              <a:t>CHANGEMENT DE CONTEXTE</a:t>
             </a:r>
           </a:p>
         </p:txBody>
@@ -11981,8 +15684,8 @@
         </p:nvSpPr>
         <p:spPr>
           <a:xfrm>
-            <a:off x="647700" y="704850"/>
-            <a:ext cx="7048500" cy="1047750"/>
+            <a:off x="647700" y="1823710"/>
+            <a:ext cx="5715000" cy="1047750"/>
           </a:xfrm>
           <a:prstGeom prst="rect">
             <a:avLst/>
@@ -11997,43 +15700,40 @@
           <a:p>
             <a:pPr algn="l"/>
             <a:r>
-              <a:rPr sz="3200" b="1">
+              <a:rPr sz="2800" b="1" dirty="0">
                 <a:solidFill>
                   <a:srgbClr val="EEF3FF"/>
                 </a:solidFill>
                 <a:latin typeface="Atkinson Hyperlegible"/>
               </a:rPr>
-              <a:t>Le système était fait</a:t>
-            </a:r>
+              <a:t>De nouveaux </a:t>
+            </a:r>
+            <a:r>
+              <a:rPr sz="2800" b="1" dirty="0" err="1">
+                <a:solidFill>
+                  <a:srgbClr val="EEF3FF"/>
+                </a:solidFill>
+                <a:latin typeface="Atkinson Hyperlegible"/>
+              </a:rPr>
+              <a:t>acteurs</a:t>
+            </a:r>
+            <a:endParaRPr sz="2800" b="1" dirty="0">
+              <a:solidFill>
+                <a:srgbClr val="EEF3FF"/>
+              </a:solidFill>
+              <a:latin typeface="Atkinson Hyperlegible"/>
+            </a:endParaRPr>
           </a:p>
           <a:p>
             <a:pPr algn="l"/>
             <a:r>
-              <a:rPr sz="3200" b="1">
+              <a:rPr sz="2800" b="1" dirty="0">
                 <a:solidFill>
                   <a:srgbClr val="EEF3FF"/>
                 </a:solidFill>
                 <a:latin typeface="Atkinson Hyperlegible"/>
               </a:rPr>
-              <a:t>pour des </a:t>
-            </a:r>
-            <a:r>
-              <a:rPr sz="3200" b="1">
-                <a:solidFill>
-                  <a:srgbClr val="14D9C8"/>
-                </a:solidFill>
-                <a:latin typeface="Atkinson Hyperlegible"/>
-              </a:rPr>
-              <a:t>humains</a:t>
-            </a:r>
-            <a:r>
-              <a:rPr sz="3200" b="1">
-                <a:solidFill>
-                  <a:srgbClr val="EEF3FF"/>
-                </a:solidFill>
-                <a:latin typeface="Atkinson Hyperlegible"/>
-              </a:rPr>
-              <a:t>.</a:t>
+              <a:t>dans le workflow.</a:t>
             </a:r>
           </a:p>
         </p:txBody>
@@ -12046,8 +15746,8 @@
         </p:nvSpPr>
         <p:spPr>
           <a:xfrm>
-            <a:off x="647700" y="1514475"/>
-            <a:ext cx="7048500" cy="533400"/>
+            <a:off x="647700" y="2633335"/>
+            <a:ext cx="5715000" cy="492443"/>
           </a:xfrm>
           <a:prstGeom prst="rect">
             <a:avLst/>
@@ -12061,555 +15761,166 @@
           <a:lstStyle/>
           <a:p>
             <a:r>
-              <a:rPr sz="1300">
+              <a:rPr sz="1300" dirty="0">
                 <a:solidFill>
                   <a:srgbClr val="B8CCEE"/>
                 </a:solidFill>
                 <a:latin typeface="DM Sans"/>
               </a:rPr>
-              <a:t>Les humains interprètent une règle floue, adaptent un composant à un contexte non
-                        prévu, et devinent l'intention derrière un exemple.</a:t>
-            </a:r>
-          </a:p>
-        </p:txBody>
-      </p:sp>
-      <p:sp>
-        <p:nvSpPr>
-          <p:cNvPr id="6" name="TextBox 5"/>
-          <p:cNvSpPr txBox="1"/>
-          <p:nvPr/>
-        </p:nvSpPr>
-        <p:spPr>
-          <a:xfrm>
-            <a:off x="647700" y="2085975"/>
-            <a:ext cx="7048500" cy="533400"/>
-          </a:xfrm>
-          <a:prstGeom prst="rect">
-            <a:avLst/>
-          </a:prstGeom>
-          <a:noFill/>
-        </p:spPr>
-        <p:txBody>
-          <a:bodyPr wrap="square">
-            <a:spAutoFit/>
-          </a:bodyPr>
-          <a:lstStyle/>
-          <a:p>
-            <a:r>
-              <a:rPr sz="1200">
-                <a:solidFill>
-                  <a:srgbClr val="7A90B8"/>
+              <a:t>Les agents </a:t>
+            </a:r>
+            <a:r>
+              <a:rPr sz="1300" dirty="0" err="1">
+                <a:solidFill>
+                  <a:srgbClr val="B8CCEE"/>
                 </a:solidFill>
                 <a:latin typeface="DM Sans"/>
               </a:rPr>
-              <a:t>Les systèmes classiques pouvaient se
-                        permettre d'être partiellement </a:t>
-            </a:r>
-            <a:r>
-              <a:rPr sz="1200" b="1">
-                <a:solidFill>
-                  <a:srgbClr val="EEF3FF"/>
+              <a:t>d'IA</a:t>
+            </a:r>
+            <a:r>
+              <a:rPr sz="1300" dirty="0">
+                <a:solidFill>
+                  <a:srgbClr val="B8CCEE"/>
                 </a:solidFill>
                 <a:latin typeface="DM Sans"/>
               </a:rPr>
-              <a:t>implicites</a:t>
-            </a:r>
-            <a:r>
-              <a:rPr sz="1200">
-                <a:solidFill>
-                  <a:srgbClr val="7A90B8"/>
+              <a:t> </a:t>
+            </a:r>
+            <a:r>
+              <a:rPr sz="1300" dirty="0" err="1">
+                <a:solidFill>
+                  <a:srgbClr val="B8CCEE"/>
                 </a:solidFill>
                 <a:latin typeface="DM Sans"/>
               </a:rPr>
-              <a:t>. Les
-                        humains comblaient les lacunes.</a:t>
-            </a:r>
-          </a:p>
-        </p:txBody>
-      </p:sp>
-      <p:sp>
-        <p:nvSpPr>
-          <p:cNvPr id="7" name="Rectangle 6"/>
-          <p:cNvSpPr/>
-          <p:nvPr/>
-        </p:nvSpPr>
-        <p:spPr>
-          <a:xfrm>
-            <a:off x="647700" y="2657475"/>
-            <a:ext cx="7048500" cy="323850"/>
-          </a:xfrm>
-          <a:prstGeom prst="rect">
-            <a:avLst/>
-          </a:prstGeom>
-          <a:solidFill>
-            <a:srgbClr val="3421CB"/>
-          </a:solidFill>
-          <a:ln>
-            <a:noFill/>
-          </a:ln>
-        </p:spPr>
-        <p:style>
-          <a:lnRef idx="1">
-            <a:schemeClr val="accent1"/>
-          </a:lnRef>
-          <a:fillRef idx="3">
-            <a:schemeClr val="accent1"/>
-          </a:fillRef>
-          <a:effectRef idx="2">
-            <a:schemeClr val="accent1"/>
-          </a:effectRef>
-          <a:fontRef idx="minor">
-            <a:schemeClr val="lt1"/>
-          </a:fontRef>
-        </p:style>
-        <p:txBody>
-          <a:bodyPr rtlCol="0" anchor="ctr"/>
-          <a:lstStyle/>
-          <a:p>
-            <a:pPr algn="ctr"/>
-          </a:p>
-        </p:txBody>
-      </p:sp>
-      <p:sp>
-        <p:nvSpPr>
-          <p:cNvPr id="8" name="TextBox 7"/>
-          <p:cNvSpPr txBox="1"/>
-          <p:nvPr/>
-        </p:nvSpPr>
-        <p:spPr>
-          <a:xfrm>
-            <a:off x="762000" y="2733675"/>
-            <a:ext cx="6819900" cy="190500"/>
-          </a:xfrm>
-          <a:prstGeom prst="rect">
-            <a:avLst/>
-          </a:prstGeom>
-          <a:noFill/>
-        </p:spPr>
-        <p:txBody>
-          <a:bodyPr wrap="square">
-            <a:spAutoFit/>
-          </a:bodyPr>
-          <a:lstStyle/>
-          <a:p>
-            <a:pPr algn="l"/>
-            <a:r>
-              <a:rPr sz="1100" b="0" i="0">
-                <a:solidFill>
-                  <a:srgbClr val="EEF3FF"/>
+              <a:t>génèrent</a:t>
+            </a:r>
+            <a:r>
+              <a:rPr sz="1300" dirty="0">
+                <a:solidFill>
+                  <a:srgbClr val="B8CCEE"/>
                 </a:solidFill>
                 <a:latin typeface="DM Sans"/>
               </a:rPr>
-              <a:t>🧠  Interprètent les règles floues</a:t>
-            </a:r>
-          </a:p>
-        </p:txBody>
-      </p:sp>
-      <p:sp>
-        <p:nvSpPr>
-          <p:cNvPr id="9" name="Rectangle 8"/>
-          <p:cNvSpPr/>
-          <p:nvPr/>
-        </p:nvSpPr>
-        <p:spPr>
-          <a:xfrm>
-            <a:off x="647700" y="3019425"/>
-            <a:ext cx="7048500" cy="323850"/>
-          </a:xfrm>
-          <a:prstGeom prst="rect">
-            <a:avLst/>
-          </a:prstGeom>
-          <a:solidFill>
-            <a:srgbClr val="3421CB"/>
-          </a:solidFill>
-          <a:ln>
-            <a:noFill/>
-          </a:ln>
-        </p:spPr>
-        <p:style>
-          <a:lnRef idx="1">
-            <a:schemeClr val="accent1"/>
-          </a:lnRef>
-          <a:fillRef idx="3">
-            <a:schemeClr val="accent1"/>
-          </a:fillRef>
-          <a:effectRef idx="2">
-            <a:schemeClr val="accent1"/>
-          </a:effectRef>
-          <a:fontRef idx="minor">
-            <a:schemeClr val="lt1"/>
-          </a:fontRef>
-        </p:style>
-        <p:txBody>
-          <a:bodyPr rtlCol="0" anchor="ctr"/>
-          <a:lstStyle/>
-          <a:p>
-            <a:pPr algn="ctr"/>
-          </a:p>
-        </p:txBody>
-      </p:sp>
-      <p:sp>
-        <p:nvSpPr>
-          <p:cNvPr id="10" name="TextBox 9"/>
-          <p:cNvSpPr txBox="1"/>
-          <p:nvPr/>
-        </p:nvSpPr>
-        <p:spPr>
-          <a:xfrm>
-            <a:off x="762000" y="3095625"/>
-            <a:ext cx="6819900" cy="190500"/>
-          </a:xfrm>
-          <a:prstGeom prst="rect">
-            <a:avLst/>
-          </a:prstGeom>
-          <a:noFill/>
-        </p:spPr>
-        <p:txBody>
-          <a:bodyPr wrap="square">
-            <a:spAutoFit/>
-          </a:bodyPr>
-          <a:lstStyle/>
-          <a:p>
-            <a:pPr algn="l"/>
-            <a:r>
-              <a:rPr sz="1100" b="0" i="0">
-                <a:solidFill>
-                  <a:srgbClr val="EEF3FF"/>
+              <a:t> des </a:t>
+            </a:r>
+            <a:r>
+              <a:rPr sz="1300" dirty="0" err="1">
+                <a:solidFill>
+                  <a:srgbClr val="B8CCEE"/>
                 </a:solidFill>
                 <a:latin typeface="DM Sans"/>
               </a:rPr>
-              <a:t>🎯  Adaptent selon le contexte</a:t>
-            </a:r>
-          </a:p>
-        </p:txBody>
-      </p:sp>
-      <p:sp>
-        <p:nvSpPr>
-          <p:cNvPr id="11" name="Rectangle 10"/>
-          <p:cNvSpPr/>
-          <p:nvPr/>
-        </p:nvSpPr>
-        <p:spPr>
-          <a:xfrm>
-            <a:off x="647700" y="3381375"/>
-            <a:ext cx="7048500" cy="323850"/>
-          </a:xfrm>
-          <a:prstGeom prst="rect">
-            <a:avLst/>
-          </a:prstGeom>
-          <a:solidFill>
-            <a:srgbClr val="3421CB"/>
-          </a:solidFill>
-          <a:ln>
-            <a:noFill/>
-          </a:ln>
-        </p:spPr>
-        <p:style>
-          <a:lnRef idx="1">
-            <a:schemeClr val="accent1"/>
-          </a:lnRef>
-          <a:fillRef idx="3">
-            <a:schemeClr val="accent1"/>
-          </a:fillRef>
-          <a:effectRef idx="2">
-            <a:schemeClr val="accent1"/>
-          </a:effectRef>
-          <a:fontRef idx="minor">
-            <a:schemeClr val="lt1"/>
-          </a:fontRef>
-        </p:style>
-        <p:txBody>
-          <a:bodyPr rtlCol="0" anchor="ctr"/>
-          <a:lstStyle/>
-          <a:p>
-            <a:pPr algn="ctr"/>
-          </a:p>
-        </p:txBody>
-      </p:sp>
-      <p:sp>
-        <p:nvSpPr>
-          <p:cNvPr id="12" name="TextBox 11"/>
-          <p:cNvSpPr txBox="1"/>
-          <p:nvPr/>
-        </p:nvSpPr>
-        <p:spPr>
-          <a:xfrm>
-            <a:off x="762000" y="3457575"/>
-            <a:ext cx="6819900" cy="190500"/>
-          </a:xfrm>
-          <a:prstGeom prst="rect">
-            <a:avLst/>
-          </a:prstGeom>
-          <a:noFill/>
-        </p:spPr>
-        <p:txBody>
-          <a:bodyPr wrap="square">
-            <a:spAutoFit/>
-          </a:bodyPr>
-          <a:lstStyle/>
-          <a:p>
-            <a:pPr algn="l"/>
-            <a:r>
-              <a:rPr sz="1100" b="0" i="0">
-                <a:solidFill>
-                  <a:srgbClr val="EEF3FF"/>
+              <a:t>écrans</a:t>
+            </a:r>
+            <a:r>
+              <a:rPr sz="1300" dirty="0">
+                <a:solidFill>
+                  <a:srgbClr val="B8CCEE"/>
                 </a:solidFill>
                 <a:latin typeface="DM Sans"/>
               </a:rPr>
-              <a:t>💬  Comprennent l'intention implicite</a:t>
-            </a:r>
-          </a:p>
-        </p:txBody>
-      </p:sp>
-      <p:sp>
-        <p:nvSpPr>
-          <p:cNvPr id="13" name="Rectangle 12"/>
-          <p:cNvSpPr/>
-          <p:nvPr/>
-        </p:nvSpPr>
-        <p:spPr>
-          <a:xfrm>
-            <a:off x="8001000" y="0"/>
-            <a:ext cx="4191000" cy="6858000"/>
-          </a:xfrm>
-          <a:prstGeom prst="rect">
-            <a:avLst/>
-          </a:prstGeom>
-          <a:solidFill>
-            <a:srgbClr val="0A1628"/>
-          </a:solidFill>
-          <a:ln>
-            <a:noFill/>
-          </a:ln>
-        </p:spPr>
-        <p:style>
-          <a:lnRef idx="1">
-            <a:schemeClr val="accent1"/>
-          </a:lnRef>
-          <a:fillRef idx="3">
-            <a:schemeClr val="accent1"/>
-          </a:fillRef>
-          <a:effectRef idx="2">
-            <a:schemeClr val="accent1"/>
-          </a:effectRef>
-          <a:fontRef idx="minor">
-            <a:schemeClr val="lt1"/>
-          </a:fontRef>
-        </p:style>
-        <p:txBody>
-          <a:bodyPr rtlCol="0" anchor="ctr"/>
-          <a:lstStyle/>
-          <a:p>
-            <a:pPr algn="ctr"/>
-          </a:p>
-        </p:txBody>
-      </p:sp>
-      <p:pic>
-        <p:nvPicPr>
-          <p:cNvPr id="14" name="Picture 13" descr="image.jpg"/>
-          <p:cNvPicPr>
-            <a:picLocks noChangeAspect="1"/>
-          </p:cNvPicPr>
-          <p:nvPr/>
-        </p:nvPicPr>
-        <p:blipFill>
-          <a:blip r:embed="rId2"/>
-          <a:stretch>
-            <a:fillRect/>
-          </a:stretch>
-        </p:blipFill>
-        <p:spPr>
-          <a:xfrm>
-            <a:off x="8001000" y="0"/>
-            <a:ext cx="4191000" cy="6858000"/>
-          </a:xfrm>
-          <a:prstGeom prst="rect">
-            <a:avLst/>
-          </a:prstGeom>
-        </p:spPr>
-      </p:pic>
-    </p:spTree>
-  </p:cSld>
-  <p:clrMapOvr>
-    <a:masterClrMapping/>
-  </p:clrMapOvr>
-</p:sld>
-</file>
-
-<file path=ppt/slides/slide9.xml><?xml version="1.0" encoding="utf-8"?>
-<p:sld xmlns:a="http://schemas.openxmlformats.org/drawingml/2006/main" xmlns:p="http://schemas.openxmlformats.org/presentationml/2006/main" xmlns:r="http://schemas.openxmlformats.org/officeDocument/2006/relationships">
-  <p:cSld>
-    <p:bg>
-      <p:bgPr>
-        <a:solidFill>
-          <a:srgbClr val="060D1A"/>
-        </a:solidFill>
-        <a:effectLst/>
-      </p:bgPr>
-    </p:bg>
-    <p:spTree>
-      <p:nvGrpSpPr>
-        <p:cNvPr id="1" name=""/>
-        <p:cNvGrpSpPr/>
-        <p:nvPr/>
-      </p:nvGrpSpPr>
-      <p:grpSpPr/>
-      <p:sp>
-        <p:nvSpPr>
-          <p:cNvPr id="2" name="Rectangle 1"/>
-          <p:cNvSpPr/>
-          <p:nvPr/>
-        </p:nvSpPr>
-        <p:spPr>
-          <a:xfrm>
-            <a:off x="0" y="0"/>
-            <a:ext cx="47625" cy="6858000"/>
-          </a:xfrm>
-          <a:prstGeom prst="rect">
-            <a:avLst/>
-          </a:prstGeom>
-          <a:solidFill>
-            <a:srgbClr val="14D9C8"/>
-          </a:solidFill>
-          <a:ln>
-            <a:noFill/>
-          </a:ln>
-        </p:spPr>
-        <p:style>
-          <a:lnRef idx="1">
-            <a:schemeClr val="accent1"/>
-          </a:lnRef>
-          <a:fillRef idx="3">
-            <a:schemeClr val="accent1"/>
-          </a:fillRef>
-          <a:effectRef idx="2">
-            <a:schemeClr val="accent1"/>
-          </a:effectRef>
-          <a:fontRef idx="minor">
-            <a:schemeClr val="lt1"/>
-          </a:fontRef>
-        </p:style>
-        <p:txBody>
-          <a:bodyPr rtlCol="0" anchor="ctr"/>
-          <a:lstStyle/>
-          <a:p>
-            <a:pPr algn="ctr"/>
-          </a:p>
-        </p:txBody>
-      </p:sp>
-      <p:sp>
-        <p:nvSpPr>
-          <p:cNvPr id="3" name="TextBox 2"/>
-          <p:cNvSpPr txBox="1"/>
-          <p:nvPr/>
-        </p:nvSpPr>
-        <p:spPr>
-          <a:xfrm>
-            <a:off x="647700" y="495300"/>
-            <a:ext cx="5715000" cy="190500"/>
-          </a:xfrm>
-          <a:prstGeom prst="rect">
-            <a:avLst/>
-          </a:prstGeom>
-          <a:noFill/>
-        </p:spPr>
-        <p:txBody>
-          <a:bodyPr wrap="square">
-            <a:spAutoFit/>
-          </a:bodyPr>
-          <a:lstStyle/>
-          <a:p>
-            <a:pPr algn="l"/>
-            <a:r>
-              <a:rPr sz="900" b="0" i="0">
+              <a:t>, </a:t>
+            </a:r>
+            <a:r>
+              <a:rPr sz="1300" dirty="0" err="1">
                 <a:solidFill>
                   <a:srgbClr val="B8CCEE"/>
                 </a:solidFill>
                 <a:latin typeface="DM Sans"/>
               </a:rPr>
-              <a:t>CHANGEMENT DE CONTEXTE</a:t>
-            </a:r>
-          </a:p>
-        </p:txBody>
-      </p:sp>
-      <p:sp>
-        <p:nvSpPr>
-          <p:cNvPr id="4" name="TextBox 3"/>
-          <p:cNvSpPr txBox="1"/>
-          <p:nvPr/>
-        </p:nvSpPr>
-        <p:spPr>
-          <a:xfrm>
-            <a:off x="647700" y="704850"/>
-            <a:ext cx="5715000" cy="1047750"/>
-          </a:xfrm>
-          <a:prstGeom prst="rect">
-            <a:avLst/>
-          </a:prstGeom>
-          <a:noFill/>
-        </p:spPr>
-        <p:txBody>
-          <a:bodyPr wrap="square">
-            <a:spAutoFit/>
-          </a:bodyPr>
-          <a:lstStyle/>
-          <a:p>
-            <a:pPr algn="l"/>
-            <a:r>
-              <a:rPr sz="2800" b="1">
-                <a:solidFill>
-                  <a:srgbClr val="EEF3FF"/>
-                </a:solidFill>
-                <a:latin typeface="Atkinson Hyperlegible"/>
-              </a:rPr>
-              <a:t>De nouveaux acteurs</a:t>
-            </a:r>
-          </a:p>
-          <a:p>
-            <a:pPr algn="l"/>
-            <a:r>
-              <a:rPr sz="2800" b="1">
-                <a:solidFill>
-                  <a:srgbClr val="EEF3FF"/>
-                </a:solidFill>
-                <a:latin typeface="Atkinson Hyperlegible"/>
-              </a:rPr>
-              <a:t>dans le workflow.</a:t>
-            </a:r>
-          </a:p>
-        </p:txBody>
-      </p:sp>
-      <p:sp>
-        <p:nvSpPr>
-          <p:cNvPr id="5" name="TextBox 4"/>
-          <p:cNvSpPr txBox="1"/>
-          <p:nvPr/>
-        </p:nvSpPr>
-        <p:spPr>
-          <a:xfrm>
-            <a:off x="647700" y="1514475"/>
-            <a:ext cx="5715000" cy="533400"/>
-          </a:xfrm>
-          <a:prstGeom prst="rect">
-            <a:avLst/>
-          </a:prstGeom>
-          <a:noFill/>
-        </p:spPr>
-        <p:txBody>
-          <a:bodyPr wrap="square">
-            <a:spAutoFit/>
-          </a:bodyPr>
-          <a:lstStyle/>
-          <a:p>
-            <a:r>
-              <a:rPr sz="1300">
+              <a:t>produisent</a:t>
+            </a:r>
+            <a:r>
+              <a:rPr sz="1300" dirty="0">
                 <a:solidFill>
                   <a:srgbClr val="B8CCEE"/>
                 </a:solidFill>
                 <a:latin typeface="DM Sans"/>
               </a:rPr>
-              <a:t>Les agents d'IA génèrent des écrans, produisent du code, assemblent des composants,
-                        vérifient des règles et appliquent des contraintes.</a:t>
+              <a:t> du code, </a:t>
+            </a:r>
+            <a:r>
+              <a:rPr sz="1300" dirty="0" err="1">
+                <a:solidFill>
+                  <a:srgbClr val="B8CCEE"/>
+                </a:solidFill>
+                <a:latin typeface="DM Sans"/>
+              </a:rPr>
+              <a:t>assemblent</a:t>
+            </a:r>
+            <a:r>
+              <a:rPr sz="1300" dirty="0">
+                <a:solidFill>
+                  <a:srgbClr val="B8CCEE"/>
+                </a:solidFill>
+                <a:latin typeface="DM Sans"/>
+              </a:rPr>
+              <a:t> des composants,</a:t>
+            </a:r>
+            <a:r>
+              <a:rPr lang="fr-CA" sz="1300" dirty="0">
+                <a:solidFill>
+                  <a:srgbClr val="B8CCEE"/>
+                </a:solidFill>
+                <a:latin typeface="DM Sans"/>
+              </a:rPr>
+              <a:t> </a:t>
+            </a:r>
+            <a:r>
+              <a:rPr sz="1300" dirty="0" err="1">
+                <a:solidFill>
+                  <a:srgbClr val="B8CCEE"/>
+                </a:solidFill>
+                <a:latin typeface="DM Sans"/>
+              </a:rPr>
+              <a:t>vérifient</a:t>
+            </a:r>
+            <a:r>
+              <a:rPr sz="1300" dirty="0">
+                <a:solidFill>
+                  <a:srgbClr val="B8CCEE"/>
+                </a:solidFill>
+                <a:latin typeface="DM Sans"/>
+              </a:rPr>
+              <a:t> des règles et </a:t>
+            </a:r>
+            <a:r>
+              <a:rPr sz="1300" dirty="0" err="1">
+                <a:solidFill>
+                  <a:srgbClr val="B8CCEE"/>
+                </a:solidFill>
+                <a:latin typeface="DM Sans"/>
+              </a:rPr>
+              <a:t>appliquent</a:t>
+            </a:r>
+            <a:r>
+              <a:rPr sz="1300" dirty="0">
+                <a:solidFill>
+                  <a:srgbClr val="B8CCEE"/>
+                </a:solidFill>
+                <a:latin typeface="DM Sans"/>
+              </a:rPr>
+              <a:t> des </a:t>
+            </a:r>
+            <a:r>
+              <a:rPr sz="1300" dirty="0" err="1">
+                <a:solidFill>
+                  <a:srgbClr val="B8CCEE"/>
+                </a:solidFill>
+                <a:latin typeface="DM Sans"/>
+              </a:rPr>
+              <a:t>contraintes</a:t>
+            </a:r>
+            <a:r>
+              <a:rPr sz="1300" dirty="0">
+                <a:solidFill>
+                  <a:srgbClr val="B8CCEE"/>
+                </a:solidFill>
+                <a:latin typeface="DM Sans"/>
+              </a:rPr>
+              <a:t>.</a:t>
             </a:r>
           </a:p>
         </p:txBody>
@@ -12622,7 +15933,7 @@
         </p:nvSpPr>
         <p:spPr>
           <a:xfrm>
-            <a:off x="647700" y="2085975"/>
+            <a:off x="1066800" y="3369072"/>
             <a:ext cx="38100" cy="647700"/>
           </a:xfrm>
           <a:prstGeom prst="rect">
@@ -12654,6 +15965,7 @@
           <a:lstStyle/>
           <a:p>
             <a:pPr algn="ctr"/>
+            <a:endParaRPr/>
           </a:p>
         </p:txBody>
       </p:sp>
@@ -12665,8 +15977,8 @@
         </p:nvSpPr>
         <p:spPr>
           <a:xfrm>
-            <a:off x="800100" y="2085975"/>
-            <a:ext cx="5562600" cy="647700"/>
+            <a:off x="1219200" y="3444359"/>
+            <a:ext cx="4010025" cy="430887"/>
           </a:xfrm>
           <a:prstGeom prst="rect">
             <a:avLst/>
@@ -12681,14 +15993,155 @@
           <a:p>
             <a:pPr algn="l"/>
             <a:r>
-              <a:rPr sz="1100" b="0" i="1">
-                <a:solidFill>
-                  <a:srgbClr val="EEF3FF"/>
-                </a:solidFill>
-                <a:latin typeface="DM Sans"/>
-              </a:rPr>
-              <a:t>Ils exécutent ce qui leur est fourni. Ils n'arbitrent pas. Ils
-                        n'interprètent pas.</a:t>
+              <a:rPr sz="1100" b="0" i="1" dirty="0" err="1">
+                <a:solidFill>
+                  <a:srgbClr val="EEF3FF"/>
+                </a:solidFill>
+              </a:rPr>
+              <a:t>Ils</a:t>
+            </a:r>
+            <a:r>
+              <a:rPr sz="1100" b="0" i="1" dirty="0">
+                <a:solidFill>
+                  <a:srgbClr val="EEF3FF"/>
+                </a:solidFill>
+              </a:rPr>
+              <a:t> </a:t>
+            </a:r>
+            <a:r>
+              <a:rPr sz="1100" b="0" i="1" dirty="0" err="1">
+                <a:solidFill>
+                  <a:srgbClr val="EEF3FF"/>
+                </a:solidFill>
+              </a:rPr>
+              <a:t>exécutent</a:t>
+            </a:r>
+            <a:r>
+              <a:rPr sz="1100" b="0" i="1" dirty="0">
+                <a:solidFill>
+                  <a:srgbClr val="EEF3FF"/>
+                </a:solidFill>
+              </a:rPr>
+              <a:t> </a:t>
+            </a:r>
+            <a:r>
+              <a:rPr sz="1100" b="0" i="1" dirty="0" err="1">
+                <a:solidFill>
+                  <a:srgbClr val="EEF3FF"/>
+                </a:solidFill>
+              </a:rPr>
+              <a:t>ce</a:t>
+            </a:r>
+            <a:r>
+              <a:rPr sz="1100" b="0" i="1" dirty="0">
+                <a:solidFill>
+                  <a:srgbClr val="EEF3FF"/>
+                </a:solidFill>
+              </a:rPr>
+              <a:t> qui </a:t>
+            </a:r>
+            <a:r>
+              <a:rPr sz="1100" b="0" i="1" dirty="0" err="1">
+                <a:solidFill>
+                  <a:srgbClr val="EEF3FF"/>
+                </a:solidFill>
+              </a:rPr>
+              <a:t>leur</a:t>
+            </a:r>
+            <a:r>
+              <a:rPr sz="1100" b="0" i="1" dirty="0">
+                <a:solidFill>
+                  <a:srgbClr val="EEF3FF"/>
+                </a:solidFill>
+              </a:rPr>
+              <a:t> est </a:t>
+            </a:r>
+            <a:r>
+              <a:rPr sz="1100" b="0" i="1" dirty="0" err="1">
+                <a:solidFill>
+                  <a:srgbClr val="EEF3FF"/>
+                </a:solidFill>
+              </a:rPr>
+              <a:t>fourni</a:t>
+            </a:r>
+            <a:r>
+              <a:rPr sz="1100" b="0" i="1" dirty="0">
+                <a:solidFill>
+                  <a:srgbClr val="EEF3FF"/>
+                </a:solidFill>
+              </a:rPr>
+              <a:t>. </a:t>
+            </a:r>
+            <a:r>
+              <a:rPr sz="1100" b="0" i="1" dirty="0" err="1">
+                <a:solidFill>
+                  <a:srgbClr val="EEF3FF"/>
+                </a:solidFill>
+              </a:rPr>
+              <a:t>Ils</a:t>
+            </a:r>
+            <a:r>
+              <a:rPr sz="1100" b="0" i="1" dirty="0">
+                <a:solidFill>
+                  <a:srgbClr val="EEF3FF"/>
+                </a:solidFill>
+              </a:rPr>
+              <a:t> </a:t>
+            </a:r>
+            <a:r>
+              <a:rPr sz="1100" b="0" i="1" dirty="0" err="1">
+                <a:solidFill>
+                  <a:srgbClr val="EEF3FF"/>
+                </a:solidFill>
+              </a:rPr>
+              <a:t>n'arbitrent</a:t>
+            </a:r>
+            <a:r>
+              <a:rPr sz="1100" b="0" i="1" dirty="0">
+                <a:solidFill>
+                  <a:srgbClr val="EEF3FF"/>
+                </a:solidFill>
+              </a:rPr>
+              <a:t> pas. </a:t>
+            </a:r>
+            <a:br>
+              <a:rPr lang="fr-CA" sz="1100" b="0" i="1" dirty="0">
+                <a:solidFill>
+                  <a:srgbClr val="EEF3FF"/>
+                </a:solidFill>
+              </a:rPr>
+            </a:br>
+            <a:r>
+              <a:rPr sz="1100" b="0" i="1" dirty="0" err="1">
+                <a:solidFill>
+                  <a:srgbClr val="EEF3FF"/>
+                </a:solidFill>
+              </a:rPr>
+              <a:t>Ils</a:t>
+            </a:r>
+            <a:r>
+              <a:rPr lang="fr-CA" sz="1100" b="0" i="1" dirty="0">
+                <a:solidFill>
+                  <a:srgbClr val="EEF3FF"/>
+                </a:solidFill>
+              </a:rPr>
+              <a:t> </a:t>
+            </a:r>
+            <a:r>
+              <a:rPr sz="1100" b="0" i="1" dirty="0" err="1">
+                <a:solidFill>
+                  <a:srgbClr val="EEF3FF"/>
+                </a:solidFill>
+              </a:rPr>
+              <a:t>n'interprètent</a:t>
+            </a:r>
+            <a:r>
+              <a:rPr sz="1100" b="0" i="1" dirty="0">
+                <a:solidFill>
+                  <a:srgbClr val="EEF3FF"/>
+                </a:solidFill>
+              </a:rPr>
+              <a:t> pas.</a:t>
             </a:r>
           </a:p>
         </p:txBody>
@@ -12701,8 +16154,8 @@
         </p:nvSpPr>
         <p:spPr>
           <a:xfrm>
-            <a:off x="647700" y="2828925"/>
-            <a:ext cx="685800" cy="209550"/>
+            <a:off x="647700" y="4244975"/>
+            <a:ext cx="762000" cy="209550"/>
           </a:xfrm>
           <a:prstGeom prst="rect">
             <a:avLst/>
@@ -12735,6 +16188,7 @@
           <a:lstStyle/>
           <a:p>
             <a:pPr algn="ctr"/>
+            <a:endParaRPr/>
           </a:p>
         </p:txBody>
       </p:sp>
@@ -12746,8 +16200,8 @@
         </p:nvSpPr>
         <p:spPr>
           <a:xfrm>
-            <a:off x="685800" y="2857500"/>
-            <a:ext cx="609600" cy="152400"/>
+            <a:off x="685800" y="4244975"/>
+            <a:ext cx="685800" cy="230832"/>
           </a:xfrm>
           <a:prstGeom prst="rect">
             <a:avLst/>
@@ -12762,7 +16216,7 @@
           <a:p>
             <a:pPr algn="ctr"/>
             <a:r>
-              <a:rPr sz="900" b="0" i="0">
+              <a:rPr sz="900" b="0" i="0" dirty="0" err="1">
                 <a:solidFill>
                   <a:srgbClr val="B8CCEE"/>
                 </a:solidFill>
@@ -12770,6 +16224,12 @@
               </a:rPr>
               <a:t>Génèrent</a:t>
             </a:r>
+            <a:endParaRPr sz="900" b="0" i="0" dirty="0">
+              <a:solidFill>
+                <a:srgbClr val="B8CCEE"/>
+              </a:solidFill>
+              <a:latin typeface="DM Sans"/>
+            </a:endParaRPr>
           </a:p>
         </p:txBody>
       </p:sp>
@@ -12781,8 +16241,8 @@
         </p:nvSpPr>
         <p:spPr>
           <a:xfrm>
-            <a:off x="1409700" y="2828925"/>
-            <a:ext cx="800100" cy="209550"/>
+            <a:off x="1500187" y="4244975"/>
+            <a:ext cx="876300" cy="209550"/>
           </a:xfrm>
           <a:prstGeom prst="rect">
             <a:avLst/>
@@ -12815,6 +16275,7 @@
           <a:lstStyle/>
           <a:p>
             <a:pPr algn="ctr"/>
+            <a:endParaRPr/>
           </a:p>
         </p:txBody>
       </p:sp>
@@ -12826,8 +16287,8 @@
         </p:nvSpPr>
         <p:spPr>
           <a:xfrm>
-            <a:off x="1447800" y="2857500"/>
-            <a:ext cx="723900" cy="152400"/>
+            <a:off x="1493044" y="4236566"/>
+            <a:ext cx="876300" cy="230832"/>
           </a:xfrm>
           <a:prstGeom prst="rect">
             <a:avLst/>
@@ -12842,7 +16303,7 @@
           <a:p>
             <a:pPr algn="ctr"/>
             <a:r>
-              <a:rPr sz="900" b="0" i="0">
+              <a:rPr sz="900" b="0" i="0" dirty="0" err="1">
                 <a:solidFill>
                   <a:srgbClr val="B8CCEE"/>
                 </a:solidFill>
@@ -12850,6 +16311,12 @@
               </a:rPr>
               <a:t>Assemblent</a:t>
             </a:r>
+            <a:endParaRPr sz="900" b="0" i="0" dirty="0">
+              <a:solidFill>
+                <a:srgbClr val="B8CCEE"/>
+              </a:solidFill>
+              <a:latin typeface="DM Sans"/>
+            </a:endParaRPr>
           </a:p>
         </p:txBody>
       </p:sp>
@@ -12861,7 +16328,7 @@
         </p:nvSpPr>
         <p:spPr>
           <a:xfrm>
-            <a:off x="2286000" y="2828925"/>
+            <a:off x="2452687" y="4244975"/>
             <a:ext cx="742950" cy="209550"/>
           </a:xfrm>
           <a:prstGeom prst="rect">
@@ -12895,6 +16362,7 @@
           <a:lstStyle/>
           <a:p>
             <a:pPr algn="ctr"/>
+            <a:endParaRPr/>
           </a:p>
         </p:txBody>
       </p:sp>
@@ -12906,7 +16374,7 @@
         </p:nvSpPr>
         <p:spPr>
           <a:xfrm>
-            <a:off x="2324100" y="2857500"/>
+            <a:off x="2490787" y="4236566"/>
             <a:ext cx="666750" cy="152400"/>
           </a:xfrm>
           <a:prstGeom prst="rect">
@@ -12922,7 +16390,7 @@
           <a:p>
             <a:pPr algn="ctr"/>
             <a:r>
-              <a:rPr sz="900" b="0" i="0">
+              <a:rPr sz="900" b="0" i="0" dirty="0" err="1">
                 <a:solidFill>
                   <a:srgbClr val="B8CCEE"/>
                 </a:solidFill>
@@ -12930,6 +16398,12 @@
               </a:rPr>
               <a:t>Vérifient</a:t>
             </a:r>
+            <a:endParaRPr sz="900" b="0" i="0" dirty="0">
+              <a:solidFill>
+                <a:srgbClr val="B8CCEE"/>
+              </a:solidFill>
+              <a:latin typeface="DM Sans"/>
+            </a:endParaRPr>
           </a:p>
         </p:txBody>
       </p:sp>
@@ -12941,7 +16415,7 @@
         </p:nvSpPr>
         <p:spPr>
           <a:xfrm>
-            <a:off x="3105150" y="2828925"/>
+            <a:off x="3267075" y="4244975"/>
             <a:ext cx="1257300" cy="209550"/>
           </a:xfrm>
           <a:prstGeom prst="rect">
@@ -12975,6 +16449,7 @@
           <a:lstStyle/>
           <a:p>
             <a:pPr algn="ctr"/>
+            <a:endParaRPr/>
           </a:p>
         </p:txBody>
       </p:sp>
@@ -12986,8 +16461,8 @@
         </p:nvSpPr>
         <p:spPr>
           <a:xfrm>
-            <a:off x="3143250" y="2857500"/>
-            <a:ext cx="1181100" cy="152400"/>
+            <a:off x="3305175" y="4244975"/>
+            <a:ext cx="1181100" cy="230832"/>
           </a:xfrm>
           <a:prstGeom prst="rect">
             <a:avLst/>
@@ -13002,14 +16477,38 @@
           <a:p>
             <a:pPr algn="ctr"/>
             <a:r>
-              <a:rPr sz="900" b="0" i="0">
+              <a:rPr sz="900" b="0" i="0" dirty="0" err="1">
                 <a:solidFill>
                   <a:srgbClr val="B8CCEE"/>
                 </a:solidFill>
                 <a:latin typeface="DM Sans"/>
               </a:rPr>
-              <a:t>N'interprètent pas</a:t>
-            </a:r>
+              <a:t>N'interprètent</a:t>
+            </a:r>
+            <a:r>
+              <a:rPr sz="900" b="0" i="0" dirty="0">
+                <a:solidFill>
+                  <a:srgbClr val="B8CCEE"/>
+                </a:solidFill>
+                <a:latin typeface="DM Sans"/>
+              </a:rPr>
+              <a:t> pa</a:t>
+            </a:r>
+            <a:r>
+              <a:rPr lang="fr-CA" sz="900" b="0" i="0" dirty="0">
+                <a:solidFill>
+                  <a:srgbClr val="B8CCEE"/>
+                </a:solidFill>
+                <a:latin typeface="DM Sans"/>
+              </a:rPr>
+              <a:t>s</a:t>
+            </a:r>
+            <a:endParaRPr sz="900" b="0" i="0" dirty="0">
+              <a:solidFill>
+                <a:srgbClr val="B8CCEE"/>
+              </a:solidFill>
+              <a:latin typeface="DM Sans"/>
+            </a:endParaRPr>
           </a:p>
         </p:txBody>
       </p:sp>
@@ -13021,7 +16520,7 @@
         </p:nvSpPr>
         <p:spPr>
           <a:xfrm>
-            <a:off x="4438650" y="2828925"/>
+            <a:off x="4600575" y="4244975"/>
             <a:ext cx="1085850" cy="209550"/>
           </a:xfrm>
           <a:prstGeom prst="rect">
@@ -13055,6 +16554,7 @@
           <a:lstStyle/>
           <a:p>
             <a:pPr algn="ctr"/>
+            <a:endParaRPr/>
           </a:p>
         </p:txBody>
       </p:sp>
@@ -13066,8 +16566,8 @@
         </p:nvSpPr>
         <p:spPr>
           <a:xfrm>
-            <a:off x="4476750" y="2857500"/>
-            <a:ext cx="1009650" cy="152400"/>
+            <a:off x="4638675" y="4244975"/>
+            <a:ext cx="1009650" cy="230832"/>
           </a:xfrm>
           <a:prstGeom prst="rect">
             <a:avLst/>
@@ -13082,14 +16582,38 @@
           <a:p>
             <a:pPr algn="ctr"/>
             <a:r>
-              <a:rPr sz="900" b="0" i="0">
+              <a:rPr sz="900" b="0" i="0" dirty="0" err="1">
                 <a:solidFill>
                   <a:srgbClr val="B8CCEE"/>
                 </a:solidFill>
                 <a:latin typeface="DM Sans"/>
               </a:rPr>
-              <a:t>N'arbitrent pas</a:t>
-            </a:r>
+              <a:t>N'arbitrent</a:t>
+            </a:r>
+            <a:r>
+              <a:rPr sz="900" b="0" i="0" dirty="0">
+                <a:solidFill>
+                  <a:srgbClr val="B8CCEE"/>
+                </a:solidFill>
+                <a:latin typeface="DM Sans"/>
+              </a:rPr>
+              <a:t> pa</a:t>
+            </a:r>
+            <a:r>
+              <a:rPr lang="fr-CA" sz="900" b="0" i="0" dirty="0">
+                <a:solidFill>
+                  <a:srgbClr val="B8CCEE"/>
+                </a:solidFill>
+                <a:latin typeface="DM Sans"/>
+              </a:rPr>
+              <a:t>s</a:t>
+            </a:r>
+            <a:endParaRPr sz="900" b="0" i="0" dirty="0">
+              <a:solidFill>
+                <a:srgbClr val="B8CCEE"/>
+              </a:solidFill>
+              <a:latin typeface="DM Sans"/>
+            </a:endParaRPr>
           </a:p>
         </p:txBody>
       </p:sp>
@@ -13108,7 +16632,9 @@
             <a:avLst/>
           </a:prstGeom>
           <a:solidFill>
-            <a:srgbClr val="060D1A"/>
+            <a:schemeClr val="tx2">
+              <a:lumMod val="75000"/>
+            </a:schemeClr>
           </a:solidFill>
           <a:ln>
             <a:noFill/>
@@ -13133,6 +16659,7 @@
           <a:lstStyle/>
           <a:p>
             <a:pPr algn="ctr"/>
+            <a:endParaRPr/>
           </a:p>
         </p:txBody>
       </p:sp>
